--- a/templates/Template_Modern_Light.pptx
+++ b/templates/Template_Modern_Light.pptx
@@ -7,9 +7,13 @@
   <p:sldIdLst>
     <p:sldId id="256" r:id="rId2"/>
     <p:sldId id="257" r:id="rId3"/>
+    <p:sldId id="258" r:id="rId4"/>
+    <p:sldId id="259" r:id="rId5"/>
+    <p:sldId id="260" r:id="rId6"/>
+    <p:sldId id="261" r:id="rId7"/>
   </p:sldIdLst>
   <p:notesMasterIdLst>
-    <p:notesMasterId r:id="rId4"/>
+    <p:notesMasterId r:id="rId8"/>
   </p:notesMasterIdLst>
   <p:sldSz cx="12192000" cy="6858000"/>
   <p:notesSz cx="6858000" cy="12192000"/>
@@ -592,8 +596,8 @@
           <a:p>
             <a:r>
               <a:rPr lang="en-US" dirty="0"/>
-              <a:t>2. Research Findings 3 Cards
-note: [성과 발표] 지연시간 단축, 메모리 최적화, 한국어 평가 점수 3개 핵심 지표를 성공적으로 달성했습니다.</a:t>
+              <a:t>2. Academic Agenda
+note: [아젠다 발표] 연구 배경부터 경량화 기법, 벤치마크 검증까지 순서대로 발표하겠습니다.</a:t>
             </a:r>
             <a:endParaRPr lang="en-US" dirty="0"/>
           </a:p>
@@ -617,6 +621,362 @@
             <a:fld id="{F7021451-1387-4CA6-816F-3879F97B5CBC}" type="slidenum">
               <a:rPr lang="en-US"/>
               <a:t>2</a:t>
+            </a:fld>
+            <a:endParaRPr lang="en-US"/>
+          </a:p>
+        </p:txBody>
+      </p:sp>
+    </p:spTree>
+    <p:extLst>
+      <p:ext uri="{BB962C8B-B14F-4D97-AF65-F5344CB8AC3E}">
+        <p14:creationId xmlns:p14="http://schemas.microsoft.com/office/powerpoint/2010/main" val="1024086991"/>
+      </p:ext>
+    </p:extLst>
+  </p:cSld>
+  <p:clrMapOvr>
+    <a:masterClrMapping/>
+  </p:clrMapOvr>
+</p:notes>
+</file>
+
+<file path=ppt/notesSlides/notesSlide3.xml><?xml version="1.0" encoding="utf-8"?>
+<p:notes xmlns:a="http://schemas.openxmlformats.org/drawingml/2006/main" xmlns:r="http://schemas.openxmlformats.org/officeDocument/2006/relationships" xmlns:p="http://schemas.openxmlformats.org/presentationml/2006/main">
+  <p:cSld>
+    <p:spTree>
+      <p:nvGrpSpPr>
+        <p:cNvPr id="1" name=""/>
+        <p:cNvGrpSpPr/>
+        <p:nvPr/>
+      </p:nvGrpSpPr>
+      <p:grpSpPr>
+        <a:xfrm>
+          <a:off x="0" y="0"/>
+          <a:ext cx="0" cy="0"/>
+          <a:chOff x="0" y="0"/>
+          <a:chExt cx="0" cy="0"/>
+        </a:xfrm>
+      </p:grpSpPr>
+      <p:sp>
+        <p:nvSpPr>
+          <p:cNvPr id="2" name="Slide Image Placeholder 1"/>
+          <p:cNvSpPr>
+            <a:spLocks noGrp="1" noRot="1" noChangeAspect="1"/>
+          </p:cNvSpPr>
+          <p:nvPr>
+            <p:ph type="sldImg"/>
+          </p:nvPr>
+        </p:nvSpPr>
+        <p:spPr/>
+      </p:sp>
+      <p:sp>
+        <p:nvSpPr>
+          <p:cNvPr id="3" name="Notes Placeholder 2"/>
+          <p:cNvSpPr>
+            <a:spLocks noGrp="1"/>
+          </p:cNvSpPr>
+          <p:nvPr>
+            <p:ph type="body" idx="1"/>
+          </p:nvPr>
+        </p:nvSpPr>
+        <p:spPr/>
+        <p:txBody>
+          <a:bodyPr/>
+          <a:lstStyle/>
+          <a:p>
+            <a:r>
+              <a:rPr lang="en-US" dirty="0"/>
+              <a:t>3. Experimental Results (3 Cards)
+note: [연구 성과] 추론 속도, 메모리 절감, 한국어 정확도 3개 지표를 모두 충족했습니다.</a:t>
+            </a:r>
+            <a:endParaRPr lang="en-US" dirty="0"/>
+          </a:p>
+        </p:txBody>
+      </p:sp>
+      <p:sp>
+        <p:nvSpPr>
+          <p:cNvPr id="4" name="Slide Number Placeholder 3"/>
+          <p:cNvSpPr>
+            <a:spLocks noGrp="1"/>
+          </p:cNvSpPr>
+          <p:nvPr>
+            <p:ph type="sldNum" sz="quarter" idx="10"/>
+          </p:nvPr>
+        </p:nvSpPr>
+        <p:spPr/>
+        <p:txBody>
+          <a:bodyPr/>
+          <a:lstStyle/>
+          <a:p>
+            <a:fld id="{F7021451-1387-4CA6-816F-3879F97B5CBC}" type="slidenum">
+              <a:rPr lang="en-US"/>
+              <a:t>3</a:t>
+            </a:fld>
+            <a:endParaRPr lang="en-US"/>
+          </a:p>
+        </p:txBody>
+      </p:sp>
+    </p:spTree>
+    <p:extLst>
+      <p:ext uri="{BB962C8B-B14F-4D97-AF65-F5344CB8AC3E}">
+        <p14:creationId xmlns:p14="http://schemas.microsoft.com/office/powerpoint/2010/main" val="1024086991"/>
+      </p:ext>
+    </p:extLst>
+  </p:cSld>
+  <p:clrMapOvr>
+    <a:masterClrMapping/>
+  </p:clrMapOvr>
+</p:notes>
+</file>
+
+<file path=ppt/notesSlides/notesSlide4.xml><?xml version="1.0" encoding="utf-8"?>
+<p:notes xmlns:a="http://schemas.openxmlformats.org/drawingml/2006/main" xmlns:r="http://schemas.openxmlformats.org/officeDocument/2006/relationships" xmlns:p="http://schemas.openxmlformats.org/presentationml/2006/main">
+  <p:cSld>
+    <p:spTree>
+      <p:nvGrpSpPr>
+        <p:cNvPr id="1" name=""/>
+        <p:cNvGrpSpPr/>
+        <p:nvPr/>
+      </p:nvGrpSpPr>
+      <p:grpSpPr>
+        <a:xfrm>
+          <a:off x="0" y="0"/>
+          <a:ext cx="0" cy="0"/>
+          <a:chOff x="0" y="0"/>
+          <a:chExt cx="0" cy="0"/>
+        </a:xfrm>
+      </p:grpSpPr>
+      <p:sp>
+        <p:nvSpPr>
+          <p:cNvPr id="2" name="Slide Image Placeholder 1"/>
+          <p:cNvSpPr>
+            <a:spLocks noGrp="1" noRot="1" noChangeAspect="1"/>
+          </p:cNvSpPr>
+          <p:nvPr>
+            <p:ph type="sldImg"/>
+          </p:nvPr>
+        </p:nvSpPr>
+        <p:spPr/>
+      </p:sp>
+      <p:sp>
+        <p:nvSpPr>
+          <p:cNvPr id="3" name="Notes Placeholder 2"/>
+          <p:cNvSpPr>
+            <a:spLocks noGrp="1"/>
+          </p:cNvSpPr>
+          <p:nvPr>
+            <p:ph type="body" idx="1"/>
+          </p:nvPr>
+        </p:nvSpPr>
+        <p:spPr/>
+        <p:txBody>
+          <a:bodyPr/>
+          <a:lstStyle/>
+          <a:p>
+            <a:r>
+              <a:rPr lang="en-US" dirty="0"/>
+              <a:t>4. Optimization Pipeline
+note: [파이프라인] AWQ, KV Pruning, NPU 가속의 3단계 파이프라인 구조를 설명합니다.</a:t>
+            </a:r>
+            <a:endParaRPr lang="en-US" dirty="0"/>
+          </a:p>
+        </p:txBody>
+      </p:sp>
+      <p:sp>
+        <p:nvSpPr>
+          <p:cNvPr id="4" name="Slide Number Placeholder 3"/>
+          <p:cNvSpPr>
+            <a:spLocks noGrp="1"/>
+          </p:cNvSpPr>
+          <p:nvPr>
+            <p:ph type="sldNum" sz="quarter" idx="10"/>
+          </p:nvPr>
+        </p:nvSpPr>
+        <p:spPr/>
+        <p:txBody>
+          <a:bodyPr/>
+          <a:lstStyle/>
+          <a:p>
+            <a:fld id="{F7021451-1387-4CA6-816F-3879F97B5CBC}" type="slidenum">
+              <a:rPr lang="en-US"/>
+              <a:t>4</a:t>
+            </a:fld>
+            <a:endParaRPr lang="en-US"/>
+          </a:p>
+        </p:txBody>
+      </p:sp>
+    </p:spTree>
+    <p:extLst>
+      <p:ext uri="{BB962C8B-B14F-4D97-AF65-F5344CB8AC3E}">
+        <p14:creationId xmlns:p14="http://schemas.microsoft.com/office/powerpoint/2010/main" val="1024086991"/>
+      </p:ext>
+    </p:extLst>
+  </p:cSld>
+  <p:clrMapOvr>
+    <a:masterClrMapping/>
+  </p:clrMapOvr>
+</p:notes>
+</file>
+
+<file path=ppt/notesSlides/notesSlide5.xml><?xml version="1.0" encoding="utf-8"?>
+<p:notes xmlns:a="http://schemas.openxmlformats.org/drawingml/2006/main" xmlns:r="http://schemas.openxmlformats.org/officeDocument/2006/relationships" xmlns:p="http://schemas.openxmlformats.org/presentationml/2006/main">
+  <p:cSld>
+    <p:spTree>
+      <p:nvGrpSpPr>
+        <p:cNvPr id="1" name=""/>
+        <p:cNvGrpSpPr/>
+        <p:nvPr/>
+      </p:nvGrpSpPr>
+      <p:grpSpPr>
+        <a:xfrm>
+          <a:off x="0" y="0"/>
+          <a:ext cx="0" cy="0"/>
+          <a:chOff x="0" y="0"/>
+          <a:chExt cx="0" cy="0"/>
+        </a:xfrm>
+      </p:grpSpPr>
+      <p:sp>
+        <p:nvSpPr>
+          <p:cNvPr id="2" name="Slide Image Placeholder 1"/>
+          <p:cNvSpPr>
+            <a:spLocks noGrp="1" noRot="1" noChangeAspect="1"/>
+          </p:cNvSpPr>
+          <p:nvPr>
+            <p:ph type="sldImg"/>
+          </p:nvPr>
+        </p:nvSpPr>
+        <p:spPr/>
+      </p:sp>
+      <p:sp>
+        <p:nvSpPr>
+          <p:cNvPr id="3" name="Notes Placeholder 2"/>
+          <p:cNvSpPr>
+            <a:spLocks noGrp="1"/>
+          </p:cNvSpPr>
+          <p:nvPr>
+            <p:ph type="body" idx="1"/>
+          </p:nvPr>
+        </p:nvSpPr>
+        <p:spPr/>
+        <p:txBody>
+          <a:bodyPr/>
+          <a:lstStyle/>
+          <a:p>
+            <a:r>
+              <a:rPr lang="en-US" dirty="0"/>
+              <a:t>5. Comparative Evaluation Matrix
+note: [비교 평가] 처리 지연시간 68% 단축과 메모리 66% 절감의 뛰어난 정량적 성과를 강조합니다.</a:t>
+            </a:r>
+            <a:endParaRPr lang="en-US" dirty="0"/>
+          </a:p>
+        </p:txBody>
+      </p:sp>
+      <p:sp>
+        <p:nvSpPr>
+          <p:cNvPr id="4" name="Slide Number Placeholder 3"/>
+          <p:cNvSpPr>
+            <a:spLocks noGrp="1"/>
+          </p:cNvSpPr>
+          <p:nvPr>
+            <p:ph type="sldNum" sz="quarter" idx="10"/>
+          </p:nvPr>
+        </p:nvSpPr>
+        <p:spPr/>
+        <p:txBody>
+          <a:bodyPr/>
+          <a:lstStyle/>
+          <a:p>
+            <a:fld id="{F7021451-1387-4CA6-816F-3879F97B5CBC}" type="slidenum">
+              <a:rPr lang="en-US"/>
+              <a:t>5</a:t>
+            </a:fld>
+            <a:endParaRPr lang="en-US"/>
+          </a:p>
+        </p:txBody>
+      </p:sp>
+    </p:spTree>
+    <p:extLst>
+      <p:ext uri="{BB962C8B-B14F-4D97-AF65-F5344CB8AC3E}">
+        <p14:creationId xmlns:p14="http://schemas.microsoft.com/office/powerpoint/2010/main" val="1024086991"/>
+      </p:ext>
+    </p:extLst>
+  </p:cSld>
+  <p:clrMapOvr>
+    <a:masterClrMapping/>
+  </p:clrMapOvr>
+</p:notes>
+</file>
+
+<file path=ppt/notesSlides/notesSlide6.xml><?xml version="1.0" encoding="utf-8"?>
+<p:notes xmlns:a="http://schemas.openxmlformats.org/drawingml/2006/main" xmlns:r="http://schemas.openxmlformats.org/officeDocument/2006/relationships" xmlns:p="http://schemas.openxmlformats.org/presentationml/2006/main">
+  <p:cSld>
+    <p:spTree>
+      <p:nvGrpSpPr>
+        <p:cNvPr id="1" name=""/>
+        <p:cNvGrpSpPr/>
+        <p:nvPr/>
+      </p:nvGrpSpPr>
+      <p:grpSpPr>
+        <a:xfrm>
+          <a:off x="0" y="0"/>
+          <a:ext cx="0" cy="0"/>
+          <a:chOff x="0" y="0"/>
+          <a:chExt cx="0" cy="0"/>
+        </a:xfrm>
+      </p:grpSpPr>
+      <p:sp>
+        <p:nvSpPr>
+          <p:cNvPr id="2" name="Slide Image Placeholder 1"/>
+          <p:cNvSpPr>
+            <a:spLocks noGrp="1" noRot="1" noChangeAspect="1"/>
+          </p:cNvSpPr>
+          <p:nvPr>
+            <p:ph type="sldImg"/>
+          </p:nvPr>
+        </p:nvSpPr>
+        <p:spPr/>
+      </p:sp>
+      <p:sp>
+        <p:nvSpPr>
+          <p:cNvPr id="3" name="Notes Placeholder 2"/>
+          <p:cNvSpPr>
+            <a:spLocks noGrp="1"/>
+          </p:cNvSpPr>
+          <p:nvPr>
+            <p:ph type="body" idx="1"/>
+          </p:nvPr>
+        </p:nvSpPr>
+        <p:spPr/>
+        <p:txBody>
+          <a:bodyPr/>
+          <a:lstStyle/>
+          <a:p>
+            <a:r>
+              <a:rPr lang="en-US" dirty="0"/>
+              <a:t>6. Academic Closing &amp; Q&amp;A Hub
+note: [마무리 발표] 연구 결론을 요약하고 오픈소스 저장소를 안내합니다. 질문해 주시면 성실히 답변드리겠습니다. 감사합니다.</a:t>
+            </a:r>
+            <a:endParaRPr lang="en-US" dirty="0"/>
+          </a:p>
+        </p:txBody>
+      </p:sp>
+      <p:sp>
+        <p:nvSpPr>
+          <p:cNvPr id="4" name="Slide Number Placeholder 3"/>
+          <p:cNvSpPr>
+            <a:spLocks noGrp="1"/>
+          </p:cNvSpPr>
+          <p:nvPr>
+            <p:ph type="sldNum" sz="quarter" idx="10"/>
+          </p:nvPr>
+        </p:nvSpPr>
+        <p:spPr/>
+        <p:txBody>
+          <a:bodyPr/>
+          <a:lstStyle/>
+          <a:p>
+            <a:fld id="{F7021451-1387-4CA6-816F-3879F97B5CBC}" type="slidenum">
+              <a:rPr lang="en-US"/>
+              <a:t>6</a:t>
             </a:fld>
             <a:endParaRPr lang="en-US"/>
           </a:p>
@@ -984,6 +1344,162 @@
 <file path=ppt/slides/slide2.xml><?xml version="1.0" encoding="utf-8"?>
 <p:sld xmlns:a="http://schemas.openxmlformats.org/drawingml/2006/main" xmlns:r="http://schemas.openxmlformats.org/officeDocument/2006/relationships" xmlns:p="http://schemas.openxmlformats.org/presentationml/2006/main">
   <p:cSld name="Slide 2">
+    <p:bg>
+      <p:bgPr>
+        <a:blipFill dpi="0" rotWithShape="1">
+          <a:blip r:embed="rId1">
+            <a:lum/>
+          </a:blip>
+          <a:srcRect/>
+          <a:stretch>
+            <a:fillRect/>
+          </a:stretch>
+        </a:blipFill>
+        <a:effectLst/>
+      </p:bgPr>
+    </p:bg>
+    <p:spTree>
+      <p:nvGrpSpPr>
+        <p:cNvPr id="1" name=""/>
+        <p:cNvGrpSpPr/>
+        <p:nvPr/>
+      </p:nvGrpSpPr>
+      <p:grpSpPr>
+        <a:xfrm>
+          <a:off x="0" y="0"/>
+          <a:ext cx="0" cy="0"/>
+          <a:chOff x="0" y="0"/>
+          <a:chExt cx="0" cy="0"/>
+        </a:xfrm>
+      </p:grpSpPr>
+    </p:spTree>
+  </p:cSld>
+  <p:clrMapOvr>
+    <a:masterClrMapping/>
+  </p:clrMapOvr>
+</p:sld>
+</file>
+
+<file path=ppt/slides/slide3.xml><?xml version="1.0" encoding="utf-8"?>
+<p:sld xmlns:a="http://schemas.openxmlformats.org/drawingml/2006/main" xmlns:r="http://schemas.openxmlformats.org/officeDocument/2006/relationships" xmlns:p="http://schemas.openxmlformats.org/presentationml/2006/main">
+  <p:cSld name="Slide 3">
+    <p:bg>
+      <p:bgPr>
+        <a:blipFill dpi="0" rotWithShape="1">
+          <a:blip r:embed="rId1">
+            <a:lum/>
+          </a:blip>
+          <a:srcRect/>
+          <a:stretch>
+            <a:fillRect/>
+          </a:stretch>
+        </a:blipFill>
+        <a:effectLst/>
+      </p:bgPr>
+    </p:bg>
+    <p:spTree>
+      <p:nvGrpSpPr>
+        <p:cNvPr id="1" name=""/>
+        <p:cNvGrpSpPr/>
+        <p:nvPr/>
+      </p:nvGrpSpPr>
+      <p:grpSpPr>
+        <a:xfrm>
+          <a:off x="0" y="0"/>
+          <a:ext cx="0" cy="0"/>
+          <a:chOff x="0" y="0"/>
+          <a:chExt cx="0" cy="0"/>
+        </a:xfrm>
+      </p:grpSpPr>
+    </p:spTree>
+  </p:cSld>
+  <p:clrMapOvr>
+    <a:masterClrMapping/>
+  </p:clrMapOvr>
+</p:sld>
+</file>
+
+<file path=ppt/slides/slide4.xml><?xml version="1.0" encoding="utf-8"?>
+<p:sld xmlns:a="http://schemas.openxmlformats.org/drawingml/2006/main" xmlns:r="http://schemas.openxmlformats.org/officeDocument/2006/relationships" xmlns:p="http://schemas.openxmlformats.org/presentationml/2006/main">
+  <p:cSld name="Slide 4">
+    <p:bg>
+      <p:bgPr>
+        <a:blipFill dpi="0" rotWithShape="1">
+          <a:blip r:embed="rId1">
+            <a:lum/>
+          </a:blip>
+          <a:srcRect/>
+          <a:stretch>
+            <a:fillRect/>
+          </a:stretch>
+        </a:blipFill>
+        <a:effectLst/>
+      </p:bgPr>
+    </p:bg>
+    <p:spTree>
+      <p:nvGrpSpPr>
+        <p:cNvPr id="1" name=""/>
+        <p:cNvGrpSpPr/>
+        <p:nvPr/>
+      </p:nvGrpSpPr>
+      <p:grpSpPr>
+        <a:xfrm>
+          <a:off x="0" y="0"/>
+          <a:ext cx="0" cy="0"/>
+          <a:chOff x="0" y="0"/>
+          <a:chExt cx="0" cy="0"/>
+        </a:xfrm>
+      </p:grpSpPr>
+    </p:spTree>
+  </p:cSld>
+  <p:clrMapOvr>
+    <a:masterClrMapping/>
+  </p:clrMapOvr>
+</p:sld>
+</file>
+
+<file path=ppt/slides/slide5.xml><?xml version="1.0" encoding="utf-8"?>
+<p:sld xmlns:a="http://schemas.openxmlformats.org/drawingml/2006/main" xmlns:r="http://schemas.openxmlformats.org/officeDocument/2006/relationships" xmlns:p="http://schemas.openxmlformats.org/presentationml/2006/main">
+  <p:cSld name="Slide 5">
+    <p:bg>
+      <p:bgPr>
+        <a:blipFill dpi="0" rotWithShape="1">
+          <a:blip r:embed="rId1">
+            <a:lum/>
+          </a:blip>
+          <a:srcRect/>
+          <a:stretch>
+            <a:fillRect/>
+          </a:stretch>
+        </a:blipFill>
+        <a:effectLst/>
+      </p:bgPr>
+    </p:bg>
+    <p:spTree>
+      <p:nvGrpSpPr>
+        <p:cNvPr id="1" name=""/>
+        <p:cNvGrpSpPr/>
+        <p:nvPr/>
+      </p:nvGrpSpPr>
+      <p:grpSpPr>
+        <a:xfrm>
+          <a:off x="0" y="0"/>
+          <a:ext cx="0" cy="0"/>
+          <a:chOff x="0" y="0"/>
+          <a:chExt cx="0" cy="0"/>
+        </a:xfrm>
+      </p:grpSpPr>
+    </p:spTree>
+  </p:cSld>
+  <p:clrMapOvr>
+    <a:masterClrMapping/>
+  </p:clrMapOvr>
+</p:sld>
+</file>
+
+<file path=ppt/slides/slide6.xml><?xml version="1.0" encoding="utf-8"?>
+<p:sld xmlns:a="http://schemas.openxmlformats.org/drawingml/2006/main" xmlns:r="http://schemas.openxmlformats.org/officeDocument/2006/relationships" xmlns:p="http://schemas.openxmlformats.org/presentationml/2006/main">
+  <p:cSld name="Slide 6">
     <p:bg>
       <p:bgPr>
         <a:blipFill dpi="0" rotWithShape="1">

--- a/templates/Template_Modern_Light.pptx
+++ b/templates/Template_Modern_Light.pptx
@@ -507,8 +507,7 @@
           <a:p>
             <a:r>
               <a:rPr lang="en-US" dirty="0"/>
-              <a:t>1. Academic &amp; Research Cover Slide
-note: [학술 발표 오프닝] 모바일 온디바이스 환경에서 소형 언어 모델의 추론 성능을 극대화하기 위한 연구 결과를 발표합니다.</a:t>
+              <a:t>[학술 발표 오프닝] 모바일 온디바이스 환경에서 소형 언어 모델의 추론 성능을 극대화하기 위한 연구 결과를 발표합니다.</a:t>
             </a:r>
             <a:endParaRPr lang="en-US" dirty="0"/>
           </a:p>
@@ -596,8 +595,7 @@
           <a:p>
             <a:r>
               <a:rPr lang="en-US" dirty="0"/>
-              <a:t>2. Academic Agenda
-note: [아젠다 발표] 연구 배경부터 경량화 기법, 벤치마크 검증까지 순서대로 발표하겠습니다.</a:t>
+              <a:t>[아젠다 발표] 연구 배경부터 경량화 기법, 벤치마크 검증까지 순서대로 발표하겠습니다.</a:t>
             </a:r>
             <a:endParaRPr lang="en-US" dirty="0"/>
           </a:p>
@@ -685,8 +683,7 @@
           <a:p>
             <a:r>
               <a:rPr lang="en-US" dirty="0"/>
-              <a:t>3. Experimental Results (3 Cards)
-note: [연구 성과] 추론 속도, 메모리 절감, 한국어 정확도 3개 지표를 모두 충족했습니다.</a:t>
+              <a:t>[연구 성과] 추론 속도, 메모리 절감, 한국어 정확도 3개 지표를 모두 충족했습니다.</a:t>
             </a:r>
             <a:endParaRPr lang="en-US" dirty="0"/>
           </a:p>
@@ -774,8 +771,7 @@
           <a:p>
             <a:r>
               <a:rPr lang="en-US" dirty="0"/>
-              <a:t>4. Optimization Pipeline
-note: [파이프라인] AWQ, KV Pruning, NPU 가속의 3단계 파이프라인 구조를 설명합니다.</a:t>
+              <a:t>[파이프라인] AWQ, KV Pruning, NPU 가속의 3단계 파이프라인 구조를 설명합니다.</a:t>
             </a:r>
             <a:endParaRPr lang="en-US" dirty="0"/>
           </a:p>
@@ -863,8 +859,7 @@
           <a:p>
             <a:r>
               <a:rPr lang="en-US" dirty="0"/>
-              <a:t>5. Comparative Evaluation Matrix
-note: [비교 평가] 처리 지연시간 68% 단축과 메모리 66% 절감의 뛰어난 정량적 성과를 강조합니다.</a:t>
+              <a:t>[비교 평가] 처리 지연시간 68% 단축과 메모리 66% 절감의 뛰어난 정량적 성과를 강조합니다.</a:t>
             </a:r>
             <a:endParaRPr lang="en-US" dirty="0"/>
           </a:p>
@@ -952,8 +947,7 @@
           <a:p>
             <a:r>
               <a:rPr lang="en-US" dirty="0"/>
-              <a:t>6. Academic Closing &amp; Q&amp;A Hub
-note: [마무리 발표] 연구 결론을 요약하고 오픈소스 저장소를 안내합니다. 질문해 주시면 성실히 답변드리겠습니다. 감사합니다.</a:t>
+              <a:t>[마무리 발표] 연구 결론을 요약하고 오픈소스 저장소를 안내합니다. 질문해 주시면 성실히 답변드리겠습니다. 감사합니다.</a:t>
             </a:r>
             <a:endParaRPr lang="en-US" dirty="0"/>
           </a:p>
@@ -1307,16 +1301,9 @@
   <p:cSld name="Slide 1">
     <p:bg>
       <p:bgPr>
-        <a:blipFill dpi="0" rotWithShape="1">
-          <a:blip r:embed="rId1">
-            <a:lum/>
-          </a:blip>
-          <a:srcRect/>
-          <a:stretch>
-            <a:fillRect/>
-          </a:stretch>
-        </a:blipFill>
-        <a:effectLst/>
+        <a:solidFill>
+          <a:srgbClr val="F8FAFC"/>
+        </a:solidFill>
       </p:bgPr>
     </p:bg>
     <p:spTree>
@@ -1333,6 +1320,544 @@
           <a:chExt cx="0" cy="0"/>
         </a:xfrm>
       </p:grpSpPr>
+      <p:sp>
+        <p:nvSpPr>
+          <p:cNvPr id="2" name="Shape 0"/>
+          <p:cNvSpPr/>
+          <p:nvPr/>
+        </p:nvSpPr>
+        <p:spPr>
+          <a:xfrm>
+            <a:off x="552480" y="438180"/>
+            <a:ext cx="3942253" cy="418521"/>
+          </a:xfrm>
+          <a:prstGeom prst="roundRect">
+            <a:avLst>
+              <a:gd name="adj" fmla="val 50011"/>
+            </a:avLst>
+          </a:prstGeom>
+          <a:solidFill>
+            <a:srgbClr val="4F46E5">
+              <a:alpha val="10000"/>
+            </a:srgbClr>
+          </a:solidFill>
+          <a:ln w="9525">
+            <a:solidFill>
+              <a:srgbClr val="4F46E5">
+                <a:alpha val="25000"/>
+              </a:srgbClr>
+            </a:solidFill>
+            <a:prstDash val="solid"/>
+          </a:ln>
+        </p:spPr>
+      </p:sp>
+      <p:sp>
+        <p:nvSpPr>
+          <p:cNvPr id="3" name="Text 1"/>
+          <p:cNvSpPr txBox="1"/>
+          <p:nvPr/>
+        </p:nvSpPr>
+        <p:spPr>
+          <a:xfrm>
+            <a:off x="676290" y="481432"/>
+            <a:ext cx="3968039" cy="323149"/>
+          </a:xfrm>
+          <a:prstGeom prst="rect">
+            <a:avLst/>
+          </a:prstGeom>
+          <a:noFill/>
+          <a:ln/>
+        </p:spPr>
+        <p:txBody>
+          <a:bodyPr wrap="none" lIns="0" tIns="0" rIns="0" bIns="0" rtlCol="0" anchor="t"/>
+          <a:lstStyle/>
+          <a:p>
+            <a:pPr algn="l" indent="0" marL="0">
+              <a:lnSpc>
+                <a:spcPts val="2545"/>
+              </a:lnSpc>
+              <a:buNone/>
+            </a:pPr>
+            <a:r>
+              <a:rPr lang="en-US" sz="1697" b="1" spc="34" kern="0" dirty="0">
+                <a:solidFill>
+                  <a:srgbClr val="4F46E5"/>
+                </a:solidFill>
+                <a:latin typeface="Malgun Gothic" pitchFamily="34" charset="0"/>
+                <a:ea typeface="Malgun Gothic" pitchFamily="34" charset="-122"/>
+                <a:cs typeface="Malgun Gothic" pitchFamily="34" charset="-120"/>
+              </a:rPr>
+              <a:t>CONFERENCE PAPER &amp; RESEARCH</a:t>
+            </a:r>
+            <a:endParaRPr lang="en-US" sz="1697" dirty="0"/>
+          </a:p>
+        </p:txBody>
+      </p:sp>
+      <p:sp>
+        <p:nvSpPr>
+          <p:cNvPr id="4" name="Text 2"/>
+          <p:cNvSpPr txBox="1"/>
+          <p:nvPr/>
+        </p:nvSpPr>
+        <p:spPr>
+          <a:xfrm>
+            <a:off x="533370" y="1040679"/>
+            <a:ext cx="11125230" cy="1682953"/>
+          </a:xfrm>
+          <a:prstGeom prst="rect">
+            <a:avLst/>
+          </a:prstGeom>
+          <a:noFill/>
+          <a:ln/>
+        </p:spPr>
+        <p:txBody>
+          <a:bodyPr wrap="square" lIns="0" tIns="0" rIns="0" bIns="0" rtlCol="0" anchor="t"/>
+          <a:lstStyle/>
+          <a:p>
+            <a:pPr algn="l" indent="0" marL="0">
+              <a:lnSpc>
+                <a:spcPts val="6626"/>
+              </a:lnSpc>
+              <a:buNone/>
+            </a:pPr>
+            <a:r>
+              <a:rPr lang="en-US" sz="5177" b="1" spc="-155" kern="0" dirty="0">
+                <a:solidFill>
+                  <a:srgbClr val="0F172A"/>
+                </a:solidFill>
+                <a:latin typeface="Malgun Gothic" pitchFamily="34" charset="0"/>
+                <a:ea typeface="Malgun Gothic" pitchFamily="34" charset="-122"/>
+                <a:cs typeface="Malgun Gothic" pitchFamily="34" charset="-120"/>
+              </a:rPr>
+              <a:t>온디바이스 소형 언어 모델(sLLM)을 활용한</a:t>
+            </a:r>
+            <a:pPr algn="l" indent="0" marL="0">
+              <a:lnSpc>
+                <a:spcPts val="6626"/>
+              </a:lnSpc>
+              <a:buNone/>
+            </a:pPr>
+            <a:endParaRPr lang="en-US" sz="5177" dirty="0"/>
+          </a:p>
+          <a:p>
+            <a:pPr algn="l" indent="0" marL="0">
+              <a:lnSpc>
+                <a:spcPts val="6626"/>
+              </a:lnSpc>
+              <a:buNone/>
+            </a:pPr>
+            <a:r>
+              <a:rPr lang="en-US" sz="5177" b="1" spc="-155" kern="0" dirty="0">
+                <a:solidFill>
+                  <a:srgbClr val="0F172A"/>
+                </a:solidFill>
+                <a:latin typeface="Malgun Gothic" pitchFamily="34" charset="0"/>
+                <a:ea typeface="Malgun Gothic" pitchFamily="34" charset="-122"/>
+                <a:cs typeface="Malgun Gothic" pitchFamily="34" charset="-120"/>
+              </a:rPr>
+              <a:t> </a:t>
+            </a:r>
+            <a:endParaRPr lang="en-US" sz="5177" dirty="0"/>
+          </a:p>
+          <a:p>
+            <a:pPr algn="l" indent="0" marL="0">
+              <a:lnSpc>
+                <a:spcPts val="6626"/>
+              </a:lnSpc>
+              <a:buNone/>
+            </a:pPr>
+            <a:r>
+              <a:rPr lang="en-US" sz="5177" b="1" spc="-155" kern="0" dirty="0">
+                <a:solidFill>
+                  <a:srgbClr val="4F46E5"/>
+                </a:solidFill>
+                <a:latin typeface="Malgun Gothic" pitchFamily="34" charset="0"/>
+                <a:ea typeface="Malgun Gothic" pitchFamily="34" charset="-122"/>
+                <a:cs typeface="Malgun Gothic" pitchFamily="34" charset="-120"/>
+              </a:rPr>
+              <a:t>실시간 한국어 문맥 추론 및 요약 엔진</a:t>
+            </a:r>
+            <a:endParaRPr lang="en-US" sz="5177" dirty="0"/>
+          </a:p>
+        </p:txBody>
+      </p:sp>
+      <p:sp>
+        <p:nvSpPr>
+          <p:cNvPr id="5" name="Text 3"/>
+          <p:cNvSpPr txBox="1"/>
+          <p:nvPr/>
+        </p:nvSpPr>
+        <p:spPr>
+          <a:xfrm>
+            <a:off x="533370" y="3032425"/>
+            <a:ext cx="11993088" cy="256032"/>
+          </a:xfrm>
+          <a:prstGeom prst="rect">
+            <a:avLst/>
+          </a:prstGeom>
+          <a:noFill/>
+          <a:ln/>
+        </p:spPr>
+        <p:txBody>
+          <a:bodyPr wrap="none" lIns="0" tIns="0" rIns="0" bIns="0" rtlCol="0" anchor="t"/>
+          <a:lstStyle/>
+          <a:p>
+            <a:pPr algn="l" indent="0" marL="0">
+              <a:lnSpc>
+                <a:spcPts val="2016"/>
+              </a:lnSpc>
+              <a:buNone/>
+            </a:pPr>
+            <a:r>
+              <a:rPr lang="en-US" sz="1344" spc="-54" kern="0" dirty="0">
+                <a:solidFill>
+                  <a:srgbClr val="64748B"/>
+                </a:solidFill>
+                <a:latin typeface="Malgun Gothic" pitchFamily="34" charset="0"/>
+                <a:ea typeface="Malgun Gothic" pitchFamily="34" charset="-122"/>
+                <a:cs typeface="Malgun Gothic" pitchFamily="34" charset="-120"/>
+              </a:rPr>
+              <a:t>모바일 엣지 디바이스 환경에서 메모리 사용량 최적화와 추론 지연시간 단축에 관한 연구</a:t>
+            </a:r>
+            <a:endParaRPr lang="en-US" sz="1344" dirty="0"/>
+          </a:p>
+        </p:txBody>
+      </p:sp>
+      <p:sp>
+        <p:nvSpPr>
+          <p:cNvPr id="6" name="Shape 4"/>
+          <p:cNvSpPr/>
+          <p:nvPr/>
+        </p:nvSpPr>
+        <p:spPr>
+          <a:xfrm>
+            <a:off x="552480" y="5153284"/>
+            <a:ext cx="3818992" cy="1285555"/>
+          </a:xfrm>
+          <a:prstGeom prst="roundRect">
+            <a:avLst>
+              <a:gd name="adj" fmla="val 8891"/>
+            </a:avLst>
+          </a:prstGeom>
+          <a:solidFill>
+            <a:srgbClr val="FFFFFF"/>
+          </a:solidFill>
+          <a:ln w="9525">
+            <a:solidFill>
+              <a:srgbClr val="E2E8F0"/>
+            </a:solidFill>
+            <a:prstDash val="solid"/>
+          </a:ln>
+        </p:spPr>
+      </p:sp>
+      <p:sp>
+        <p:nvSpPr>
+          <p:cNvPr id="7" name="Text 5"/>
+          <p:cNvSpPr txBox="1"/>
+          <p:nvPr/>
+        </p:nvSpPr>
+        <p:spPr>
+          <a:xfrm>
+            <a:off x="714421" y="5457139"/>
+            <a:ext cx="3752606" cy="290048"/>
+          </a:xfrm>
+          <a:prstGeom prst="rect">
+            <a:avLst/>
+          </a:prstGeom>
+          <a:noFill/>
+          <a:ln/>
+        </p:spPr>
+        <p:txBody>
+          <a:bodyPr wrap="none" lIns="0" tIns="0" rIns="0" bIns="0" rtlCol="0" anchor="t"/>
+          <a:lstStyle/>
+          <a:p>
+            <a:pPr algn="l" indent="0" marL="0">
+              <a:lnSpc>
+                <a:spcPts val="2284"/>
+              </a:lnSpc>
+              <a:buNone/>
+            </a:pPr>
+            <a:r>
+              <a:rPr lang="en-US" sz="1523" b="1" spc="76" kern="0" dirty="0">
+                <a:solidFill>
+                  <a:srgbClr val="4F46E5"/>
+                </a:solidFill>
+                <a:latin typeface="Malgun Gothic" pitchFamily="34" charset="0"/>
+                <a:ea typeface="Malgun Gothic" pitchFamily="34" charset="-122"/>
+                <a:cs typeface="Malgun Gothic" pitchFamily="34" charset="-120"/>
+              </a:rPr>
+              <a:t>AUTHORS &amp; LAB</a:t>
+            </a:r>
+            <a:endParaRPr lang="en-US" sz="1523" dirty="0"/>
+          </a:p>
+        </p:txBody>
+      </p:sp>
+      <p:sp>
+        <p:nvSpPr>
+          <p:cNvPr id="8" name="Text 6"/>
+          <p:cNvSpPr txBox="1"/>
+          <p:nvPr/>
+        </p:nvSpPr>
+        <p:spPr>
+          <a:xfrm>
+            <a:off x="714421" y="5766938"/>
+            <a:ext cx="3752606" cy="364663"/>
+          </a:xfrm>
+          <a:prstGeom prst="rect">
+            <a:avLst/>
+          </a:prstGeom>
+          <a:noFill/>
+          <a:ln/>
+        </p:spPr>
+        <p:txBody>
+          <a:bodyPr wrap="none" lIns="0" tIns="0" rIns="0" bIns="0" rtlCol="0" anchor="t"/>
+          <a:lstStyle/>
+          <a:p>
+            <a:pPr algn="l" indent="0" marL="0">
+              <a:lnSpc>
+                <a:spcPts val="2871"/>
+              </a:lnSpc>
+              <a:buNone/>
+            </a:pPr>
+            <a:r>
+              <a:rPr lang="en-US" sz="1914" b="1" spc="-54" kern="0" dirty="0">
+                <a:solidFill>
+                  <a:srgbClr val="0F172A"/>
+                </a:solidFill>
+                <a:latin typeface="Malgun Gothic" pitchFamily="34" charset="0"/>
+                <a:ea typeface="Malgun Gothic" pitchFamily="34" charset="-122"/>
+                <a:cs typeface="Malgun Gothic" pitchFamily="34" charset="-120"/>
+              </a:rPr>
+              <a:t>인공지능연구소 자연어처리팀</a:t>
+            </a:r>
+            <a:endParaRPr lang="en-US" sz="1914" dirty="0"/>
+          </a:p>
+        </p:txBody>
+      </p:sp>
+      <p:sp>
+        <p:nvSpPr>
+          <p:cNvPr id="9" name="Shape 7"/>
+          <p:cNvSpPr/>
+          <p:nvPr/>
+        </p:nvSpPr>
+        <p:spPr>
+          <a:xfrm>
+            <a:off x="4504792" y="5153284"/>
+            <a:ext cx="3182386" cy="1285555"/>
+          </a:xfrm>
+          <a:prstGeom prst="roundRect">
+            <a:avLst>
+              <a:gd name="adj" fmla="val 8891"/>
+            </a:avLst>
+          </a:prstGeom>
+          <a:solidFill>
+            <a:srgbClr val="FFFFFF"/>
+          </a:solidFill>
+          <a:ln w="9525">
+            <a:solidFill>
+              <a:srgbClr val="E2E8F0"/>
+            </a:solidFill>
+            <a:prstDash val="solid"/>
+          </a:ln>
+        </p:spPr>
+      </p:sp>
+      <p:sp>
+        <p:nvSpPr>
+          <p:cNvPr id="10" name="Text 8"/>
+          <p:cNvSpPr txBox="1"/>
+          <p:nvPr/>
+        </p:nvSpPr>
+        <p:spPr>
+          <a:xfrm>
+            <a:off x="4666640" y="5275082"/>
+            <a:ext cx="3065160" cy="290048"/>
+          </a:xfrm>
+          <a:prstGeom prst="rect">
+            <a:avLst/>
+          </a:prstGeom>
+          <a:noFill/>
+          <a:ln/>
+        </p:spPr>
+        <p:txBody>
+          <a:bodyPr wrap="none" lIns="0" tIns="0" rIns="0" bIns="0" rtlCol="0" anchor="t"/>
+          <a:lstStyle/>
+          <a:p>
+            <a:pPr algn="l" indent="0" marL="0">
+              <a:lnSpc>
+                <a:spcPts val="2284"/>
+              </a:lnSpc>
+              <a:buNone/>
+            </a:pPr>
+            <a:r>
+              <a:rPr lang="en-US" sz="1523" b="1" spc="76" kern="0" dirty="0">
+                <a:solidFill>
+                  <a:srgbClr val="4F46E5"/>
+                </a:solidFill>
+                <a:latin typeface="Malgun Gothic" pitchFamily="34" charset="0"/>
+                <a:ea typeface="Malgun Gothic" pitchFamily="34" charset="-122"/>
+                <a:cs typeface="Malgun Gothic" pitchFamily="34" charset="-120"/>
+              </a:rPr>
+              <a:t>SYMPOSIUM &amp; SESSION</a:t>
+            </a:r>
+            <a:endParaRPr lang="en-US" sz="1523" dirty="0"/>
+          </a:p>
+        </p:txBody>
+      </p:sp>
+      <p:sp>
+        <p:nvSpPr>
+          <p:cNvPr id="11" name="Text 9"/>
+          <p:cNvSpPr txBox="1"/>
+          <p:nvPr/>
+        </p:nvSpPr>
+        <p:spPr>
+          <a:xfrm>
+            <a:off x="4666640" y="5584698"/>
+            <a:ext cx="2858506" cy="729234"/>
+          </a:xfrm>
+          <a:prstGeom prst="rect">
+            <a:avLst/>
+          </a:prstGeom>
+          <a:noFill/>
+          <a:ln/>
+        </p:spPr>
+        <p:txBody>
+          <a:bodyPr wrap="square" lIns="0" tIns="0" rIns="0" bIns="0" rtlCol="0" anchor="t"/>
+          <a:lstStyle/>
+          <a:p>
+            <a:pPr algn="l" indent="0" marL="0">
+              <a:lnSpc>
+                <a:spcPts val="2871"/>
+              </a:lnSpc>
+              <a:buNone/>
+            </a:pPr>
+            <a:r>
+              <a:rPr lang="en-US" sz="1914" b="1" spc="-54" kern="0" dirty="0">
+                <a:solidFill>
+                  <a:srgbClr val="0F172A"/>
+                </a:solidFill>
+                <a:latin typeface="Malgun Gothic" pitchFamily="34" charset="0"/>
+                <a:ea typeface="Malgun Gothic" pitchFamily="34" charset="-122"/>
+                <a:cs typeface="Malgun Gothic" pitchFamily="34" charset="-120"/>
+              </a:rPr>
+              <a:t>2026 AI Symposium • Edge Track</a:t>
+            </a:r>
+            <a:endParaRPr lang="en-US" sz="1914" dirty="0"/>
+          </a:p>
+        </p:txBody>
+      </p:sp>
+      <p:sp>
+        <p:nvSpPr>
+          <p:cNvPr id="12" name="Shape 10"/>
+          <p:cNvSpPr/>
+          <p:nvPr/>
+        </p:nvSpPr>
+        <p:spPr>
+          <a:xfrm>
+            <a:off x="7820497" y="5153284"/>
+            <a:ext cx="3819083" cy="1285555"/>
+          </a:xfrm>
+          <a:prstGeom prst="roundRect">
+            <a:avLst>
+              <a:gd name="adj" fmla="val 8891"/>
+            </a:avLst>
+          </a:prstGeom>
+          <a:solidFill>
+            <a:srgbClr val="FFFFFF"/>
+          </a:solidFill>
+          <a:ln w="9525">
+            <a:solidFill>
+              <a:srgbClr val="4F46E5">
+                <a:alpha val="30000"/>
+              </a:srgbClr>
+            </a:solidFill>
+            <a:prstDash val="solid"/>
+          </a:ln>
+        </p:spPr>
+      </p:sp>
+      <p:sp>
+        <p:nvSpPr>
+          <p:cNvPr id="13" name="Text 11"/>
+          <p:cNvSpPr txBox="1"/>
+          <p:nvPr/>
+        </p:nvSpPr>
+        <p:spPr>
+          <a:xfrm>
+            <a:off x="7982438" y="5457139"/>
+            <a:ext cx="3752698" cy="290048"/>
+          </a:xfrm>
+          <a:prstGeom prst="rect">
+            <a:avLst/>
+          </a:prstGeom>
+          <a:noFill/>
+          <a:ln/>
+        </p:spPr>
+        <p:txBody>
+          <a:bodyPr wrap="none" lIns="0" tIns="0" rIns="0" bIns="0" rtlCol="0" anchor="t"/>
+          <a:lstStyle/>
+          <a:p>
+            <a:pPr algn="l" indent="0" marL="0">
+              <a:lnSpc>
+                <a:spcPts val="2284"/>
+              </a:lnSpc>
+              <a:buNone/>
+            </a:pPr>
+            <a:r>
+              <a:rPr lang="en-US" sz="1523" b="1" spc="76" kern="0" dirty="0">
+                <a:solidFill>
+                  <a:srgbClr val="4F46E5"/>
+                </a:solidFill>
+                <a:latin typeface="Malgun Gothic" pitchFamily="34" charset="0"/>
+                <a:ea typeface="Malgun Gothic" pitchFamily="34" charset="-122"/>
+                <a:cs typeface="Malgun Gothic" pitchFamily="34" charset="-120"/>
+              </a:rPr>
+              <a:t>PAPER REGISTRATION</a:t>
+            </a:r>
+            <a:endParaRPr lang="en-US" sz="1523" dirty="0"/>
+          </a:p>
+        </p:txBody>
+      </p:sp>
+      <p:sp>
+        <p:nvSpPr>
+          <p:cNvPr id="14" name="Text 12"/>
+          <p:cNvSpPr txBox="1"/>
+          <p:nvPr/>
+        </p:nvSpPr>
+        <p:spPr>
+          <a:xfrm>
+            <a:off x="7982438" y="5766938"/>
+            <a:ext cx="3752698" cy="364663"/>
+          </a:xfrm>
+          <a:prstGeom prst="rect">
+            <a:avLst/>
+          </a:prstGeom>
+          <a:noFill/>
+          <a:ln/>
+        </p:spPr>
+        <p:txBody>
+          <a:bodyPr wrap="none" lIns="0" tIns="0" rIns="0" bIns="0" rtlCol="0" anchor="t"/>
+          <a:lstStyle/>
+          <a:p>
+            <a:pPr algn="l" indent="0" marL="0">
+              <a:lnSpc>
+                <a:spcPts val="2871"/>
+              </a:lnSpc>
+              <a:buNone/>
+            </a:pPr>
+            <a:r>
+              <a:rPr lang="en-US" sz="1914" b="1" spc="-54" kern="0" dirty="0">
+                <a:solidFill>
+                  <a:srgbClr val="4F46E5"/>
+                </a:solidFill>
+                <a:latin typeface="Malgun Gothic" pitchFamily="34" charset="0"/>
+                <a:ea typeface="Malgun Gothic" pitchFamily="34" charset="-122"/>
+                <a:cs typeface="Malgun Gothic" pitchFamily="34" charset="-120"/>
+              </a:rPr>
+              <a:t>Paper No. 2026-AI-088</a:t>
+            </a:r>
+            <a:endParaRPr lang="en-US" sz="1914" dirty="0"/>
+          </a:p>
+        </p:txBody>
+      </p:sp>
     </p:spTree>
   </p:cSld>
   <p:clrMapOvr>
@@ -1346,16 +1871,9 @@
   <p:cSld name="Slide 2">
     <p:bg>
       <p:bgPr>
-        <a:blipFill dpi="0" rotWithShape="1">
-          <a:blip r:embed="rId1">
-            <a:lum/>
-          </a:blip>
-          <a:srcRect/>
-          <a:stretch>
-            <a:fillRect/>
-          </a:stretch>
-        </a:blipFill>
-        <a:effectLst/>
+        <a:solidFill>
+          <a:srgbClr val="F8FAFC"/>
+        </a:solidFill>
       </p:bgPr>
     </p:bg>
     <p:spTree>
@@ -1372,6 +1890,1211 @@
           <a:chExt cx="0" cy="0"/>
         </a:xfrm>
       </p:grpSpPr>
+      <p:sp>
+        <p:nvSpPr>
+          <p:cNvPr id="2" name="Shape 0"/>
+          <p:cNvSpPr/>
+          <p:nvPr/>
+        </p:nvSpPr>
+        <p:spPr>
+          <a:xfrm>
+            <a:off x="552480" y="1638330"/>
+            <a:ext cx="1983791" cy="418521"/>
+          </a:xfrm>
+          <a:prstGeom prst="roundRect">
+            <a:avLst>
+              <a:gd name="adj" fmla="val 50011"/>
+            </a:avLst>
+          </a:prstGeom>
+          <a:solidFill>
+            <a:srgbClr val="4F46E5">
+              <a:alpha val="10000"/>
+            </a:srgbClr>
+          </a:solidFill>
+          <a:ln w="9525">
+            <a:solidFill>
+              <a:srgbClr val="4F46E5">
+                <a:alpha val="25000"/>
+              </a:srgbClr>
+            </a:solidFill>
+            <a:prstDash val="solid"/>
+          </a:ln>
+        </p:spPr>
+      </p:sp>
+      <p:sp>
+        <p:nvSpPr>
+          <p:cNvPr id="3" name="Text 1"/>
+          <p:cNvSpPr txBox="1"/>
+          <p:nvPr/>
+        </p:nvSpPr>
+        <p:spPr>
+          <a:xfrm>
+            <a:off x="676290" y="1681490"/>
+            <a:ext cx="1852940" cy="323149"/>
+          </a:xfrm>
+          <a:prstGeom prst="rect">
+            <a:avLst/>
+          </a:prstGeom>
+          <a:noFill/>
+          <a:ln/>
+        </p:spPr>
+        <p:txBody>
+          <a:bodyPr wrap="none" lIns="0" tIns="0" rIns="0" bIns="0" rtlCol="0" anchor="t"/>
+          <a:lstStyle/>
+          <a:p>
+            <a:pPr algn="l" indent="0" marL="0">
+              <a:lnSpc>
+                <a:spcPts val="2545"/>
+              </a:lnSpc>
+              <a:buNone/>
+            </a:pPr>
+            <a:r>
+              <a:rPr lang="en-US" sz="1697" b="1" spc="34" kern="0" dirty="0">
+                <a:solidFill>
+                  <a:srgbClr val="4F46E5"/>
+                </a:solidFill>
+                <a:latin typeface="Malgun Gothic" pitchFamily="34" charset="0"/>
+                <a:ea typeface="Malgun Gothic" pitchFamily="34" charset="-122"/>
+                <a:cs typeface="Malgun Gothic" pitchFamily="34" charset="-120"/>
+              </a:rPr>
+              <a:t>PAPER OUTLINE</a:t>
+            </a:r>
+            <a:endParaRPr lang="en-US" sz="1697" dirty="0"/>
+          </a:p>
+        </p:txBody>
+      </p:sp>
+      <p:sp>
+        <p:nvSpPr>
+          <p:cNvPr id="4" name="Text 2"/>
+          <p:cNvSpPr txBox="1"/>
+          <p:nvPr/>
+        </p:nvSpPr>
+        <p:spPr>
+          <a:xfrm>
+            <a:off x="533370" y="2188982"/>
+            <a:ext cx="2693640" cy="621518"/>
+          </a:xfrm>
+          <a:prstGeom prst="rect">
+            <a:avLst/>
+          </a:prstGeom>
+          <a:noFill/>
+          <a:ln/>
+        </p:spPr>
+        <p:txBody>
+          <a:bodyPr wrap="none" lIns="0" tIns="0" rIns="0" bIns="0" rtlCol="0" anchor="t"/>
+          <a:lstStyle/>
+          <a:p>
+            <a:pPr algn="l" indent="0" marL="0">
+              <a:lnSpc>
+                <a:spcPts val="4894"/>
+              </a:lnSpc>
+              <a:buNone/>
+            </a:pPr>
+            <a:r>
+              <a:rPr lang="en-US" sz="3263" b="1" spc="261" kern="0" dirty="0">
+                <a:solidFill>
+                  <a:srgbClr val="0F172A"/>
+                </a:solidFill>
+                <a:latin typeface="Malgun Gothic" pitchFamily="34" charset="0"/>
+                <a:ea typeface="Malgun Gothic" pitchFamily="34" charset="-122"/>
+                <a:cs typeface="Malgun Gothic" pitchFamily="34" charset="-120"/>
+              </a:rPr>
+              <a:t>CONTENTS</a:t>
+            </a:r>
+            <a:endParaRPr lang="en-US" sz="3263" dirty="0"/>
+          </a:p>
+        </p:txBody>
+      </p:sp>
+      <p:sp>
+        <p:nvSpPr>
+          <p:cNvPr id="5" name="Text 3"/>
+          <p:cNvSpPr txBox="1"/>
+          <p:nvPr/>
+        </p:nvSpPr>
+        <p:spPr>
+          <a:xfrm>
+            <a:off x="533370" y="2882463"/>
+            <a:ext cx="2514600" cy="402336"/>
+          </a:xfrm>
+          <a:prstGeom prst="rect">
+            <a:avLst/>
+          </a:prstGeom>
+          <a:noFill/>
+          <a:ln/>
+        </p:spPr>
+        <p:txBody>
+          <a:bodyPr wrap="square" lIns="0" tIns="0" rIns="0" bIns="0" rtlCol="0" anchor="t"/>
+          <a:lstStyle/>
+          <a:p>
+            <a:pPr algn="l" indent="0" marL="0">
+              <a:lnSpc>
+                <a:spcPts val="1584"/>
+              </a:lnSpc>
+              <a:buNone/>
+            </a:pPr>
+            <a:r>
+              <a:rPr lang="en-US" sz="1056" spc="-54" kern="0" dirty="0">
+                <a:solidFill>
+                  <a:srgbClr val="64748B"/>
+                </a:solidFill>
+                <a:latin typeface="Malgun Gothic" pitchFamily="34" charset="0"/>
+                <a:ea typeface="Malgun Gothic" pitchFamily="34" charset="-122"/>
+                <a:cs typeface="Malgun Gothic" pitchFamily="34" charset="-120"/>
+              </a:rPr>
+              <a:t>연구 배경부터</a:t>
+            </a:r>
+            <a:endParaRPr lang="en-US" sz="1056" dirty="0"/>
+          </a:p>
+          <a:p>
+            <a:pPr algn="l" indent="0" marL="0">
+              <a:lnSpc>
+                <a:spcPts val="1584"/>
+              </a:lnSpc>
+              <a:buNone/>
+            </a:pPr>
+            <a:r>
+              <a:rPr lang="en-US" sz="1056" spc="-54" kern="0" dirty="0">
+                <a:solidFill>
+                  <a:srgbClr val="64748B"/>
+                </a:solidFill>
+                <a:latin typeface="Malgun Gothic" pitchFamily="34" charset="0"/>
+                <a:ea typeface="Malgun Gothic" pitchFamily="34" charset="-122"/>
+                <a:cs typeface="Malgun Gothic" pitchFamily="34" charset="-120"/>
+              </a:rPr>
+              <a:t>실험 벤치마크까지 4챕터</a:t>
+            </a:r>
+            <a:endParaRPr lang="en-US" sz="1056" dirty="0"/>
+          </a:p>
+        </p:txBody>
+      </p:sp>
+      <p:sp>
+        <p:nvSpPr>
+          <p:cNvPr id="6" name="Shape 4"/>
+          <p:cNvSpPr/>
+          <p:nvPr/>
+        </p:nvSpPr>
+        <p:spPr>
+          <a:xfrm>
+            <a:off x="552480" y="4686300"/>
+            <a:ext cx="95280" cy="95280"/>
+          </a:xfrm>
+          <a:prstGeom prst="roundRect">
+            <a:avLst>
+              <a:gd name="adj" fmla="val 50000"/>
+            </a:avLst>
+          </a:prstGeom>
+          <a:solidFill>
+            <a:srgbClr val="4F46E5"/>
+          </a:solidFill>
+          <a:ln/>
+        </p:spPr>
+      </p:sp>
+      <p:sp>
+        <p:nvSpPr>
+          <p:cNvPr id="7" name="Shape 5"/>
+          <p:cNvSpPr/>
+          <p:nvPr/>
+        </p:nvSpPr>
+        <p:spPr>
+          <a:xfrm>
+            <a:off x="761970" y="4724430"/>
+            <a:ext cx="571500" cy="19020"/>
+          </a:xfrm>
+          <a:prstGeom prst="rect">
+            <a:avLst/>
+          </a:prstGeom>
+          <a:solidFill>
+            <a:srgbClr val="4F46E5">
+              <a:alpha val="40000"/>
+            </a:srgbClr>
+          </a:solidFill>
+          <a:ln/>
+        </p:spPr>
+      </p:sp>
+      <p:sp>
+        <p:nvSpPr>
+          <p:cNvPr id="8" name="Shape 6"/>
+          <p:cNvSpPr/>
+          <p:nvPr/>
+        </p:nvSpPr>
+        <p:spPr>
+          <a:xfrm>
+            <a:off x="552480" y="4914900"/>
+            <a:ext cx="95280" cy="95280"/>
+          </a:xfrm>
+          <a:prstGeom prst="roundRect">
+            <a:avLst>
+              <a:gd name="adj" fmla="val 50000"/>
+            </a:avLst>
+          </a:prstGeom>
+          <a:solidFill>
+            <a:srgbClr val="0284C7"/>
+          </a:solidFill>
+          <a:ln/>
+        </p:spPr>
+      </p:sp>
+      <p:sp>
+        <p:nvSpPr>
+          <p:cNvPr id="9" name="Shape 7"/>
+          <p:cNvSpPr/>
+          <p:nvPr/>
+        </p:nvSpPr>
+        <p:spPr>
+          <a:xfrm>
+            <a:off x="761970" y="4953030"/>
+            <a:ext cx="952530" cy="19020"/>
+          </a:xfrm>
+          <a:prstGeom prst="rect">
+            <a:avLst/>
+          </a:prstGeom>
+          <a:solidFill>
+            <a:srgbClr val="0284C7">
+              <a:alpha val="50000"/>
+            </a:srgbClr>
+          </a:solidFill>
+          <a:ln/>
+        </p:spPr>
+      </p:sp>
+      <p:sp>
+        <p:nvSpPr>
+          <p:cNvPr id="10" name="Shape 8"/>
+          <p:cNvSpPr/>
+          <p:nvPr/>
+        </p:nvSpPr>
+        <p:spPr>
+          <a:xfrm>
+            <a:off x="552480" y="5143500"/>
+            <a:ext cx="95280" cy="95280"/>
+          </a:xfrm>
+          <a:prstGeom prst="roundRect">
+            <a:avLst>
+              <a:gd name="adj" fmla="val 50000"/>
+            </a:avLst>
+          </a:prstGeom>
+          <a:solidFill>
+            <a:srgbClr val="4F46E5"/>
+          </a:solidFill>
+          <a:ln/>
+        </p:spPr>
+      </p:sp>
+      <p:sp>
+        <p:nvSpPr>
+          <p:cNvPr id="11" name="Shape 9"/>
+          <p:cNvSpPr/>
+          <p:nvPr/>
+        </p:nvSpPr>
+        <p:spPr>
+          <a:xfrm>
+            <a:off x="761970" y="5181630"/>
+            <a:ext cx="428671" cy="19020"/>
+          </a:xfrm>
+          <a:prstGeom prst="rect">
+            <a:avLst/>
+          </a:prstGeom>
+          <a:solidFill>
+            <a:srgbClr val="4F46E5">
+              <a:alpha val="40000"/>
+            </a:srgbClr>
+          </a:solidFill>
+          <a:ln/>
+        </p:spPr>
+      </p:sp>
+      <p:sp>
+        <p:nvSpPr>
+          <p:cNvPr id="12" name="Shape 10"/>
+          <p:cNvSpPr/>
+          <p:nvPr/>
+        </p:nvSpPr>
+        <p:spPr>
+          <a:xfrm>
+            <a:off x="3486150" y="764347"/>
+            <a:ext cx="4000500" cy="2795595"/>
+          </a:xfrm>
+          <a:prstGeom prst="roundRect">
+            <a:avLst>
+              <a:gd name="adj" fmla="val 4769"/>
+            </a:avLst>
+          </a:prstGeom>
+          <a:solidFill>
+            <a:srgbClr val="FFFFFF"/>
+          </a:solidFill>
+          <a:ln w="9525">
+            <a:solidFill>
+              <a:srgbClr val="E2E8F0"/>
+            </a:solidFill>
+            <a:prstDash val="solid"/>
+          </a:ln>
+        </p:spPr>
+      </p:sp>
+      <p:sp>
+        <p:nvSpPr>
+          <p:cNvPr id="13" name="Shape 11"/>
+          <p:cNvSpPr/>
+          <p:nvPr/>
+        </p:nvSpPr>
+        <p:spPr>
+          <a:xfrm>
+            <a:off x="3705240" y="964418"/>
+            <a:ext cx="247620" cy="247620"/>
+          </a:xfrm>
+          <a:prstGeom prst="roundRect">
+            <a:avLst>
+              <a:gd name="adj" fmla="val 50000"/>
+            </a:avLst>
+          </a:prstGeom>
+          <a:solidFill>
+            <a:srgbClr val="4F46E5">
+              <a:alpha val="12000"/>
+            </a:srgbClr>
+          </a:solidFill>
+          <a:ln w="9525">
+            <a:solidFill>
+              <a:srgbClr val="4F46E5">
+                <a:alpha val="35000"/>
+              </a:srgbClr>
+            </a:solidFill>
+            <a:prstDash val="solid"/>
+          </a:ln>
+        </p:spPr>
+      </p:sp>
+      <p:sp>
+        <p:nvSpPr>
+          <p:cNvPr id="14" name="Text 12"/>
+          <p:cNvSpPr txBox="1"/>
+          <p:nvPr/>
+        </p:nvSpPr>
+        <p:spPr>
+          <a:xfrm>
+            <a:off x="3695730" y="929945"/>
+            <a:ext cx="304770" cy="310805"/>
+          </a:xfrm>
+          <a:prstGeom prst="rect">
+            <a:avLst/>
+          </a:prstGeom>
+          <a:noFill/>
+          <a:ln/>
+        </p:spPr>
+        <p:txBody>
+          <a:bodyPr wrap="none" lIns="0" tIns="0" rIns="0" bIns="0" rtlCol="0" anchor="t"/>
+          <a:lstStyle/>
+          <a:p>
+            <a:pPr algn="l" indent="0" marL="0">
+              <a:lnSpc>
+                <a:spcPts val="2447"/>
+              </a:lnSpc>
+              <a:buNone/>
+            </a:pPr>
+            <a:r>
+              <a:rPr lang="en-US" sz="1631" b="1" spc="-54" kern="0" dirty="0">
+                <a:solidFill>
+                  <a:srgbClr val="4F46E5"/>
+                </a:solidFill>
+                <a:latin typeface="Malgun Gothic" pitchFamily="34" charset="0"/>
+                <a:ea typeface="Malgun Gothic" pitchFamily="34" charset="-122"/>
+                <a:cs typeface="Malgun Gothic" pitchFamily="34" charset="-120"/>
+              </a:rPr>
+              <a:t>01</a:t>
+            </a:r>
+            <a:endParaRPr lang="en-US" sz="1631" dirty="0"/>
+          </a:p>
+        </p:txBody>
+      </p:sp>
+      <p:sp>
+        <p:nvSpPr>
+          <p:cNvPr id="15" name="Text 13"/>
+          <p:cNvSpPr txBox="1"/>
+          <p:nvPr/>
+        </p:nvSpPr>
+        <p:spPr>
+          <a:xfrm>
+            <a:off x="3686221" y="1285921"/>
+            <a:ext cx="3866358" cy="414315"/>
+          </a:xfrm>
+          <a:prstGeom prst="rect">
+            <a:avLst/>
+          </a:prstGeom>
+          <a:noFill/>
+          <a:ln/>
+        </p:spPr>
+        <p:txBody>
+          <a:bodyPr wrap="none" lIns="0" tIns="0" rIns="0" bIns="0" rtlCol="0" anchor="t"/>
+          <a:lstStyle/>
+          <a:p>
+            <a:pPr algn="l" indent="0" marL="0">
+              <a:lnSpc>
+                <a:spcPts val="3263"/>
+              </a:lnSpc>
+              <a:buNone/>
+            </a:pPr>
+            <a:r>
+              <a:rPr lang="en-US" sz="2175" spc="-54" kern="0" dirty="0">
+                <a:solidFill>
+                  <a:srgbClr val="0F172A"/>
+                </a:solidFill>
+                <a:latin typeface="Malgun Gothic" pitchFamily="34" charset="0"/>
+                <a:ea typeface="Malgun Gothic" pitchFamily="34" charset="-122"/>
+                <a:cs typeface="Malgun Gothic" pitchFamily="34" charset="-120"/>
+              </a:rPr>
+              <a:t>연구 배경 및 당면 과제</a:t>
+            </a:r>
+            <a:endParaRPr lang="en-US" sz="2175" dirty="0"/>
+          </a:p>
+        </p:txBody>
+      </p:sp>
+      <p:sp>
+        <p:nvSpPr>
+          <p:cNvPr id="16" name="Text 14"/>
+          <p:cNvSpPr txBox="1"/>
+          <p:nvPr/>
+        </p:nvSpPr>
+        <p:spPr>
+          <a:xfrm>
+            <a:off x="3686221" y="1700235"/>
+            <a:ext cx="3600450" cy="1657350"/>
+          </a:xfrm>
+          <a:prstGeom prst="rect">
+            <a:avLst/>
+          </a:prstGeom>
+          <a:noFill/>
+          <a:ln/>
+        </p:spPr>
+        <p:txBody>
+          <a:bodyPr wrap="square" lIns="0" tIns="0" rIns="0" bIns="0" rtlCol="0" anchor="t"/>
+          <a:lstStyle/>
+          <a:p>
+            <a:pPr algn="l" indent="0" marL="0">
+              <a:lnSpc>
+                <a:spcPts val="3263"/>
+              </a:lnSpc>
+              <a:buNone/>
+            </a:pPr>
+            <a:r>
+              <a:rPr lang="en-US" sz="2175" spc="-54" kern="0" dirty="0">
+                <a:solidFill>
+                  <a:srgbClr val="64748B"/>
+                </a:solidFill>
+                <a:latin typeface="Malgun Gothic" pitchFamily="34" charset="0"/>
+                <a:ea typeface="Malgun Gothic" pitchFamily="34" charset="-122"/>
+                <a:cs typeface="Malgun Gothic" pitchFamily="34" charset="-120"/>
+              </a:rPr>
+              <a:t>• 엣지 디바이스 하드웨어 제약</a:t>
+            </a:r>
+            <a:endParaRPr lang="en-US" sz="2175" dirty="0"/>
+          </a:p>
+          <a:p>
+            <a:pPr algn="l" indent="0" marL="0">
+              <a:lnSpc>
+                <a:spcPts val="3263"/>
+              </a:lnSpc>
+              <a:buNone/>
+            </a:pPr>
+            <a:r>
+              <a:rPr lang="en-US" sz="2175" spc="-54" kern="0" dirty="0">
+                <a:solidFill>
+                  <a:srgbClr val="64748B"/>
+                </a:solidFill>
+                <a:latin typeface="Malgun Gothic" pitchFamily="34" charset="0"/>
+                <a:ea typeface="Malgun Gothic" pitchFamily="34" charset="-122"/>
+                <a:cs typeface="Malgun Gothic" pitchFamily="34" charset="-120"/>
+              </a:rPr>
+              <a:t>• 한국어 토크나이저 메모리 오버헤드</a:t>
+            </a:r>
+            <a:endParaRPr lang="en-US" sz="2175" dirty="0"/>
+          </a:p>
+          <a:p>
+            <a:pPr algn="l" indent="0" marL="0">
+              <a:lnSpc>
+                <a:spcPts val="3263"/>
+              </a:lnSpc>
+              <a:buNone/>
+            </a:pPr>
+            <a:r>
+              <a:rPr lang="en-US" sz="2175" spc="-54" kern="0" dirty="0">
+                <a:solidFill>
+                  <a:srgbClr val="64748B"/>
+                </a:solidFill>
+                <a:latin typeface="Malgun Gothic" pitchFamily="34" charset="0"/>
+                <a:ea typeface="Malgun Gothic" pitchFamily="34" charset="-122"/>
+                <a:cs typeface="Malgun Gothic" pitchFamily="34" charset="-120"/>
+              </a:rPr>
+              <a:t>• 저지연 스트리밍 구현 한계</a:t>
+            </a:r>
+            <a:endParaRPr lang="en-US" sz="2175" dirty="0"/>
+          </a:p>
+        </p:txBody>
+      </p:sp>
+      <p:sp>
+        <p:nvSpPr>
+          <p:cNvPr id="17" name="Shape 15"/>
+          <p:cNvSpPr/>
+          <p:nvPr/>
+        </p:nvSpPr>
+        <p:spPr>
+          <a:xfrm>
+            <a:off x="7639080" y="764347"/>
+            <a:ext cx="4000500" cy="2795595"/>
+          </a:xfrm>
+          <a:prstGeom prst="roundRect">
+            <a:avLst>
+              <a:gd name="adj" fmla="val 4769"/>
+            </a:avLst>
+          </a:prstGeom>
+          <a:solidFill>
+            <a:srgbClr val="FFFFFF"/>
+          </a:solidFill>
+          <a:ln w="9525">
+            <a:solidFill>
+              <a:srgbClr val="E2E8F0"/>
+            </a:solidFill>
+            <a:prstDash val="solid"/>
+          </a:ln>
+        </p:spPr>
+      </p:sp>
+      <p:sp>
+        <p:nvSpPr>
+          <p:cNvPr id="18" name="Shape 16"/>
+          <p:cNvSpPr/>
+          <p:nvPr/>
+        </p:nvSpPr>
+        <p:spPr>
+          <a:xfrm>
+            <a:off x="7858171" y="964418"/>
+            <a:ext cx="247620" cy="247620"/>
+          </a:xfrm>
+          <a:prstGeom prst="roundRect">
+            <a:avLst>
+              <a:gd name="adj" fmla="val 50000"/>
+            </a:avLst>
+          </a:prstGeom>
+          <a:solidFill>
+            <a:srgbClr val="0284C7">
+              <a:alpha val="12000"/>
+            </a:srgbClr>
+          </a:solidFill>
+          <a:ln w="9525">
+            <a:solidFill>
+              <a:srgbClr val="0284C7">
+                <a:alpha val="35000"/>
+              </a:srgbClr>
+            </a:solidFill>
+            <a:prstDash val="solid"/>
+          </a:ln>
+        </p:spPr>
+      </p:sp>
+      <p:sp>
+        <p:nvSpPr>
+          <p:cNvPr id="19" name="Text 17"/>
+          <p:cNvSpPr txBox="1"/>
+          <p:nvPr/>
+        </p:nvSpPr>
+        <p:spPr>
+          <a:xfrm>
+            <a:off x="7848570" y="929945"/>
+            <a:ext cx="304770" cy="310805"/>
+          </a:xfrm>
+          <a:prstGeom prst="rect">
+            <a:avLst/>
+          </a:prstGeom>
+          <a:noFill/>
+          <a:ln/>
+        </p:spPr>
+        <p:txBody>
+          <a:bodyPr wrap="none" lIns="0" tIns="0" rIns="0" bIns="0" rtlCol="0" anchor="t"/>
+          <a:lstStyle/>
+          <a:p>
+            <a:pPr algn="l" indent="0" marL="0">
+              <a:lnSpc>
+                <a:spcPts val="2447"/>
+              </a:lnSpc>
+              <a:buNone/>
+            </a:pPr>
+            <a:r>
+              <a:rPr lang="en-US" sz="1631" b="1" spc="-54" kern="0" dirty="0">
+                <a:solidFill>
+                  <a:srgbClr val="0284C7"/>
+                </a:solidFill>
+                <a:latin typeface="Malgun Gothic" pitchFamily="34" charset="0"/>
+                <a:ea typeface="Malgun Gothic" pitchFamily="34" charset="-122"/>
+                <a:cs typeface="Malgun Gothic" pitchFamily="34" charset="-120"/>
+              </a:rPr>
+              <a:t>02</a:t>
+            </a:r>
+            <a:endParaRPr lang="en-US" sz="1631" dirty="0"/>
+          </a:p>
+        </p:txBody>
+      </p:sp>
+      <p:sp>
+        <p:nvSpPr>
+          <p:cNvPr id="20" name="Text 18"/>
+          <p:cNvSpPr txBox="1"/>
+          <p:nvPr/>
+        </p:nvSpPr>
+        <p:spPr>
+          <a:xfrm>
+            <a:off x="7839060" y="1285921"/>
+            <a:ext cx="3866358" cy="414315"/>
+          </a:xfrm>
+          <a:prstGeom prst="rect">
+            <a:avLst/>
+          </a:prstGeom>
+          <a:noFill/>
+          <a:ln/>
+        </p:spPr>
+        <p:txBody>
+          <a:bodyPr wrap="none" lIns="0" tIns="0" rIns="0" bIns="0" rtlCol="0" anchor="t"/>
+          <a:lstStyle/>
+          <a:p>
+            <a:pPr algn="l" indent="0" marL="0">
+              <a:lnSpc>
+                <a:spcPts val="3263"/>
+              </a:lnSpc>
+              <a:buNone/>
+            </a:pPr>
+            <a:r>
+              <a:rPr lang="en-US" sz="2175" spc="-54" kern="0" dirty="0">
+                <a:solidFill>
+                  <a:srgbClr val="0F172A"/>
+                </a:solidFill>
+                <a:latin typeface="Malgun Gothic" pitchFamily="34" charset="0"/>
+                <a:ea typeface="Malgun Gothic" pitchFamily="34" charset="-122"/>
+                <a:cs typeface="Malgun Gothic" pitchFamily="34" charset="-120"/>
+              </a:rPr>
+              <a:t>경량화 아키텍처 설계</a:t>
+            </a:r>
+            <a:endParaRPr lang="en-US" sz="2175" dirty="0"/>
+          </a:p>
+        </p:txBody>
+      </p:sp>
+      <p:sp>
+        <p:nvSpPr>
+          <p:cNvPr id="21" name="Text 19"/>
+          <p:cNvSpPr txBox="1"/>
+          <p:nvPr/>
+        </p:nvSpPr>
+        <p:spPr>
+          <a:xfrm>
+            <a:off x="7839060" y="1700235"/>
+            <a:ext cx="3600450" cy="1657350"/>
+          </a:xfrm>
+          <a:prstGeom prst="rect">
+            <a:avLst/>
+          </a:prstGeom>
+          <a:noFill/>
+          <a:ln/>
+        </p:spPr>
+        <p:txBody>
+          <a:bodyPr wrap="square" lIns="0" tIns="0" rIns="0" bIns="0" rtlCol="0" anchor="t"/>
+          <a:lstStyle/>
+          <a:p>
+            <a:pPr algn="l" indent="0" marL="0">
+              <a:lnSpc>
+                <a:spcPts val="3263"/>
+              </a:lnSpc>
+              <a:buNone/>
+            </a:pPr>
+            <a:r>
+              <a:rPr lang="en-US" sz="2175" spc="-54" kern="0" dirty="0">
+                <a:solidFill>
+                  <a:srgbClr val="64748B"/>
+                </a:solidFill>
+                <a:latin typeface="Malgun Gothic" pitchFamily="34" charset="0"/>
+                <a:ea typeface="Malgun Gothic" pitchFamily="34" charset="-122"/>
+                <a:cs typeface="Malgun Gothic" pitchFamily="34" charset="-120"/>
+              </a:rPr>
+              <a:t>• 4-bit AWQ 활성화 양자화</a:t>
+            </a:r>
+            <a:endParaRPr lang="en-US" sz="2175" dirty="0"/>
+          </a:p>
+          <a:p>
+            <a:pPr algn="l" indent="0" marL="0">
+              <a:lnSpc>
+                <a:spcPts val="3263"/>
+              </a:lnSpc>
+              <a:buNone/>
+            </a:pPr>
+            <a:r>
+              <a:rPr lang="en-US" sz="2175" spc="-54" kern="0" dirty="0">
+                <a:solidFill>
+                  <a:srgbClr val="64748B"/>
+                </a:solidFill>
+                <a:latin typeface="Malgun Gothic" pitchFamily="34" charset="0"/>
+                <a:ea typeface="Malgun Gothic" pitchFamily="34" charset="-122"/>
+                <a:cs typeface="Malgun Gothic" pitchFamily="34" charset="-120"/>
+              </a:rPr>
+              <a:t>• 동적 KV Cache Pruning 기법</a:t>
+            </a:r>
+            <a:endParaRPr lang="en-US" sz="2175" dirty="0"/>
+          </a:p>
+          <a:p>
+            <a:pPr algn="l" indent="0" marL="0">
+              <a:lnSpc>
+                <a:spcPts val="3263"/>
+              </a:lnSpc>
+              <a:buNone/>
+            </a:pPr>
+            <a:r>
+              <a:rPr lang="en-US" sz="2175" spc="-54" kern="0" dirty="0">
+                <a:solidFill>
+                  <a:srgbClr val="64748B"/>
+                </a:solidFill>
+                <a:latin typeface="Malgun Gothic" pitchFamily="34" charset="0"/>
+                <a:ea typeface="Malgun Gothic" pitchFamily="34" charset="-122"/>
+                <a:cs typeface="Malgun Gothic" pitchFamily="34" charset="-120"/>
+              </a:rPr>
+              <a:t>• 모바일 NPU 연산 최적화 파이프라인</a:t>
+            </a:r>
+            <a:endParaRPr lang="en-US" sz="2175" dirty="0"/>
+          </a:p>
+        </p:txBody>
+      </p:sp>
+      <p:sp>
+        <p:nvSpPr>
+          <p:cNvPr id="22" name="Shape 20"/>
+          <p:cNvSpPr/>
+          <p:nvPr/>
+        </p:nvSpPr>
+        <p:spPr>
+          <a:xfrm>
+            <a:off x="3486150" y="3712373"/>
+            <a:ext cx="4000500" cy="2381280"/>
+          </a:xfrm>
+          <a:prstGeom prst="roundRect">
+            <a:avLst>
+              <a:gd name="adj" fmla="val 5599"/>
+            </a:avLst>
+          </a:prstGeom>
+          <a:solidFill>
+            <a:srgbClr val="FFFFFF"/>
+          </a:solidFill>
+          <a:ln w="9525">
+            <a:solidFill>
+              <a:srgbClr val="E2E8F0"/>
+            </a:solidFill>
+            <a:prstDash val="solid"/>
+          </a:ln>
+        </p:spPr>
+      </p:sp>
+      <p:sp>
+        <p:nvSpPr>
+          <p:cNvPr id="23" name="Shape 21"/>
+          <p:cNvSpPr/>
+          <p:nvPr/>
+        </p:nvSpPr>
+        <p:spPr>
+          <a:xfrm>
+            <a:off x="3705240" y="3912352"/>
+            <a:ext cx="247620" cy="247620"/>
+          </a:xfrm>
+          <a:prstGeom prst="roundRect">
+            <a:avLst>
+              <a:gd name="adj" fmla="val 50000"/>
+            </a:avLst>
+          </a:prstGeom>
+          <a:solidFill>
+            <a:srgbClr val="059669">
+              <a:alpha val="12000"/>
+            </a:srgbClr>
+          </a:solidFill>
+          <a:ln w="9525">
+            <a:solidFill>
+              <a:srgbClr val="059669">
+                <a:alpha val="35000"/>
+              </a:srgbClr>
+            </a:solidFill>
+            <a:prstDash val="solid"/>
+          </a:ln>
+        </p:spPr>
+      </p:sp>
+      <p:sp>
+        <p:nvSpPr>
+          <p:cNvPr id="24" name="Text 22"/>
+          <p:cNvSpPr txBox="1"/>
+          <p:nvPr/>
+        </p:nvSpPr>
+        <p:spPr>
+          <a:xfrm>
+            <a:off x="3695730" y="3877879"/>
+            <a:ext cx="304770" cy="310805"/>
+          </a:xfrm>
+          <a:prstGeom prst="rect">
+            <a:avLst/>
+          </a:prstGeom>
+          <a:noFill/>
+          <a:ln/>
+        </p:spPr>
+        <p:txBody>
+          <a:bodyPr wrap="none" lIns="0" tIns="0" rIns="0" bIns="0" rtlCol="0" anchor="t"/>
+          <a:lstStyle/>
+          <a:p>
+            <a:pPr algn="l" indent="0" marL="0">
+              <a:lnSpc>
+                <a:spcPts val="2447"/>
+              </a:lnSpc>
+              <a:buNone/>
+            </a:pPr>
+            <a:r>
+              <a:rPr lang="en-US" sz="1631" b="1" spc="-54" kern="0" dirty="0">
+                <a:solidFill>
+                  <a:srgbClr val="059669"/>
+                </a:solidFill>
+                <a:latin typeface="Malgun Gothic" pitchFamily="34" charset="0"/>
+                <a:ea typeface="Malgun Gothic" pitchFamily="34" charset="-122"/>
+                <a:cs typeface="Malgun Gothic" pitchFamily="34" charset="-120"/>
+              </a:rPr>
+              <a:t>03</a:t>
+            </a:r>
+            <a:endParaRPr lang="en-US" sz="1631" dirty="0"/>
+          </a:p>
+        </p:txBody>
+      </p:sp>
+      <p:sp>
+        <p:nvSpPr>
+          <p:cNvPr id="25" name="Text 23"/>
+          <p:cNvSpPr txBox="1"/>
+          <p:nvPr/>
+        </p:nvSpPr>
+        <p:spPr>
+          <a:xfrm>
+            <a:off x="3686221" y="4233855"/>
+            <a:ext cx="3866358" cy="414315"/>
+          </a:xfrm>
+          <a:prstGeom prst="rect">
+            <a:avLst/>
+          </a:prstGeom>
+          <a:noFill/>
+          <a:ln/>
+        </p:spPr>
+        <p:txBody>
+          <a:bodyPr wrap="none" lIns="0" tIns="0" rIns="0" bIns="0" rtlCol="0" anchor="t"/>
+          <a:lstStyle/>
+          <a:p>
+            <a:pPr algn="l" indent="0" marL="0">
+              <a:lnSpc>
+                <a:spcPts val="3263"/>
+              </a:lnSpc>
+              <a:buNone/>
+            </a:pPr>
+            <a:r>
+              <a:rPr lang="en-US" sz="2175" spc="-54" kern="0" dirty="0">
+                <a:solidFill>
+                  <a:srgbClr val="0F172A"/>
+                </a:solidFill>
+                <a:latin typeface="Malgun Gothic" pitchFamily="34" charset="0"/>
+                <a:ea typeface="Malgun Gothic" pitchFamily="34" charset="-122"/>
+                <a:cs typeface="Malgun Gothic" pitchFamily="34" charset="-120"/>
+              </a:rPr>
+              <a:t>실험 결과 및 정량 분석</a:t>
+            </a:r>
+            <a:endParaRPr lang="en-US" sz="2175" dirty="0"/>
+          </a:p>
+        </p:txBody>
+      </p:sp>
+      <p:sp>
+        <p:nvSpPr>
+          <p:cNvPr id="26" name="Text 24"/>
+          <p:cNvSpPr txBox="1"/>
+          <p:nvPr/>
+        </p:nvSpPr>
+        <p:spPr>
+          <a:xfrm>
+            <a:off x="3686221" y="4648170"/>
+            <a:ext cx="3600450" cy="1243035"/>
+          </a:xfrm>
+          <a:prstGeom prst="rect">
+            <a:avLst/>
+          </a:prstGeom>
+          <a:noFill/>
+          <a:ln/>
+        </p:spPr>
+        <p:txBody>
+          <a:bodyPr wrap="square" lIns="0" tIns="0" rIns="0" bIns="0" rtlCol="0" anchor="t"/>
+          <a:lstStyle/>
+          <a:p>
+            <a:pPr algn="l" indent="0" marL="0">
+              <a:lnSpc>
+                <a:spcPts val="3263"/>
+              </a:lnSpc>
+              <a:buNone/>
+            </a:pPr>
+            <a:r>
+              <a:rPr lang="en-US" sz="2175" spc="-54" kern="0" dirty="0">
+                <a:solidFill>
+                  <a:srgbClr val="64748B"/>
+                </a:solidFill>
+                <a:latin typeface="Malgun Gothic" pitchFamily="34" charset="0"/>
+                <a:ea typeface="Malgun Gothic" pitchFamily="34" charset="-122"/>
+                <a:cs typeface="Malgun Gothic" pitchFamily="34" charset="-120"/>
+              </a:rPr>
+              <a:t>• Ko-Harness 벤치마크 평가</a:t>
+            </a:r>
+            <a:endParaRPr lang="en-US" sz="2175" dirty="0"/>
+          </a:p>
+          <a:p>
+            <a:pPr algn="l" indent="0" marL="0">
+              <a:lnSpc>
+                <a:spcPts val="3263"/>
+              </a:lnSpc>
+              <a:buNone/>
+            </a:pPr>
+            <a:r>
+              <a:rPr lang="en-US" sz="2175" spc="-54" kern="0" dirty="0">
+                <a:solidFill>
+                  <a:srgbClr val="64748B"/>
+                </a:solidFill>
+                <a:latin typeface="Malgun Gothic" pitchFamily="34" charset="0"/>
+                <a:ea typeface="Malgun Gothic" pitchFamily="34" charset="-122"/>
+                <a:cs typeface="Malgun Gothic" pitchFamily="34" charset="-120"/>
+              </a:rPr>
+              <a:t>• TTFT 및 토큰 생성 속도 측정</a:t>
+            </a:r>
+            <a:endParaRPr lang="en-US" sz="2175" dirty="0"/>
+          </a:p>
+          <a:p>
+            <a:pPr algn="l" indent="0" marL="0">
+              <a:lnSpc>
+                <a:spcPts val="3263"/>
+              </a:lnSpc>
+              <a:buNone/>
+            </a:pPr>
+            <a:r>
+              <a:rPr lang="en-US" sz="2175" spc="-54" kern="0" dirty="0">
+                <a:solidFill>
+                  <a:srgbClr val="64748B"/>
+                </a:solidFill>
+                <a:latin typeface="Malgun Gothic" pitchFamily="34" charset="0"/>
+                <a:ea typeface="Malgun Gothic" pitchFamily="34" charset="-122"/>
+                <a:cs typeface="Malgun Gothic" pitchFamily="34" charset="-120"/>
+              </a:rPr>
+              <a:t>• 전력 소모 및 RAM 점유율 비교</a:t>
+            </a:r>
+            <a:endParaRPr lang="en-US" sz="2175" dirty="0"/>
+          </a:p>
+        </p:txBody>
+      </p:sp>
+      <p:sp>
+        <p:nvSpPr>
+          <p:cNvPr id="27" name="Shape 25"/>
+          <p:cNvSpPr/>
+          <p:nvPr/>
+        </p:nvSpPr>
+        <p:spPr>
+          <a:xfrm>
+            <a:off x="7639080" y="3712373"/>
+            <a:ext cx="4000500" cy="2381280"/>
+          </a:xfrm>
+          <a:prstGeom prst="roundRect">
+            <a:avLst>
+              <a:gd name="adj" fmla="val 5599"/>
+            </a:avLst>
+          </a:prstGeom>
+          <a:solidFill>
+            <a:srgbClr val="FFFFFF"/>
+          </a:solidFill>
+          <a:ln w="9525">
+            <a:solidFill>
+              <a:srgbClr val="E2E8F0"/>
+            </a:solidFill>
+            <a:prstDash val="solid"/>
+          </a:ln>
+        </p:spPr>
+      </p:sp>
+      <p:sp>
+        <p:nvSpPr>
+          <p:cNvPr id="28" name="Shape 26"/>
+          <p:cNvSpPr/>
+          <p:nvPr/>
+        </p:nvSpPr>
+        <p:spPr>
+          <a:xfrm>
+            <a:off x="7858171" y="3912352"/>
+            <a:ext cx="247620" cy="247620"/>
+          </a:xfrm>
+          <a:prstGeom prst="roundRect">
+            <a:avLst>
+              <a:gd name="adj" fmla="val 50000"/>
+            </a:avLst>
+          </a:prstGeom>
+          <a:solidFill>
+            <a:srgbClr val="4F46E5">
+              <a:alpha val="12000"/>
+            </a:srgbClr>
+          </a:solidFill>
+          <a:ln w="9525">
+            <a:solidFill>
+              <a:srgbClr val="4F46E5">
+                <a:alpha val="35000"/>
+              </a:srgbClr>
+            </a:solidFill>
+            <a:prstDash val="solid"/>
+          </a:ln>
+        </p:spPr>
+      </p:sp>
+      <p:sp>
+        <p:nvSpPr>
+          <p:cNvPr id="29" name="Text 27"/>
+          <p:cNvSpPr txBox="1"/>
+          <p:nvPr/>
+        </p:nvSpPr>
+        <p:spPr>
+          <a:xfrm>
+            <a:off x="7848570" y="3877879"/>
+            <a:ext cx="304770" cy="310805"/>
+          </a:xfrm>
+          <a:prstGeom prst="rect">
+            <a:avLst/>
+          </a:prstGeom>
+          <a:noFill/>
+          <a:ln/>
+        </p:spPr>
+        <p:txBody>
+          <a:bodyPr wrap="none" lIns="0" tIns="0" rIns="0" bIns="0" rtlCol="0" anchor="t"/>
+          <a:lstStyle/>
+          <a:p>
+            <a:pPr algn="l" indent="0" marL="0">
+              <a:lnSpc>
+                <a:spcPts val="2447"/>
+              </a:lnSpc>
+              <a:buNone/>
+            </a:pPr>
+            <a:r>
+              <a:rPr lang="en-US" sz="1631" b="1" spc="-54" kern="0" dirty="0">
+                <a:solidFill>
+                  <a:srgbClr val="4F46E5"/>
+                </a:solidFill>
+                <a:latin typeface="Malgun Gothic" pitchFamily="34" charset="0"/>
+                <a:ea typeface="Malgun Gothic" pitchFamily="34" charset="-122"/>
+                <a:cs typeface="Malgun Gothic" pitchFamily="34" charset="-120"/>
+              </a:rPr>
+              <a:t>04</a:t>
+            </a:r>
+            <a:endParaRPr lang="en-US" sz="1631" dirty="0"/>
+          </a:p>
+        </p:txBody>
+      </p:sp>
+      <p:sp>
+        <p:nvSpPr>
+          <p:cNvPr id="30" name="Text 28"/>
+          <p:cNvSpPr txBox="1"/>
+          <p:nvPr/>
+        </p:nvSpPr>
+        <p:spPr>
+          <a:xfrm>
+            <a:off x="7839060" y="4233855"/>
+            <a:ext cx="3866358" cy="414315"/>
+          </a:xfrm>
+          <a:prstGeom prst="rect">
+            <a:avLst/>
+          </a:prstGeom>
+          <a:noFill/>
+          <a:ln/>
+        </p:spPr>
+        <p:txBody>
+          <a:bodyPr wrap="none" lIns="0" tIns="0" rIns="0" bIns="0" rtlCol="0" anchor="t"/>
+          <a:lstStyle/>
+          <a:p>
+            <a:pPr algn="l" indent="0" marL="0">
+              <a:lnSpc>
+                <a:spcPts val="3263"/>
+              </a:lnSpc>
+              <a:buNone/>
+            </a:pPr>
+            <a:r>
+              <a:rPr lang="en-US" sz="2175" spc="-54" kern="0" dirty="0">
+                <a:solidFill>
+                  <a:srgbClr val="0F172A"/>
+                </a:solidFill>
+                <a:latin typeface="Malgun Gothic" pitchFamily="34" charset="0"/>
+                <a:ea typeface="Malgun Gothic" pitchFamily="34" charset="-122"/>
+                <a:cs typeface="Malgun Gothic" pitchFamily="34" charset="-120"/>
+              </a:rPr>
+              <a:t>결론 및 향후 연구 방향</a:t>
+            </a:r>
+            <a:endParaRPr lang="en-US" sz="2175" dirty="0"/>
+          </a:p>
+        </p:txBody>
+      </p:sp>
+      <p:sp>
+        <p:nvSpPr>
+          <p:cNvPr id="31" name="Text 29"/>
+          <p:cNvSpPr txBox="1"/>
+          <p:nvPr/>
+        </p:nvSpPr>
+        <p:spPr>
+          <a:xfrm>
+            <a:off x="7839060" y="4648170"/>
+            <a:ext cx="3600450" cy="1243035"/>
+          </a:xfrm>
+          <a:prstGeom prst="rect">
+            <a:avLst/>
+          </a:prstGeom>
+          <a:noFill/>
+          <a:ln/>
+        </p:spPr>
+        <p:txBody>
+          <a:bodyPr wrap="square" lIns="0" tIns="0" rIns="0" bIns="0" rtlCol="0" anchor="t"/>
+          <a:lstStyle/>
+          <a:p>
+            <a:pPr algn="l" indent="0" marL="0">
+              <a:lnSpc>
+                <a:spcPts val="3263"/>
+              </a:lnSpc>
+              <a:buNone/>
+            </a:pPr>
+            <a:r>
+              <a:rPr lang="en-US" sz="2175" spc="-54" kern="0" dirty="0">
+                <a:solidFill>
+                  <a:srgbClr val="64748B"/>
+                </a:solidFill>
+                <a:latin typeface="Malgun Gothic" pitchFamily="34" charset="0"/>
+                <a:ea typeface="Malgun Gothic" pitchFamily="34" charset="-122"/>
+                <a:cs typeface="Malgun Gothic" pitchFamily="34" charset="-120"/>
+              </a:rPr>
+              <a:t>• 온디바이스 멀티모달 확장 방안</a:t>
+            </a:r>
+            <a:endParaRPr lang="en-US" sz="2175" dirty="0"/>
+          </a:p>
+          <a:p>
+            <a:pPr algn="l" indent="0" marL="0">
+              <a:lnSpc>
+                <a:spcPts val="3263"/>
+              </a:lnSpc>
+              <a:buNone/>
+            </a:pPr>
+            <a:r>
+              <a:rPr lang="en-US" sz="2175" spc="-54" kern="0" dirty="0">
+                <a:solidFill>
+                  <a:srgbClr val="64748B"/>
+                </a:solidFill>
+                <a:latin typeface="Malgun Gothic" pitchFamily="34" charset="0"/>
+                <a:ea typeface="Malgun Gothic" pitchFamily="34" charset="-122"/>
+                <a:cs typeface="Malgun Gothic" pitchFamily="34" charset="-120"/>
+              </a:rPr>
+              <a:t>• 연속 학습(Continual Learning)</a:t>
+            </a:r>
+            <a:endParaRPr lang="en-US" sz="2175" dirty="0"/>
+          </a:p>
+          <a:p>
+            <a:pPr algn="l" indent="0" marL="0">
+              <a:lnSpc>
+                <a:spcPts val="3263"/>
+              </a:lnSpc>
+              <a:buNone/>
+            </a:pPr>
+            <a:r>
+              <a:rPr lang="en-US" sz="2175" spc="-54" kern="0" dirty="0">
+                <a:solidFill>
+                  <a:srgbClr val="64748B"/>
+                </a:solidFill>
+                <a:latin typeface="Malgun Gothic" pitchFamily="34" charset="0"/>
+                <a:ea typeface="Malgun Gothic" pitchFamily="34" charset="-122"/>
+                <a:cs typeface="Malgun Gothic" pitchFamily="34" charset="-120"/>
+              </a:rPr>
+              <a:t>• 오픈소스 모델 가중치 공개 계획</a:t>
+            </a:r>
+            <a:endParaRPr lang="en-US" sz="2175" dirty="0"/>
+          </a:p>
+        </p:txBody>
+      </p:sp>
     </p:spTree>
   </p:cSld>
   <p:clrMapOvr>
@@ -1385,16 +3108,9 @@
   <p:cSld name="Slide 3">
     <p:bg>
       <p:bgPr>
-        <a:blipFill dpi="0" rotWithShape="1">
-          <a:blip r:embed="rId1">
-            <a:lum/>
-          </a:blip>
-          <a:srcRect/>
-          <a:stretch>
-            <a:fillRect/>
-          </a:stretch>
-        </a:blipFill>
-        <a:effectLst/>
+        <a:solidFill>
+          <a:srgbClr val="F8FAFC"/>
+        </a:solidFill>
       </p:bgPr>
     </p:bg>
     <p:spTree>
@@ -1411,6 +3127,1201 @@
           <a:chExt cx="0" cy="0"/>
         </a:xfrm>
       </p:grpSpPr>
+      <p:sp>
+        <p:nvSpPr>
+          <p:cNvPr id="2" name="Shape 0"/>
+          <p:cNvSpPr/>
+          <p:nvPr/>
+        </p:nvSpPr>
+        <p:spPr>
+          <a:xfrm>
+            <a:off x="4611685" y="1358158"/>
+            <a:ext cx="2968417" cy="418521"/>
+          </a:xfrm>
+          <a:prstGeom prst="roundRect">
+            <a:avLst>
+              <a:gd name="adj" fmla="val 50011"/>
+            </a:avLst>
+          </a:prstGeom>
+          <a:solidFill>
+            <a:srgbClr val="4F46E5">
+              <a:alpha val="10000"/>
+            </a:srgbClr>
+          </a:solidFill>
+          <a:ln w="9525">
+            <a:solidFill>
+              <a:srgbClr val="4F46E5">
+                <a:alpha val="25000"/>
+              </a:srgbClr>
+            </a:solidFill>
+            <a:prstDash val="solid"/>
+          </a:ln>
+        </p:spPr>
+      </p:sp>
+      <p:sp>
+        <p:nvSpPr>
+          <p:cNvPr id="3" name="Text 1"/>
+          <p:cNvSpPr txBox="1"/>
+          <p:nvPr/>
+        </p:nvSpPr>
+        <p:spPr>
+          <a:xfrm>
+            <a:off x="4539996" y="1401409"/>
+            <a:ext cx="3111886" cy="323149"/>
+          </a:xfrm>
+          <a:prstGeom prst="rect">
+            <a:avLst/>
+          </a:prstGeom>
+          <a:noFill/>
+          <a:ln/>
+        </p:spPr>
+        <p:txBody>
+          <a:bodyPr wrap="none" lIns="0" tIns="0" rIns="0" bIns="0" rtlCol="0" anchor="t"/>
+          <a:lstStyle/>
+          <a:p>
+            <a:pPr algn="ctr" indent="0" marL="0">
+              <a:lnSpc>
+                <a:spcPts val="2545"/>
+              </a:lnSpc>
+              <a:buNone/>
+            </a:pPr>
+            <a:r>
+              <a:rPr lang="en-US" sz="1697" b="1" spc="34" kern="0" dirty="0">
+                <a:solidFill>
+                  <a:srgbClr val="4F46E5"/>
+                </a:solidFill>
+                <a:latin typeface="Malgun Gothic" pitchFamily="34" charset="0"/>
+                <a:ea typeface="Malgun Gothic" pitchFamily="34" charset="-122"/>
+                <a:cs typeface="Malgun Gothic" pitchFamily="34" charset="-120"/>
+              </a:rPr>
+              <a:t>EXPERIMENTAL RESULTS</a:t>
+            </a:r>
+            <a:endParaRPr lang="en-US" sz="1697" dirty="0"/>
+          </a:p>
+        </p:txBody>
+      </p:sp>
+      <p:sp>
+        <p:nvSpPr>
+          <p:cNvPr id="4" name="Text 2"/>
+          <p:cNvSpPr txBox="1"/>
+          <p:nvPr/>
+        </p:nvSpPr>
+        <p:spPr>
+          <a:xfrm>
+            <a:off x="-334488" y="1852849"/>
+            <a:ext cx="12861036" cy="590611"/>
+          </a:xfrm>
+          <a:prstGeom prst="rect">
+            <a:avLst/>
+          </a:prstGeom>
+          <a:noFill/>
+          <a:ln/>
+        </p:spPr>
+        <p:txBody>
+          <a:bodyPr wrap="none" lIns="0" tIns="0" rIns="0" bIns="0" rtlCol="0" anchor="t"/>
+          <a:lstStyle/>
+          <a:p>
+            <a:pPr algn="ctr" indent="0" marL="0">
+              <a:lnSpc>
+                <a:spcPts val="4651"/>
+              </a:lnSpc>
+              <a:buNone/>
+            </a:pPr>
+            <a:r>
+              <a:rPr lang="en-US" sz="3524" b="1" spc="-88" kern="0" dirty="0">
+                <a:solidFill>
+                  <a:srgbClr val="0F172A"/>
+                </a:solidFill>
+                <a:latin typeface="Malgun Gothic" pitchFamily="34" charset="0"/>
+                <a:ea typeface="Malgun Gothic" pitchFamily="34" charset="-122"/>
+                <a:cs typeface="Malgun Gothic" pitchFamily="34" charset="-120"/>
+              </a:rPr>
+              <a:t>3대 핵심 연구 성과 및 벤치마크 검증</a:t>
+            </a:r>
+            <a:endParaRPr lang="en-US" sz="3524" dirty="0"/>
+          </a:p>
+        </p:txBody>
+      </p:sp>
+      <p:sp>
+        <p:nvSpPr>
+          <p:cNvPr id="5" name="Text 3"/>
+          <p:cNvSpPr txBox="1"/>
+          <p:nvPr/>
+        </p:nvSpPr>
+        <p:spPr>
+          <a:xfrm>
+            <a:off x="-334488" y="2626614"/>
+            <a:ext cx="12861036" cy="397764"/>
+          </a:xfrm>
+          <a:prstGeom prst="rect">
+            <a:avLst/>
+          </a:prstGeom>
+          <a:noFill/>
+          <a:ln/>
+        </p:spPr>
+        <p:txBody>
+          <a:bodyPr wrap="none" lIns="0" tIns="0" rIns="0" bIns="0" rtlCol="0" anchor="t"/>
+          <a:lstStyle/>
+          <a:p>
+            <a:pPr algn="ctr" indent="0" marL="0">
+              <a:lnSpc>
+                <a:spcPts val="3132"/>
+              </a:lnSpc>
+              <a:buNone/>
+            </a:pPr>
+            <a:r>
+              <a:rPr lang="en-US" sz="2088" spc="-54" kern="0" dirty="0">
+                <a:solidFill>
+                  <a:srgbClr val="64748B"/>
+                </a:solidFill>
+                <a:latin typeface="Malgun Gothic" pitchFamily="34" charset="0"/>
+                <a:ea typeface="Malgun Gothic" pitchFamily="34" charset="-122"/>
+                <a:cs typeface="Malgun Gothic" pitchFamily="34" charset="-120"/>
+              </a:rPr>
+              <a:t>양자화(Quantization)와 캐시 최적화를 통해 기존 모델 대비 처리 속도 3.4배 향상</a:t>
+            </a:r>
+            <a:endParaRPr lang="en-US" sz="2088" dirty="0"/>
+          </a:p>
+        </p:txBody>
+      </p:sp>
+      <p:sp>
+        <p:nvSpPr>
+          <p:cNvPr id="6" name="Shape 4"/>
+          <p:cNvSpPr/>
+          <p:nvPr/>
+        </p:nvSpPr>
+        <p:spPr>
+          <a:xfrm>
+            <a:off x="552480" y="3261482"/>
+            <a:ext cx="3594049" cy="2257196"/>
+          </a:xfrm>
+          <a:prstGeom prst="roundRect">
+            <a:avLst>
+              <a:gd name="adj" fmla="val 5906"/>
+            </a:avLst>
+          </a:prstGeom>
+          <a:solidFill>
+            <a:srgbClr val="FFFFFF"/>
+          </a:solidFill>
+          <a:ln/>
+        </p:spPr>
+      </p:sp>
+      <p:sp>
+        <p:nvSpPr>
+          <p:cNvPr id="7" name="Shape 5"/>
+          <p:cNvSpPr/>
+          <p:nvPr/>
+        </p:nvSpPr>
+        <p:spPr>
+          <a:xfrm>
+            <a:off x="552480" y="3261482"/>
+            <a:ext cx="3594049" cy="28621"/>
+          </a:xfrm>
+          <a:prstGeom prst="rect">
+            <a:avLst/>
+          </a:prstGeom>
+          <a:solidFill>
+            <a:srgbClr val="4F46E5"/>
+          </a:solidFill>
+          <a:ln/>
+        </p:spPr>
+      </p:sp>
+      <p:sp>
+        <p:nvSpPr>
+          <p:cNvPr id="8" name="Shape 6"/>
+          <p:cNvSpPr/>
+          <p:nvPr/>
+        </p:nvSpPr>
+        <p:spPr>
+          <a:xfrm>
+            <a:off x="4137020" y="3261482"/>
+            <a:ext cx="9510" cy="2257196"/>
+          </a:xfrm>
+          <a:prstGeom prst="rect">
+            <a:avLst/>
+          </a:prstGeom>
+          <a:solidFill>
+            <a:srgbClr val="E2E8F0"/>
+          </a:solidFill>
+          <a:ln/>
+        </p:spPr>
+      </p:sp>
+      <p:sp>
+        <p:nvSpPr>
+          <p:cNvPr id="9" name="Shape 7"/>
+          <p:cNvSpPr/>
+          <p:nvPr/>
+        </p:nvSpPr>
+        <p:spPr>
+          <a:xfrm>
+            <a:off x="552480" y="5509169"/>
+            <a:ext cx="3594049" cy="9510"/>
+          </a:xfrm>
+          <a:prstGeom prst="rect">
+            <a:avLst/>
+          </a:prstGeom>
+          <a:solidFill>
+            <a:srgbClr val="E2E8F0"/>
+          </a:solidFill>
+          <a:ln/>
+        </p:spPr>
+      </p:sp>
+      <p:sp>
+        <p:nvSpPr>
+          <p:cNvPr id="10" name="Shape 8"/>
+          <p:cNvSpPr/>
+          <p:nvPr/>
+        </p:nvSpPr>
+        <p:spPr>
+          <a:xfrm>
+            <a:off x="552480" y="3261482"/>
+            <a:ext cx="9510" cy="2257196"/>
+          </a:xfrm>
+          <a:prstGeom prst="rect">
+            <a:avLst/>
+          </a:prstGeom>
+          <a:solidFill>
+            <a:srgbClr val="E2E8F0"/>
+          </a:solidFill>
+          <a:ln/>
+        </p:spPr>
+      </p:sp>
+      <p:sp>
+        <p:nvSpPr>
+          <p:cNvPr id="11" name="Shape 9"/>
+          <p:cNvSpPr/>
+          <p:nvPr/>
+        </p:nvSpPr>
+        <p:spPr>
+          <a:xfrm>
+            <a:off x="771571" y="3480572"/>
+            <a:ext cx="247620" cy="247620"/>
+          </a:xfrm>
+          <a:prstGeom prst="roundRect">
+            <a:avLst>
+              <a:gd name="adj" fmla="val 50000"/>
+            </a:avLst>
+          </a:prstGeom>
+          <a:solidFill>
+            <a:srgbClr val="4F46E5">
+              <a:alpha val="12000"/>
+            </a:srgbClr>
+          </a:solidFill>
+          <a:ln w="9525">
+            <a:solidFill>
+              <a:srgbClr val="4F46E5">
+                <a:alpha val="35000"/>
+              </a:srgbClr>
+            </a:solidFill>
+            <a:prstDash val="solid"/>
+          </a:ln>
+        </p:spPr>
+      </p:sp>
+      <p:sp>
+        <p:nvSpPr>
+          <p:cNvPr id="12" name="Text 10"/>
+          <p:cNvSpPr txBox="1"/>
+          <p:nvPr/>
+        </p:nvSpPr>
+        <p:spPr>
+          <a:xfrm>
+            <a:off x="761970" y="3445916"/>
+            <a:ext cx="304770" cy="310805"/>
+          </a:xfrm>
+          <a:prstGeom prst="rect">
+            <a:avLst/>
+          </a:prstGeom>
+          <a:noFill/>
+          <a:ln/>
+        </p:spPr>
+        <p:txBody>
+          <a:bodyPr wrap="none" lIns="0" tIns="0" rIns="0" bIns="0" rtlCol="0" anchor="t"/>
+          <a:lstStyle/>
+          <a:p>
+            <a:pPr algn="l" indent="0" marL="0">
+              <a:lnSpc>
+                <a:spcPts val="2447"/>
+              </a:lnSpc>
+              <a:buNone/>
+            </a:pPr>
+            <a:r>
+              <a:rPr lang="en-US" sz="1631" b="1" spc="-54" kern="0" dirty="0">
+                <a:solidFill>
+                  <a:srgbClr val="4F46E5"/>
+                </a:solidFill>
+                <a:latin typeface="Malgun Gothic" pitchFamily="34" charset="0"/>
+                <a:ea typeface="Malgun Gothic" pitchFamily="34" charset="-122"/>
+                <a:cs typeface="Malgun Gothic" pitchFamily="34" charset="-120"/>
+              </a:rPr>
+              <a:t>01</a:t>
+            </a:r>
+            <a:endParaRPr lang="en-US" sz="1631" dirty="0"/>
+          </a:p>
+        </p:txBody>
+      </p:sp>
+      <p:sp>
+        <p:nvSpPr>
+          <p:cNvPr id="13" name="Text 11"/>
+          <p:cNvSpPr txBox="1"/>
+          <p:nvPr/>
+        </p:nvSpPr>
+        <p:spPr>
+          <a:xfrm>
+            <a:off x="752460" y="3801892"/>
+            <a:ext cx="3427446" cy="224028"/>
+          </a:xfrm>
+          <a:prstGeom prst="rect">
+            <a:avLst/>
+          </a:prstGeom>
+          <a:noFill/>
+          <a:ln/>
+        </p:spPr>
+        <p:txBody>
+          <a:bodyPr wrap="none" lIns="0" tIns="0" rIns="0" bIns="0" rtlCol="0" anchor="t"/>
+          <a:lstStyle/>
+          <a:p>
+            <a:pPr algn="l" indent="0" marL="0">
+              <a:lnSpc>
+                <a:spcPts val="1764"/>
+              </a:lnSpc>
+              <a:buNone/>
+            </a:pPr>
+            <a:r>
+              <a:rPr lang="en-US" sz="1176" b="1" spc="-54" kern="0" dirty="0">
+                <a:solidFill>
+                  <a:srgbClr val="0F172A"/>
+                </a:solidFill>
+                <a:latin typeface="Malgun Gothic" pitchFamily="34" charset="0"/>
+                <a:ea typeface="Malgun Gothic" pitchFamily="34" charset="-122"/>
+                <a:cs typeface="Malgun Gothic" pitchFamily="34" charset="-120"/>
+              </a:rPr>
+              <a:t>추론 지연시간 68% 단축</a:t>
+            </a:r>
+            <a:endParaRPr lang="en-US" sz="1176" dirty="0"/>
+          </a:p>
+        </p:txBody>
+      </p:sp>
+      <p:sp>
+        <p:nvSpPr>
+          <p:cNvPr id="14" name="Text 12"/>
+          <p:cNvSpPr txBox="1"/>
+          <p:nvPr/>
+        </p:nvSpPr>
+        <p:spPr>
+          <a:xfrm>
+            <a:off x="904890" y="4133454"/>
+            <a:ext cx="3262854" cy="342534"/>
+          </a:xfrm>
+          <a:prstGeom prst="rect">
+            <a:avLst/>
+          </a:prstGeom>
+          <a:noFill/>
+          <a:ln/>
+        </p:spPr>
+        <p:txBody>
+          <a:bodyPr wrap="none" lIns="0" tIns="0" rIns="0" bIns="0" rtlCol="0" anchor="t"/>
+          <a:lstStyle/>
+          <a:p>
+            <a:pPr algn="l" marL="342900" indent="-342900">
+              <a:lnSpc>
+                <a:spcPts val="2697"/>
+              </a:lnSpc>
+              <a:buSzPct val="100000"/>
+              <a:buChar char="•"/>
+            </a:pPr>
+            <a:r>
+              <a:rPr lang="en-US" sz="1740" spc="-54" kern="0" dirty="0">
+                <a:solidFill>
+                  <a:srgbClr val="334155"/>
+                </a:solidFill>
+                <a:latin typeface="Malgun Gothic" pitchFamily="34" charset="0"/>
+                <a:ea typeface="Malgun Gothic" pitchFamily="34" charset="-122"/>
+                <a:cs typeface="Malgun Gothic" pitchFamily="34" charset="-120"/>
+              </a:rPr>
+              <a:t>KV 캐시 프루닝(Pruning) 기법 적용</a:t>
+            </a:r>
+            <a:endParaRPr lang="en-US" sz="1740" dirty="0"/>
+          </a:p>
+        </p:txBody>
+      </p:sp>
+      <p:sp>
+        <p:nvSpPr>
+          <p:cNvPr id="15" name="Text 13"/>
+          <p:cNvSpPr txBox="1"/>
+          <p:nvPr/>
+        </p:nvSpPr>
+        <p:spPr>
+          <a:xfrm>
+            <a:off x="904890" y="4531126"/>
+            <a:ext cx="3262854" cy="342534"/>
+          </a:xfrm>
+          <a:prstGeom prst="rect">
+            <a:avLst/>
+          </a:prstGeom>
+          <a:noFill/>
+          <a:ln/>
+        </p:spPr>
+        <p:txBody>
+          <a:bodyPr wrap="none" lIns="0" tIns="0" rIns="0" bIns="0" rtlCol="0" anchor="t"/>
+          <a:lstStyle/>
+          <a:p>
+            <a:pPr algn="l" marL="342900" indent="-342900">
+              <a:lnSpc>
+                <a:spcPts val="2697"/>
+              </a:lnSpc>
+              <a:buSzPct val="100000"/>
+              <a:buChar char="•"/>
+            </a:pPr>
+            <a:r>
+              <a:rPr lang="en-US" sz="1740" spc="-54" kern="0" dirty="0">
+                <a:solidFill>
+                  <a:srgbClr val="334155"/>
+                </a:solidFill>
+                <a:latin typeface="Malgun Gothic" pitchFamily="34" charset="0"/>
+                <a:ea typeface="Malgun Gothic" pitchFamily="34" charset="-122"/>
+                <a:cs typeface="Malgun Gothic" pitchFamily="34" charset="-120"/>
+              </a:rPr>
+              <a:t>첫 토큰 생성(TTFT) 42ms 달성</a:t>
+            </a:r>
+            <a:endParaRPr lang="en-US" sz="1740" dirty="0"/>
+          </a:p>
+        </p:txBody>
+      </p:sp>
+      <p:sp>
+        <p:nvSpPr>
+          <p:cNvPr id="16" name="Text 14"/>
+          <p:cNvSpPr txBox="1"/>
+          <p:nvPr/>
+        </p:nvSpPr>
+        <p:spPr>
+          <a:xfrm>
+            <a:off x="904890" y="4928799"/>
+            <a:ext cx="3262854" cy="342534"/>
+          </a:xfrm>
+          <a:prstGeom prst="rect">
+            <a:avLst/>
+          </a:prstGeom>
+          <a:noFill/>
+          <a:ln/>
+        </p:spPr>
+        <p:txBody>
+          <a:bodyPr wrap="none" lIns="0" tIns="0" rIns="0" bIns="0" rtlCol="0" anchor="t"/>
+          <a:lstStyle/>
+          <a:p>
+            <a:pPr algn="l" marL="342900" indent="-342900">
+              <a:lnSpc>
+                <a:spcPts val="2697"/>
+              </a:lnSpc>
+              <a:buSzPct val="100000"/>
+              <a:buChar char="•"/>
+            </a:pPr>
+            <a:r>
+              <a:rPr lang="en-US" sz="1740" spc="-54" kern="0" dirty="0">
+                <a:solidFill>
+                  <a:srgbClr val="334155"/>
+                </a:solidFill>
+                <a:latin typeface="Malgun Gothic" pitchFamily="34" charset="0"/>
+                <a:ea typeface="Malgun Gothic" pitchFamily="34" charset="-122"/>
+                <a:cs typeface="Malgun Gothic" pitchFamily="34" charset="-120"/>
+              </a:rPr>
+              <a:t>초당 38.5 토큰 실시간 스트리밍</a:t>
+            </a:r>
+            <a:endParaRPr lang="en-US" sz="1740" dirty="0"/>
+          </a:p>
+        </p:txBody>
+      </p:sp>
+      <p:sp>
+        <p:nvSpPr>
+          <p:cNvPr id="17" name="Shape 15"/>
+          <p:cNvSpPr/>
+          <p:nvPr/>
+        </p:nvSpPr>
+        <p:spPr>
+          <a:xfrm>
+            <a:off x="4298960" y="3261482"/>
+            <a:ext cx="3594049" cy="2257196"/>
+          </a:xfrm>
+          <a:prstGeom prst="roundRect">
+            <a:avLst>
+              <a:gd name="adj" fmla="val 5906"/>
+            </a:avLst>
+          </a:prstGeom>
+          <a:solidFill>
+            <a:srgbClr val="FFFFFF"/>
+          </a:solidFill>
+          <a:ln/>
+        </p:spPr>
+      </p:sp>
+      <p:sp>
+        <p:nvSpPr>
+          <p:cNvPr id="18" name="Shape 16"/>
+          <p:cNvSpPr/>
+          <p:nvPr/>
+        </p:nvSpPr>
+        <p:spPr>
+          <a:xfrm>
+            <a:off x="4298960" y="3261482"/>
+            <a:ext cx="3594049" cy="28621"/>
+          </a:xfrm>
+          <a:prstGeom prst="rect">
+            <a:avLst/>
+          </a:prstGeom>
+          <a:solidFill>
+            <a:srgbClr val="0284C7"/>
+          </a:solidFill>
+          <a:ln/>
+        </p:spPr>
+      </p:sp>
+      <p:sp>
+        <p:nvSpPr>
+          <p:cNvPr id="19" name="Shape 17"/>
+          <p:cNvSpPr/>
+          <p:nvPr/>
+        </p:nvSpPr>
+        <p:spPr>
+          <a:xfrm>
+            <a:off x="7883500" y="3261482"/>
+            <a:ext cx="9510" cy="2257196"/>
+          </a:xfrm>
+          <a:prstGeom prst="rect">
+            <a:avLst/>
+          </a:prstGeom>
+          <a:solidFill>
+            <a:srgbClr val="E2E8F0"/>
+          </a:solidFill>
+          <a:ln/>
+        </p:spPr>
+      </p:sp>
+      <p:sp>
+        <p:nvSpPr>
+          <p:cNvPr id="20" name="Shape 18"/>
+          <p:cNvSpPr/>
+          <p:nvPr/>
+        </p:nvSpPr>
+        <p:spPr>
+          <a:xfrm>
+            <a:off x="4298960" y="5509169"/>
+            <a:ext cx="3594049" cy="9510"/>
+          </a:xfrm>
+          <a:prstGeom prst="rect">
+            <a:avLst/>
+          </a:prstGeom>
+          <a:solidFill>
+            <a:srgbClr val="E2E8F0"/>
+          </a:solidFill>
+          <a:ln/>
+        </p:spPr>
+      </p:sp>
+      <p:sp>
+        <p:nvSpPr>
+          <p:cNvPr id="21" name="Shape 19"/>
+          <p:cNvSpPr/>
+          <p:nvPr/>
+        </p:nvSpPr>
+        <p:spPr>
+          <a:xfrm>
+            <a:off x="4298960" y="3261482"/>
+            <a:ext cx="9510" cy="2257196"/>
+          </a:xfrm>
+          <a:prstGeom prst="rect">
+            <a:avLst/>
+          </a:prstGeom>
+          <a:solidFill>
+            <a:srgbClr val="E2E8F0"/>
+          </a:solidFill>
+          <a:ln/>
+        </p:spPr>
+      </p:sp>
+      <p:sp>
+        <p:nvSpPr>
+          <p:cNvPr id="22" name="Shape 20"/>
+          <p:cNvSpPr/>
+          <p:nvPr/>
+        </p:nvSpPr>
+        <p:spPr>
+          <a:xfrm>
+            <a:off x="4517959" y="3480572"/>
+            <a:ext cx="247620" cy="247620"/>
+          </a:xfrm>
+          <a:prstGeom prst="roundRect">
+            <a:avLst>
+              <a:gd name="adj" fmla="val 50000"/>
+            </a:avLst>
+          </a:prstGeom>
+          <a:solidFill>
+            <a:srgbClr val="0284C7">
+              <a:alpha val="12000"/>
+            </a:srgbClr>
+          </a:solidFill>
+          <a:ln w="9525">
+            <a:solidFill>
+              <a:srgbClr val="0284C7">
+                <a:alpha val="35000"/>
+              </a:srgbClr>
+            </a:solidFill>
+            <a:prstDash val="solid"/>
+          </a:ln>
+        </p:spPr>
+      </p:sp>
+      <p:sp>
+        <p:nvSpPr>
+          <p:cNvPr id="23" name="Text 21"/>
+          <p:cNvSpPr txBox="1"/>
+          <p:nvPr/>
+        </p:nvSpPr>
+        <p:spPr>
+          <a:xfrm>
+            <a:off x="4508449" y="3445916"/>
+            <a:ext cx="304770" cy="310805"/>
+          </a:xfrm>
+          <a:prstGeom prst="rect">
+            <a:avLst/>
+          </a:prstGeom>
+          <a:noFill/>
+          <a:ln/>
+        </p:spPr>
+        <p:txBody>
+          <a:bodyPr wrap="none" lIns="0" tIns="0" rIns="0" bIns="0" rtlCol="0" anchor="t"/>
+          <a:lstStyle/>
+          <a:p>
+            <a:pPr algn="l" indent="0" marL="0">
+              <a:lnSpc>
+                <a:spcPts val="2447"/>
+              </a:lnSpc>
+              <a:buNone/>
+            </a:pPr>
+            <a:r>
+              <a:rPr lang="en-US" sz="1631" b="1" spc="-54" kern="0" dirty="0">
+                <a:solidFill>
+                  <a:srgbClr val="0284C7"/>
+                </a:solidFill>
+                <a:latin typeface="Malgun Gothic" pitchFamily="34" charset="0"/>
+                <a:ea typeface="Malgun Gothic" pitchFamily="34" charset="-122"/>
+                <a:cs typeface="Malgun Gothic" pitchFamily="34" charset="-120"/>
+              </a:rPr>
+              <a:t>02</a:t>
+            </a:r>
+            <a:endParaRPr lang="en-US" sz="1631" dirty="0"/>
+          </a:p>
+        </p:txBody>
+      </p:sp>
+      <p:sp>
+        <p:nvSpPr>
+          <p:cNvPr id="24" name="Text 22"/>
+          <p:cNvSpPr txBox="1"/>
+          <p:nvPr/>
+        </p:nvSpPr>
+        <p:spPr>
+          <a:xfrm>
+            <a:off x="4498939" y="3801892"/>
+            <a:ext cx="3427446" cy="224028"/>
+          </a:xfrm>
+          <a:prstGeom prst="rect">
+            <a:avLst/>
+          </a:prstGeom>
+          <a:noFill/>
+          <a:ln/>
+        </p:spPr>
+        <p:txBody>
+          <a:bodyPr wrap="none" lIns="0" tIns="0" rIns="0" bIns="0" rtlCol="0" anchor="t"/>
+          <a:lstStyle/>
+          <a:p>
+            <a:pPr algn="l" indent="0" marL="0">
+              <a:lnSpc>
+                <a:spcPts val="1764"/>
+              </a:lnSpc>
+              <a:buNone/>
+            </a:pPr>
+            <a:r>
+              <a:rPr lang="en-US" sz="1176" b="1" spc="-54" kern="0" dirty="0">
+                <a:solidFill>
+                  <a:srgbClr val="0F172A"/>
+                </a:solidFill>
+                <a:latin typeface="Malgun Gothic" pitchFamily="34" charset="0"/>
+                <a:ea typeface="Malgun Gothic" pitchFamily="34" charset="-122"/>
+                <a:cs typeface="Malgun Gothic" pitchFamily="34" charset="-120"/>
+              </a:rPr>
+              <a:t>RAM 점유율 1.8GB 유지</a:t>
+            </a:r>
+            <a:endParaRPr lang="en-US" sz="1176" dirty="0"/>
+          </a:p>
+        </p:txBody>
+      </p:sp>
+      <p:sp>
+        <p:nvSpPr>
+          <p:cNvPr id="25" name="Text 23"/>
+          <p:cNvSpPr txBox="1"/>
+          <p:nvPr/>
+        </p:nvSpPr>
+        <p:spPr>
+          <a:xfrm>
+            <a:off x="4651370" y="4133454"/>
+            <a:ext cx="3262854" cy="342534"/>
+          </a:xfrm>
+          <a:prstGeom prst="rect">
+            <a:avLst/>
+          </a:prstGeom>
+          <a:noFill/>
+          <a:ln/>
+        </p:spPr>
+        <p:txBody>
+          <a:bodyPr wrap="none" lIns="0" tIns="0" rIns="0" bIns="0" rtlCol="0" anchor="t"/>
+          <a:lstStyle/>
+          <a:p>
+            <a:pPr algn="l" marL="342900" indent="-342900">
+              <a:lnSpc>
+                <a:spcPts val="2697"/>
+              </a:lnSpc>
+              <a:buSzPct val="100000"/>
+              <a:buChar char="•"/>
+            </a:pPr>
+            <a:r>
+              <a:rPr lang="en-US" sz="1740" spc="-54" kern="0" dirty="0">
+                <a:solidFill>
+                  <a:srgbClr val="334155"/>
+                </a:solidFill>
+                <a:latin typeface="Malgun Gothic" pitchFamily="34" charset="0"/>
+                <a:ea typeface="Malgun Gothic" pitchFamily="34" charset="-122"/>
+                <a:cs typeface="Malgun Gothic" pitchFamily="34" charset="-120"/>
+              </a:rPr>
+              <a:t>4-bit AWQ 양자화로 압축률 극대화</a:t>
+            </a:r>
+            <a:endParaRPr lang="en-US" sz="1740" dirty="0"/>
+          </a:p>
+        </p:txBody>
+      </p:sp>
+      <p:sp>
+        <p:nvSpPr>
+          <p:cNvPr id="26" name="Text 24"/>
+          <p:cNvSpPr txBox="1"/>
+          <p:nvPr/>
+        </p:nvSpPr>
+        <p:spPr>
+          <a:xfrm>
+            <a:off x="4651370" y="4531126"/>
+            <a:ext cx="3262854" cy="342534"/>
+          </a:xfrm>
+          <a:prstGeom prst="rect">
+            <a:avLst/>
+          </a:prstGeom>
+          <a:noFill/>
+          <a:ln/>
+        </p:spPr>
+        <p:txBody>
+          <a:bodyPr wrap="none" lIns="0" tIns="0" rIns="0" bIns="0" rtlCol="0" anchor="t"/>
+          <a:lstStyle/>
+          <a:p>
+            <a:pPr algn="l" marL="342900" indent="-342900">
+              <a:lnSpc>
+                <a:spcPts val="2697"/>
+              </a:lnSpc>
+              <a:buSzPct val="100000"/>
+              <a:buChar char="•"/>
+            </a:pPr>
+            <a:r>
+              <a:rPr lang="en-US" sz="1740" spc="-54" kern="0" dirty="0">
+                <a:solidFill>
+                  <a:srgbClr val="334155"/>
+                </a:solidFill>
+                <a:latin typeface="Malgun Gothic" pitchFamily="34" charset="0"/>
+                <a:ea typeface="Malgun Gothic" pitchFamily="34" charset="-122"/>
+                <a:cs typeface="Malgun Gothic" pitchFamily="34" charset="-120"/>
+              </a:rPr>
+              <a:t>모바일 저전력 LPDDR5X 완벽 지원</a:t>
+            </a:r>
+            <a:endParaRPr lang="en-US" sz="1740" dirty="0"/>
+          </a:p>
+        </p:txBody>
+      </p:sp>
+      <p:sp>
+        <p:nvSpPr>
+          <p:cNvPr id="27" name="Text 25"/>
+          <p:cNvSpPr txBox="1"/>
+          <p:nvPr/>
+        </p:nvSpPr>
+        <p:spPr>
+          <a:xfrm>
+            <a:off x="4651370" y="4928799"/>
+            <a:ext cx="3262854" cy="342534"/>
+          </a:xfrm>
+          <a:prstGeom prst="rect">
+            <a:avLst/>
+          </a:prstGeom>
+          <a:noFill/>
+          <a:ln/>
+        </p:spPr>
+        <p:txBody>
+          <a:bodyPr wrap="none" lIns="0" tIns="0" rIns="0" bIns="0" rtlCol="0" anchor="t"/>
+          <a:lstStyle/>
+          <a:p>
+            <a:pPr algn="l" marL="342900" indent="-342900">
+              <a:lnSpc>
+                <a:spcPts val="2697"/>
+              </a:lnSpc>
+              <a:buSzPct val="100000"/>
+              <a:buChar char="•"/>
+            </a:pPr>
+            <a:r>
+              <a:rPr lang="en-US" sz="1740" spc="-54" kern="0" dirty="0">
+                <a:solidFill>
+                  <a:srgbClr val="334155"/>
+                </a:solidFill>
+                <a:latin typeface="Malgun Gothic" pitchFamily="34" charset="0"/>
+                <a:ea typeface="Malgun Gothic" pitchFamily="34" charset="-122"/>
+                <a:cs typeface="Malgun Gothic" pitchFamily="34" charset="-120"/>
+              </a:rPr>
+              <a:t>백그라운드 메모리 누수 0% 달성</a:t>
+            </a:r>
+            <a:endParaRPr lang="en-US" sz="1740" dirty="0"/>
+          </a:p>
+        </p:txBody>
+      </p:sp>
+      <p:sp>
+        <p:nvSpPr>
+          <p:cNvPr id="28" name="Shape 26"/>
+          <p:cNvSpPr/>
+          <p:nvPr/>
+        </p:nvSpPr>
+        <p:spPr>
+          <a:xfrm>
+            <a:off x="8045348" y="3261482"/>
+            <a:ext cx="3594141" cy="2257196"/>
+          </a:xfrm>
+          <a:prstGeom prst="roundRect">
+            <a:avLst>
+              <a:gd name="adj" fmla="val 5906"/>
+            </a:avLst>
+          </a:prstGeom>
+          <a:solidFill>
+            <a:srgbClr val="FFFFFF"/>
+          </a:solidFill>
+          <a:ln/>
+        </p:spPr>
+      </p:sp>
+      <p:sp>
+        <p:nvSpPr>
+          <p:cNvPr id="29" name="Shape 27"/>
+          <p:cNvSpPr/>
+          <p:nvPr/>
+        </p:nvSpPr>
+        <p:spPr>
+          <a:xfrm>
+            <a:off x="8045348" y="3261482"/>
+            <a:ext cx="3594141" cy="28621"/>
+          </a:xfrm>
+          <a:prstGeom prst="rect">
+            <a:avLst/>
+          </a:prstGeom>
+          <a:solidFill>
+            <a:srgbClr val="059669"/>
+          </a:solidFill>
+          <a:ln/>
+        </p:spPr>
+      </p:sp>
+      <p:sp>
+        <p:nvSpPr>
+          <p:cNvPr id="30" name="Shape 28"/>
+          <p:cNvSpPr/>
+          <p:nvPr/>
+        </p:nvSpPr>
+        <p:spPr>
+          <a:xfrm>
+            <a:off x="11630071" y="3261482"/>
+            <a:ext cx="9510" cy="2257196"/>
+          </a:xfrm>
+          <a:prstGeom prst="rect">
+            <a:avLst/>
+          </a:prstGeom>
+          <a:solidFill>
+            <a:srgbClr val="E2E8F0"/>
+          </a:solidFill>
+          <a:ln/>
+        </p:spPr>
+      </p:sp>
+      <p:sp>
+        <p:nvSpPr>
+          <p:cNvPr id="31" name="Shape 29"/>
+          <p:cNvSpPr/>
+          <p:nvPr/>
+        </p:nvSpPr>
+        <p:spPr>
+          <a:xfrm>
+            <a:off x="8045348" y="5509169"/>
+            <a:ext cx="3594141" cy="9510"/>
+          </a:xfrm>
+          <a:prstGeom prst="rect">
+            <a:avLst/>
+          </a:prstGeom>
+          <a:solidFill>
+            <a:srgbClr val="E2E8F0"/>
+          </a:solidFill>
+          <a:ln/>
+        </p:spPr>
+      </p:sp>
+      <p:sp>
+        <p:nvSpPr>
+          <p:cNvPr id="32" name="Shape 30"/>
+          <p:cNvSpPr/>
+          <p:nvPr/>
+        </p:nvSpPr>
+        <p:spPr>
+          <a:xfrm>
+            <a:off x="8045348" y="3261482"/>
+            <a:ext cx="9510" cy="2257196"/>
+          </a:xfrm>
+          <a:prstGeom prst="rect">
+            <a:avLst/>
+          </a:prstGeom>
+          <a:solidFill>
+            <a:srgbClr val="E2E8F0"/>
+          </a:solidFill>
+          <a:ln/>
+        </p:spPr>
+      </p:sp>
+      <p:sp>
+        <p:nvSpPr>
+          <p:cNvPr id="33" name="Shape 31"/>
+          <p:cNvSpPr/>
+          <p:nvPr/>
+        </p:nvSpPr>
+        <p:spPr>
+          <a:xfrm>
+            <a:off x="8264439" y="3480572"/>
+            <a:ext cx="247620" cy="247620"/>
+          </a:xfrm>
+          <a:prstGeom prst="roundRect">
+            <a:avLst>
+              <a:gd name="adj" fmla="val 50000"/>
+            </a:avLst>
+          </a:prstGeom>
+          <a:solidFill>
+            <a:srgbClr val="059669">
+              <a:alpha val="12000"/>
+            </a:srgbClr>
+          </a:solidFill>
+          <a:ln w="9525">
+            <a:solidFill>
+              <a:srgbClr val="059669">
+                <a:alpha val="35000"/>
+              </a:srgbClr>
+            </a:solidFill>
+            <a:prstDash val="solid"/>
+          </a:ln>
+        </p:spPr>
+      </p:sp>
+      <p:sp>
+        <p:nvSpPr>
+          <p:cNvPr id="34" name="Text 32"/>
+          <p:cNvSpPr txBox="1"/>
+          <p:nvPr/>
+        </p:nvSpPr>
+        <p:spPr>
+          <a:xfrm>
+            <a:off x="8254929" y="3445916"/>
+            <a:ext cx="304770" cy="310805"/>
+          </a:xfrm>
+          <a:prstGeom prst="rect">
+            <a:avLst/>
+          </a:prstGeom>
+          <a:noFill/>
+          <a:ln/>
+        </p:spPr>
+        <p:txBody>
+          <a:bodyPr wrap="none" lIns="0" tIns="0" rIns="0" bIns="0" rtlCol="0" anchor="t"/>
+          <a:lstStyle/>
+          <a:p>
+            <a:pPr algn="l" indent="0" marL="0">
+              <a:lnSpc>
+                <a:spcPts val="2447"/>
+              </a:lnSpc>
+              <a:buNone/>
+            </a:pPr>
+            <a:r>
+              <a:rPr lang="en-US" sz="1631" b="1" spc="-54" kern="0" dirty="0">
+                <a:solidFill>
+                  <a:srgbClr val="059669"/>
+                </a:solidFill>
+                <a:latin typeface="Malgun Gothic" pitchFamily="34" charset="0"/>
+                <a:ea typeface="Malgun Gothic" pitchFamily="34" charset="-122"/>
+                <a:cs typeface="Malgun Gothic" pitchFamily="34" charset="-120"/>
+              </a:rPr>
+              <a:t>03</a:t>
+            </a:r>
+            <a:endParaRPr lang="en-US" sz="1631" dirty="0"/>
+          </a:p>
+        </p:txBody>
+      </p:sp>
+      <p:sp>
+        <p:nvSpPr>
+          <p:cNvPr id="35" name="Text 33"/>
+          <p:cNvSpPr txBox="1"/>
+          <p:nvPr/>
+        </p:nvSpPr>
+        <p:spPr>
+          <a:xfrm>
+            <a:off x="8245419" y="3801892"/>
+            <a:ext cx="3427537" cy="224028"/>
+          </a:xfrm>
+          <a:prstGeom prst="rect">
+            <a:avLst/>
+          </a:prstGeom>
+          <a:noFill/>
+          <a:ln/>
+        </p:spPr>
+        <p:txBody>
+          <a:bodyPr wrap="none" lIns="0" tIns="0" rIns="0" bIns="0" rtlCol="0" anchor="t"/>
+          <a:lstStyle/>
+          <a:p>
+            <a:pPr algn="l" indent="0" marL="0">
+              <a:lnSpc>
+                <a:spcPts val="1764"/>
+              </a:lnSpc>
+              <a:buNone/>
+            </a:pPr>
+            <a:r>
+              <a:rPr lang="en-US" sz="1176" b="1" spc="-54" kern="0" dirty="0">
+                <a:solidFill>
+                  <a:srgbClr val="0F172A"/>
+                </a:solidFill>
+                <a:latin typeface="Malgun Gothic" pitchFamily="34" charset="0"/>
+                <a:ea typeface="Malgun Gothic" pitchFamily="34" charset="-122"/>
+                <a:cs typeface="Malgun Gothic" pitchFamily="34" charset="-120"/>
+              </a:rPr>
+              <a:t>한국어 문해력 94.2점</a:t>
+            </a:r>
+            <a:endParaRPr lang="en-US" sz="1176" dirty="0"/>
+          </a:p>
+        </p:txBody>
+      </p:sp>
+      <p:sp>
+        <p:nvSpPr>
+          <p:cNvPr id="36" name="Text 34"/>
+          <p:cNvSpPr txBox="1"/>
+          <p:nvPr/>
+        </p:nvSpPr>
+        <p:spPr>
+          <a:xfrm>
+            <a:off x="8397850" y="4133454"/>
+            <a:ext cx="3262945" cy="342534"/>
+          </a:xfrm>
+          <a:prstGeom prst="rect">
+            <a:avLst/>
+          </a:prstGeom>
+          <a:noFill/>
+          <a:ln/>
+        </p:spPr>
+        <p:txBody>
+          <a:bodyPr wrap="none" lIns="0" tIns="0" rIns="0" bIns="0" rtlCol="0" anchor="t"/>
+          <a:lstStyle/>
+          <a:p>
+            <a:pPr algn="l" marL="342900" indent="-342900">
+              <a:lnSpc>
+                <a:spcPts val="2697"/>
+              </a:lnSpc>
+              <a:buSzPct val="100000"/>
+              <a:buChar char="•"/>
+            </a:pPr>
+            <a:r>
+              <a:rPr lang="en-US" sz="1740" spc="-54" kern="0" dirty="0">
+                <a:solidFill>
+                  <a:srgbClr val="334155"/>
+                </a:solidFill>
+                <a:latin typeface="Malgun Gothic" pitchFamily="34" charset="0"/>
+                <a:ea typeface="Malgun Gothic" pitchFamily="34" charset="-122"/>
+                <a:cs typeface="Malgun Gothic" pitchFamily="34" charset="-120"/>
+              </a:rPr>
+              <a:t>Ko-Harness 종합 평가 기준 준수</a:t>
+            </a:r>
+            <a:endParaRPr lang="en-US" sz="1740" dirty="0"/>
+          </a:p>
+        </p:txBody>
+      </p:sp>
+      <p:sp>
+        <p:nvSpPr>
+          <p:cNvPr id="37" name="Text 35"/>
+          <p:cNvSpPr txBox="1"/>
+          <p:nvPr/>
+        </p:nvSpPr>
+        <p:spPr>
+          <a:xfrm>
+            <a:off x="8397850" y="4531126"/>
+            <a:ext cx="3262945" cy="342534"/>
+          </a:xfrm>
+          <a:prstGeom prst="rect">
+            <a:avLst/>
+          </a:prstGeom>
+          <a:noFill/>
+          <a:ln/>
+        </p:spPr>
+        <p:txBody>
+          <a:bodyPr wrap="none" lIns="0" tIns="0" rIns="0" bIns="0" rtlCol="0" anchor="t"/>
+          <a:lstStyle/>
+          <a:p>
+            <a:pPr algn="l" marL="342900" indent="-342900">
+              <a:lnSpc>
+                <a:spcPts val="2697"/>
+              </a:lnSpc>
+              <a:buSzPct val="100000"/>
+              <a:buChar char="•"/>
+            </a:pPr>
+            <a:r>
+              <a:rPr lang="en-US" sz="1740" spc="-54" kern="0" dirty="0">
+                <a:solidFill>
+                  <a:srgbClr val="334155"/>
+                </a:solidFill>
+                <a:latin typeface="Malgun Gothic" pitchFamily="34" charset="0"/>
+                <a:ea typeface="Malgun Gothic" pitchFamily="34" charset="-122"/>
+                <a:cs typeface="Malgun Gothic" pitchFamily="34" charset="-120"/>
+              </a:rPr>
+              <a:t>전문 도메인 용어 오역률 1.2% 미만</a:t>
+            </a:r>
+            <a:endParaRPr lang="en-US" sz="1740" dirty="0"/>
+          </a:p>
+        </p:txBody>
+      </p:sp>
+      <p:sp>
+        <p:nvSpPr>
+          <p:cNvPr id="38" name="Text 36"/>
+          <p:cNvSpPr txBox="1"/>
+          <p:nvPr/>
+        </p:nvSpPr>
+        <p:spPr>
+          <a:xfrm>
+            <a:off x="8397850" y="4928799"/>
+            <a:ext cx="3262945" cy="342534"/>
+          </a:xfrm>
+          <a:prstGeom prst="rect">
+            <a:avLst/>
+          </a:prstGeom>
+          <a:noFill/>
+          <a:ln/>
+        </p:spPr>
+        <p:txBody>
+          <a:bodyPr wrap="none" lIns="0" tIns="0" rIns="0" bIns="0" rtlCol="0" anchor="t"/>
+          <a:lstStyle/>
+          <a:p>
+            <a:pPr algn="l" marL="342900" indent="-342900">
+              <a:lnSpc>
+                <a:spcPts val="2697"/>
+              </a:lnSpc>
+              <a:buSzPct val="100000"/>
+              <a:buChar char="•"/>
+            </a:pPr>
+            <a:r>
+              <a:rPr lang="en-US" sz="1740" spc="-54" kern="0" dirty="0">
+                <a:solidFill>
+                  <a:srgbClr val="334155"/>
+                </a:solidFill>
+                <a:latin typeface="Malgun Gothic" pitchFamily="34" charset="0"/>
+                <a:ea typeface="Malgun Gothic" pitchFamily="34" charset="-122"/>
+                <a:cs typeface="Malgun Gothic" pitchFamily="34" charset="-120"/>
+              </a:rPr>
+              <a:t>환각 현상(Hallucination) 78% 억제</a:t>
+            </a:r>
+            <a:endParaRPr lang="en-US" sz="1740" dirty="0"/>
+          </a:p>
+        </p:txBody>
+      </p:sp>
     </p:spTree>
   </p:cSld>
   <p:clrMapOvr>
@@ -1424,16 +4335,9 @@
   <p:cSld name="Slide 4">
     <p:bg>
       <p:bgPr>
-        <a:blipFill dpi="0" rotWithShape="1">
-          <a:blip r:embed="rId1">
-            <a:lum/>
-          </a:blip>
-          <a:srcRect/>
-          <a:stretch>
-            <a:fillRect/>
-          </a:stretch>
-        </a:blipFill>
-        <a:effectLst/>
+        <a:solidFill>
+          <a:srgbClr val="F8FAFC"/>
+        </a:solidFill>
       </p:bgPr>
     </p:bg>
     <p:spTree>
@@ -1450,6 +4354,932 @@
           <a:chExt cx="0" cy="0"/>
         </a:xfrm>
       </p:grpSpPr>
+      <p:sp>
+        <p:nvSpPr>
+          <p:cNvPr id="2" name="Shape 0"/>
+          <p:cNvSpPr/>
+          <p:nvPr/>
+        </p:nvSpPr>
+        <p:spPr>
+          <a:xfrm>
+            <a:off x="552480" y="1571854"/>
+            <a:ext cx="2890236" cy="418521"/>
+          </a:xfrm>
+          <a:prstGeom prst="roundRect">
+            <a:avLst>
+              <a:gd name="adj" fmla="val 50011"/>
+            </a:avLst>
+          </a:prstGeom>
+          <a:solidFill>
+            <a:srgbClr val="4F46E5">
+              <a:alpha val="10000"/>
+            </a:srgbClr>
+          </a:solidFill>
+          <a:ln w="9525">
+            <a:solidFill>
+              <a:srgbClr val="4F46E5">
+                <a:alpha val="25000"/>
+              </a:srgbClr>
+            </a:solidFill>
+            <a:prstDash val="solid"/>
+          </a:ln>
+        </p:spPr>
+      </p:sp>
+      <p:sp>
+        <p:nvSpPr>
+          <p:cNvPr id="3" name="Text 1"/>
+          <p:cNvSpPr txBox="1"/>
+          <p:nvPr/>
+        </p:nvSpPr>
+        <p:spPr>
+          <a:xfrm>
+            <a:off x="676290" y="1614922"/>
+            <a:ext cx="2831897" cy="323149"/>
+          </a:xfrm>
+          <a:prstGeom prst="rect">
+            <a:avLst/>
+          </a:prstGeom>
+          <a:noFill/>
+          <a:ln/>
+        </p:spPr>
+        <p:txBody>
+          <a:bodyPr wrap="none" lIns="0" tIns="0" rIns="0" bIns="0" rtlCol="0" anchor="t"/>
+          <a:lstStyle/>
+          <a:p>
+            <a:pPr algn="l" indent="0" marL="0">
+              <a:lnSpc>
+                <a:spcPts val="2545"/>
+              </a:lnSpc>
+              <a:buNone/>
+            </a:pPr>
+            <a:r>
+              <a:rPr lang="en-US" sz="1697" b="1" spc="34" kern="0" dirty="0">
+                <a:solidFill>
+                  <a:srgbClr val="4F46E5"/>
+                </a:solidFill>
+                <a:latin typeface="Malgun Gothic" pitchFamily="34" charset="0"/>
+                <a:ea typeface="Malgun Gothic" pitchFamily="34" charset="-122"/>
+                <a:cs typeface="Malgun Gothic" pitchFamily="34" charset="-120"/>
+              </a:rPr>
+              <a:t>OPTIMIZATION PIPELINE</a:t>
+            </a:r>
+            <a:endParaRPr lang="en-US" sz="1697" dirty="0"/>
+          </a:p>
+        </p:txBody>
+      </p:sp>
+      <p:sp>
+        <p:nvSpPr>
+          <p:cNvPr id="4" name="Text 2"/>
+          <p:cNvSpPr txBox="1"/>
+          <p:nvPr/>
+        </p:nvSpPr>
+        <p:spPr>
+          <a:xfrm>
+            <a:off x="533370" y="2066453"/>
+            <a:ext cx="11993088" cy="590611"/>
+          </a:xfrm>
+          <a:prstGeom prst="rect">
+            <a:avLst/>
+          </a:prstGeom>
+          <a:noFill/>
+          <a:ln/>
+        </p:spPr>
+        <p:txBody>
+          <a:bodyPr wrap="none" lIns="0" tIns="0" rIns="0" bIns="0" rtlCol="0" anchor="t"/>
+          <a:lstStyle/>
+          <a:p>
+            <a:pPr algn="l" indent="0" marL="0">
+              <a:lnSpc>
+                <a:spcPts val="4651"/>
+              </a:lnSpc>
+              <a:buNone/>
+            </a:pPr>
+            <a:r>
+              <a:rPr lang="en-US" sz="3524" b="1" spc="-88" kern="0" dirty="0">
+                <a:solidFill>
+                  <a:srgbClr val="0F172A"/>
+                </a:solidFill>
+                <a:latin typeface="Malgun Gothic" pitchFamily="34" charset="0"/>
+                <a:ea typeface="Malgun Gothic" pitchFamily="34" charset="-122"/>
+                <a:cs typeface="Malgun Gothic" pitchFamily="34" charset="-120"/>
+              </a:rPr>
+              <a:t>온디바이스 배포를 위한 3단계 모델 경량화 파이프라인</a:t>
+            </a:r>
+            <a:endParaRPr lang="en-US" sz="3524" dirty="0"/>
+          </a:p>
+        </p:txBody>
+      </p:sp>
+      <p:sp>
+        <p:nvSpPr>
+          <p:cNvPr id="5" name="Text 3"/>
+          <p:cNvSpPr txBox="1"/>
+          <p:nvPr/>
+        </p:nvSpPr>
+        <p:spPr>
+          <a:xfrm>
+            <a:off x="533370" y="2840126"/>
+            <a:ext cx="11993088" cy="397764"/>
+          </a:xfrm>
+          <a:prstGeom prst="rect">
+            <a:avLst/>
+          </a:prstGeom>
+          <a:noFill/>
+          <a:ln/>
+        </p:spPr>
+        <p:txBody>
+          <a:bodyPr wrap="none" lIns="0" tIns="0" rIns="0" bIns="0" rtlCol="0" anchor="t"/>
+          <a:lstStyle/>
+          <a:p>
+            <a:pPr algn="l" indent="0" marL="0">
+              <a:lnSpc>
+                <a:spcPts val="3132"/>
+              </a:lnSpc>
+              <a:buNone/>
+            </a:pPr>
+            <a:r>
+              <a:rPr lang="en-US" sz="2088" spc="-54" kern="0" dirty="0">
+                <a:solidFill>
+                  <a:srgbClr val="64748B"/>
+                </a:solidFill>
+                <a:latin typeface="Malgun Gothic" pitchFamily="34" charset="0"/>
+                <a:ea typeface="Malgun Gothic" pitchFamily="34" charset="-122"/>
+                <a:cs typeface="Malgun Gothic" pitchFamily="34" charset="-120"/>
+              </a:rPr>
+              <a:t>가중치 압축부터 캐시 압축, 하드웨어 가속기 오프로딩까지 유기적으로 연결됩니다.</a:t>
+            </a:r>
+            <a:endParaRPr lang="en-US" sz="2088" dirty="0"/>
+          </a:p>
+        </p:txBody>
+      </p:sp>
+      <p:sp>
+        <p:nvSpPr>
+          <p:cNvPr id="6" name="Shape 4"/>
+          <p:cNvSpPr/>
+          <p:nvPr/>
+        </p:nvSpPr>
+        <p:spPr>
+          <a:xfrm>
+            <a:off x="552480" y="3474994"/>
+            <a:ext cx="3340669" cy="912754"/>
+          </a:xfrm>
+          <a:prstGeom prst="roundRect">
+            <a:avLst>
+              <a:gd name="adj" fmla="val 12523"/>
+            </a:avLst>
+          </a:prstGeom>
+          <a:solidFill>
+            <a:srgbClr val="FFFFFF"/>
+          </a:solidFill>
+          <a:ln w="9525">
+            <a:solidFill>
+              <a:srgbClr val="E2E8F0"/>
+            </a:solidFill>
+            <a:prstDash val="solid"/>
+          </a:ln>
+        </p:spPr>
+      </p:sp>
+      <p:sp>
+        <p:nvSpPr>
+          <p:cNvPr id="7" name="Text 5"/>
+          <p:cNvSpPr txBox="1"/>
+          <p:nvPr/>
+        </p:nvSpPr>
+        <p:spPr>
+          <a:xfrm>
+            <a:off x="428854" y="3636935"/>
+            <a:ext cx="3587923" cy="171450"/>
+          </a:xfrm>
+          <a:prstGeom prst="rect">
+            <a:avLst/>
+          </a:prstGeom>
+          <a:noFill/>
+          <a:ln/>
+        </p:spPr>
+        <p:txBody>
+          <a:bodyPr wrap="none" lIns="0" tIns="0" rIns="0" bIns="0" rtlCol="0" anchor="t"/>
+          <a:lstStyle/>
+          <a:p>
+            <a:pPr algn="ctr" indent="0" marL="0">
+              <a:lnSpc>
+                <a:spcPts val="1350"/>
+              </a:lnSpc>
+              <a:buNone/>
+            </a:pPr>
+            <a:r>
+              <a:rPr lang="en-US" sz="900" b="1" spc="-54" kern="0" dirty="0">
+                <a:solidFill>
+                  <a:srgbClr val="4F46E5"/>
+                </a:solidFill>
+                <a:latin typeface="Malgun Gothic" pitchFamily="34" charset="0"/>
+                <a:ea typeface="Malgun Gothic" pitchFamily="34" charset="-122"/>
+                <a:cs typeface="Malgun Gothic" pitchFamily="34" charset="-120"/>
+              </a:rPr>
+              <a:t>STEP 1: AWQ</a:t>
+            </a:r>
+            <a:endParaRPr lang="en-US" sz="900" dirty="0"/>
+          </a:p>
+        </p:txBody>
+      </p:sp>
+      <p:sp>
+        <p:nvSpPr>
+          <p:cNvPr id="8" name="Text 6"/>
+          <p:cNvSpPr txBox="1"/>
+          <p:nvPr/>
+        </p:nvSpPr>
+        <p:spPr>
+          <a:xfrm>
+            <a:off x="428854" y="3824752"/>
+            <a:ext cx="3587923" cy="214884"/>
+          </a:xfrm>
+          <a:prstGeom prst="rect">
+            <a:avLst/>
+          </a:prstGeom>
+          <a:noFill/>
+          <a:ln/>
+        </p:spPr>
+        <p:txBody>
+          <a:bodyPr wrap="none" lIns="0" tIns="0" rIns="0" bIns="0" rtlCol="0" anchor="t"/>
+          <a:lstStyle/>
+          <a:p>
+            <a:pPr algn="ctr" indent="0" marL="0">
+              <a:lnSpc>
+                <a:spcPts val="1692"/>
+              </a:lnSpc>
+              <a:buNone/>
+            </a:pPr>
+            <a:r>
+              <a:rPr lang="en-US" sz="1128" b="1" spc="-54" kern="0" dirty="0">
+                <a:solidFill>
+                  <a:srgbClr val="0F172A"/>
+                </a:solidFill>
+                <a:latin typeface="Malgun Gothic" pitchFamily="34" charset="0"/>
+                <a:ea typeface="Malgun Gothic" pitchFamily="34" charset="-122"/>
+                <a:cs typeface="Malgun Gothic" pitchFamily="34" charset="-120"/>
+              </a:rPr>
+              <a:t>4-bit 가중치 양자화</a:t>
+            </a:r>
+            <a:endParaRPr lang="en-US" sz="1128" dirty="0"/>
+          </a:p>
+        </p:txBody>
+      </p:sp>
+      <p:sp>
+        <p:nvSpPr>
+          <p:cNvPr id="9" name="Text 7"/>
+          <p:cNvSpPr txBox="1"/>
+          <p:nvPr/>
+        </p:nvSpPr>
+        <p:spPr>
+          <a:xfrm>
+            <a:off x="428854" y="4055273"/>
+            <a:ext cx="3587923" cy="164592"/>
+          </a:xfrm>
+          <a:prstGeom prst="rect">
+            <a:avLst/>
+          </a:prstGeom>
+          <a:noFill/>
+          <a:ln/>
+        </p:spPr>
+        <p:txBody>
+          <a:bodyPr wrap="none" lIns="0" tIns="0" rIns="0" bIns="0" rtlCol="0" anchor="t"/>
+          <a:lstStyle/>
+          <a:p>
+            <a:pPr algn="ctr" indent="0" marL="0">
+              <a:lnSpc>
+                <a:spcPts val="1296"/>
+              </a:lnSpc>
+              <a:buNone/>
+            </a:pPr>
+            <a:r>
+              <a:rPr lang="en-US" sz="864" spc="-54" kern="0" dirty="0">
+                <a:solidFill>
+                  <a:srgbClr val="64748B"/>
+                </a:solidFill>
+                <a:latin typeface="Malgun Gothic" pitchFamily="34" charset="0"/>
+                <a:ea typeface="Malgun Gothic" pitchFamily="34" charset="-122"/>
+                <a:cs typeface="Malgun Gothic" pitchFamily="34" charset="-120"/>
+              </a:rPr>
+              <a:t>정확도 손실 0.3% 미만</a:t>
+            </a:r>
+            <a:endParaRPr lang="en-US" sz="864" dirty="0"/>
+          </a:p>
+        </p:txBody>
+      </p:sp>
+      <p:sp>
+        <p:nvSpPr>
+          <p:cNvPr id="10" name="Text 8"/>
+          <p:cNvSpPr txBox="1"/>
+          <p:nvPr/>
+        </p:nvSpPr>
+        <p:spPr>
+          <a:xfrm>
+            <a:off x="3988430" y="3654674"/>
+            <a:ext cx="379933" cy="538673"/>
+          </a:xfrm>
+          <a:prstGeom prst="rect">
+            <a:avLst/>
+          </a:prstGeom>
+          <a:noFill/>
+          <a:ln/>
+        </p:spPr>
+        <p:txBody>
+          <a:bodyPr wrap="none" lIns="0" tIns="0" rIns="0" bIns="0" rtlCol="0" anchor="t"/>
+          <a:lstStyle/>
+          <a:p>
+            <a:pPr algn="l" indent="0" marL="0">
+              <a:lnSpc>
+                <a:spcPts val="4241"/>
+              </a:lnSpc>
+              <a:buNone/>
+            </a:pPr>
+            <a:r>
+              <a:rPr lang="en-US" sz="2828" b="1" spc="-54" kern="0" dirty="0">
+                <a:solidFill>
+                  <a:srgbClr val="4F46E5"/>
+                </a:solidFill>
+                <a:latin typeface="Malgun Gothic" pitchFamily="34" charset="0"/>
+                <a:ea typeface="Malgun Gothic" pitchFamily="34" charset="-122"/>
+                <a:cs typeface="Malgun Gothic" pitchFamily="34" charset="-120"/>
+              </a:rPr>
+              <a:t>➔</a:t>
+            </a:r>
+            <a:endParaRPr lang="en-US" sz="2828" dirty="0"/>
+          </a:p>
+        </p:txBody>
+      </p:sp>
+      <p:sp>
+        <p:nvSpPr>
+          <p:cNvPr id="11" name="Shape 9"/>
+          <p:cNvSpPr/>
+          <p:nvPr/>
+        </p:nvSpPr>
+        <p:spPr>
+          <a:xfrm>
+            <a:off x="4425605" y="3474994"/>
+            <a:ext cx="3340852" cy="912754"/>
+          </a:xfrm>
+          <a:prstGeom prst="roundRect">
+            <a:avLst>
+              <a:gd name="adj" fmla="val 12523"/>
+            </a:avLst>
+          </a:prstGeom>
+          <a:solidFill>
+            <a:srgbClr val="FFFFFF"/>
+          </a:solidFill>
+          <a:ln w="9525">
+            <a:solidFill>
+              <a:srgbClr val="0284C7">
+                <a:alpha val="40000"/>
+              </a:srgbClr>
+            </a:solidFill>
+            <a:prstDash val="solid"/>
+          </a:ln>
+        </p:spPr>
+      </p:sp>
+      <p:sp>
+        <p:nvSpPr>
+          <p:cNvPr id="12" name="Text 10"/>
+          <p:cNvSpPr txBox="1"/>
+          <p:nvPr/>
+        </p:nvSpPr>
+        <p:spPr>
+          <a:xfrm>
+            <a:off x="4301978" y="3636935"/>
+            <a:ext cx="3588197" cy="171450"/>
+          </a:xfrm>
+          <a:prstGeom prst="rect">
+            <a:avLst/>
+          </a:prstGeom>
+          <a:noFill/>
+          <a:ln/>
+        </p:spPr>
+        <p:txBody>
+          <a:bodyPr wrap="none" lIns="0" tIns="0" rIns="0" bIns="0" rtlCol="0" anchor="t"/>
+          <a:lstStyle/>
+          <a:p>
+            <a:pPr algn="ctr" indent="0" marL="0">
+              <a:lnSpc>
+                <a:spcPts val="1350"/>
+              </a:lnSpc>
+              <a:buNone/>
+            </a:pPr>
+            <a:r>
+              <a:rPr lang="en-US" sz="900" b="1" spc="-54" kern="0" dirty="0">
+                <a:solidFill>
+                  <a:srgbClr val="0284C7"/>
+                </a:solidFill>
+                <a:latin typeface="Malgun Gothic" pitchFamily="34" charset="0"/>
+                <a:ea typeface="Malgun Gothic" pitchFamily="34" charset="-122"/>
+                <a:cs typeface="Malgun Gothic" pitchFamily="34" charset="-120"/>
+              </a:rPr>
+              <a:t>STEP 2: KV PRUNING</a:t>
+            </a:r>
+            <a:endParaRPr lang="en-US" sz="900" dirty="0"/>
+          </a:p>
+        </p:txBody>
+      </p:sp>
+      <p:sp>
+        <p:nvSpPr>
+          <p:cNvPr id="13" name="Text 11"/>
+          <p:cNvSpPr txBox="1"/>
+          <p:nvPr/>
+        </p:nvSpPr>
+        <p:spPr>
+          <a:xfrm>
+            <a:off x="4301978" y="3824752"/>
+            <a:ext cx="3588197" cy="214884"/>
+          </a:xfrm>
+          <a:prstGeom prst="rect">
+            <a:avLst/>
+          </a:prstGeom>
+          <a:noFill/>
+          <a:ln/>
+        </p:spPr>
+        <p:txBody>
+          <a:bodyPr wrap="none" lIns="0" tIns="0" rIns="0" bIns="0" rtlCol="0" anchor="t"/>
+          <a:lstStyle/>
+          <a:p>
+            <a:pPr algn="ctr" indent="0" marL="0">
+              <a:lnSpc>
+                <a:spcPts val="1692"/>
+              </a:lnSpc>
+              <a:buNone/>
+            </a:pPr>
+            <a:r>
+              <a:rPr lang="en-US" sz="1128" b="1" spc="-54" kern="0" dirty="0">
+                <a:solidFill>
+                  <a:srgbClr val="0F172A"/>
+                </a:solidFill>
+                <a:latin typeface="Malgun Gothic" pitchFamily="34" charset="0"/>
+                <a:ea typeface="Malgun Gothic" pitchFamily="34" charset="-122"/>
+                <a:cs typeface="Malgun Gothic" pitchFamily="34" charset="-120"/>
+              </a:rPr>
+              <a:t>동적 토큰 압축</a:t>
+            </a:r>
+            <a:endParaRPr lang="en-US" sz="1128" dirty="0"/>
+          </a:p>
+        </p:txBody>
+      </p:sp>
+      <p:sp>
+        <p:nvSpPr>
+          <p:cNvPr id="14" name="Text 12"/>
+          <p:cNvSpPr txBox="1"/>
+          <p:nvPr/>
+        </p:nvSpPr>
+        <p:spPr>
+          <a:xfrm>
+            <a:off x="4301978" y="4055273"/>
+            <a:ext cx="3588197" cy="164592"/>
+          </a:xfrm>
+          <a:prstGeom prst="rect">
+            <a:avLst/>
+          </a:prstGeom>
+          <a:noFill/>
+          <a:ln/>
+        </p:spPr>
+        <p:txBody>
+          <a:bodyPr wrap="none" lIns="0" tIns="0" rIns="0" bIns="0" rtlCol="0" anchor="t"/>
+          <a:lstStyle/>
+          <a:p>
+            <a:pPr algn="ctr" indent="0" marL="0">
+              <a:lnSpc>
+                <a:spcPts val="1296"/>
+              </a:lnSpc>
+              <a:buNone/>
+            </a:pPr>
+            <a:r>
+              <a:rPr lang="en-US" sz="864" spc="-54" kern="0" dirty="0">
+                <a:solidFill>
+                  <a:srgbClr val="64748B"/>
+                </a:solidFill>
+                <a:latin typeface="Malgun Gothic" pitchFamily="34" charset="0"/>
+                <a:ea typeface="Malgun Gothic" pitchFamily="34" charset="-122"/>
+                <a:cs typeface="Malgun Gothic" pitchFamily="34" charset="-120"/>
+              </a:rPr>
+              <a:t>컨텍스트 메모리 60% 절감</a:t>
+            </a:r>
+            <a:endParaRPr lang="en-US" sz="864" dirty="0"/>
+          </a:p>
+        </p:txBody>
+      </p:sp>
+      <p:sp>
+        <p:nvSpPr>
+          <p:cNvPr id="15" name="Text 13"/>
+          <p:cNvSpPr txBox="1"/>
+          <p:nvPr/>
+        </p:nvSpPr>
+        <p:spPr>
+          <a:xfrm>
+            <a:off x="7861737" y="3654674"/>
+            <a:ext cx="379933" cy="538673"/>
+          </a:xfrm>
+          <a:prstGeom prst="rect">
+            <a:avLst/>
+          </a:prstGeom>
+          <a:noFill/>
+          <a:ln/>
+        </p:spPr>
+        <p:txBody>
+          <a:bodyPr wrap="none" lIns="0" tIns="0" rIns="0" bIns="0" rtlCol="0" anchor="t"/>
+          <a:lstStyle/>
+          <a:p>
+            <a:pPr algn="l" indent="0" marL="0">
+              <a:lnSpc>
+                <a:spcPts val="4241"/>
+              </a:lnSpc>
+              <a:buNone/>
+            </a:pPr>
+            <a:r>
+              <a:rPr lang="en-US" sz="2828" b="1" spc="-54" kern="0" dirty="0">
+                <a:solidFill>
+                  <a:srgbClr val="4F46E5"/>
+                </a:solidFill>
+                <a:latin typeface="Malgun Gothic" pitchFamily="34" charset="0"/>
+                <a:ea typeface="Malgun Gothic" pitchFamily="34" charset="-122"/>
+                <a:cs typeface="Malgun Gothic" pitchFamily="34" charset="-120"/>
+              </a:rPr>
+              <a:t>➔</a:t>
+            </a:r>
+            <a:endParaRPr lang="en-US" sz="2828" dirty="0"/>
+          </a:p>
+        </p:txBody>
+      </p:sp>
+      <p:sp>
+        <p:nvSpPr>
+          <p:cNvPr id="16" name="Shape 14"/>
+          <p:cNvSpPr/>
+          <p:nvPr/>
+        </p:nvSpPr>
+        <p:spPr>
+          <a:xfrm>
+            <a:off x="8298820" y="3474994"/>
+            <a:ext cx="3340669" cy="912754"/>
+          </a:xfrm>
+          <a:prstGeom prst="roundRect">
+            <a:avLst>
+              <a:gd name="adj" fmla="val 12523"/>
+            </a:avLst>
+          </a:prstGeom>
+          <a:solidFill>
+            <a:srgbClr val="FFFFFF"/>
+          </a:solidFill>
+          <a:ln w="9525">
+            <a:solidFill>
+              <a:srgbClr val="059669">
+                <a:alpha val="40000"/>
+              </a:srgbClr>
+            </a:solidFill>
+            <a:prstDash val="solid"/>
+          </a:ln>
+        </p:spPr>
+      </p:sp>
+      <p:sp>
+        <p:nvSpPr>
+          <p:cNvPr id="17" name="Text 15"/>
+          <p:cNvSpPr txBox="1"/>
+          <p:nvPr/>
+        </p:nvSpPr>
+        <p:spPr>
+          <a:xfrm>
+            <a:off x="8175193" y="3636935"/>
+            <a:ext cx="3587923" cy="171450"/>
+          </a:xfrm>
+          <a:prstGeom prst="rect">
+            <a:avLst/>
+          </a:prstGeom>
+          <a:noFill/>
+          <a:ln/>
+        </p:spPr>
+        <p:txBody>
+          <a:bodyPr wrap="none" lIns="0" tIns="0" rIns="0" bIns="0" rtlCol="0" anchor="t"/>
+          <a:lstStyle/>
+          <a:p>
+            <a:pPr algn="ctr" indent="0" marL="0">
+              <a:lnSpc>
+                <a:spcPts val="1350"/>
+              </a:lnSpc>
+              <a:buNone/>
+            </a:pPr>
+            <a:r>
+              <a:rPr lang="en-US" sz="900" b="1" spc="-54" kern="0" dirty="0">
+                <a:solidFill>
+                  <a:srgbClr val="059669"/>
+                </a:solidFill>
+                <a:latin typeface="Malgun Gothic" pitchFamily="34" charset="0"/>
+                <a:ea typeface="Malgun Gothic" pitchFamily="34" charset="-122"/>
+                <a:cs typeface="Malgun Gothic" pitchFamily="34" charset="-120"/>
+              </a:rPr>
+              <a:t>STEP 3: NPU RUNTIME</a:t>
+            </a:r>
+            <a:endParaRPr lang="en-US" sz="900" dirty="0"/>
+          </a:p>
+        </p:txBody>
+      </p:sp>
+      <p:sp>
+        <p:nvSpPr>
+          <p:cNvPr id="18" name="Text 16"/>
+          <p:cNvSpPr txBox="1"/>
+          <p:nvPr/>
+        </p:nvSpPr>
+        <p:spPr>
+          <a:xfrm>
+            <a:off x="8175193" y="3824752"/>
+            <a:ext cx="3587923" cy="214884"/>
+          </a:xfrm>
+          <a:prstGeom prst="rect">
+            <a:avLst/>
+          </a:prstGeom>
+          <a:noFill/>
+          <a:ln/>
+        </p:spPr>
+        <p:txBody>
+          <a:bodyPr wrap="none" lIns="0" tIns="0" rIns="0" bIns="0" rtlCol="0" anchor="t"/>
+          <a:lstStyle/>
+          <a:p>
+            <a:pPr algn="ctr" indent="0" marL="0">
+              <a:lnSpc>
+                <a:spcPts val="1692"/>
+              </a:lnSpc>
+              <a:buNone/>
+            </a:pPr>
+            <a:r>
+              <a:rPr lang="en-US" sz="1128" b="1" spc="-54" kern="0" dirty="0">
+                <a:solidFill>
+                  <a:srgbClr val="0F172A"/>
+                </a:solidFill>
+                <a:latin typeface="Malgun Gothic" pitchFamily="34" charset="0"/>
+                <a:ea typeface="Malgun Gothic" pitchFamily="34" charset="-122"/>
+                <a:cs typeface="Malgun Gothic" pitchFamily="34" charset="-120"/>
+              </a:rPr>
+              <a:t>모바일 칩셋 가속</a:t>
+            </a:r>
+            <a:endParaRPr lang="en-US" sz="1128" dirty="0"/>
+          </a:p>
+        </p:txBody>
+      </p:sp>
+      <p:sp>
+        <p:nvSpPr>
+          <p:cNvPr id="19" name="Text 17"/>
+          <p:cNvSpPr txBox="1"/>
+          <p:nvPr/>
+        </p:nvSpPr>
+        <p:spPr>
+          <a:xfrm>
+            <a:off x="8175193" y="4055273"/>
+            <a:ext cx="3587923" cy="164592"/>
+          </a:xfrm>
+          <a:prstGeom prst="rect">
+            <a:avLst/>
+          </a:prstGeom>
+          <a:noFill/>
+          <a:ln/>
+        </p:spPr>
+        <p:txBody>
+          <a:bodyPr wrap="none" lIns="0" tIns="0" rIns="0" bIns="0" rtlCol="0" anchor="t"/>
+          <a:lstStyle/>
+          <a:p>
+            <a:pPr algn="ctr" indent="0" marL="0">
+              <a:lnSpc>
+                <a:spcPts val="1296"/>
+              </a:lnSpc>
+              <a:buNone/>
+            </a:pPr>
+            <a:r>
+              <a:rPr lang="en-US" sz="864" spc="-54" kern="0" dirty="0">
+                <a:solidFill>
+                  <a:srgbClr val="64748B"/>
+                </a:solidFill>
+                <a:latin typeface="Malgun Gothic" pitchFamily="34" charset="0"/>
+                <a:ea typeface="Malgun Gothic" pitchFamily="34" charset="-122"/>
+                <a:cs typeface="Malgun Gothic" pitchFamily="34" charset="-120"/>
+              </a:rPr>
+              <a:t>배터리 전력 소모 55% 개선</a:t>
+            </a:r>
+            <a:endParaRPr lang="en-US" sz="864" dirty="0"/>
+          </a:p>
+        </p:txBody>
+      </p:sp>
+      <p:sp>
+        <p:nvSpPr>
+          <p:cNvPr id="20" name="Shape 18"/>
+          <p:cNvSpPr/>
+          <p:nvPr/>
+        </p:nvSpPr>
+        <p:spPr>
+          <a:xfrm>
+            <a:off x="552480" y="4559198"/>
+            <a:ext cx="5467380" cy="746059"/>
+          </a:xfrm>
+          <a:prstGeom prst="roundRect">
+            <a:avLst>
+              <a:gd name="adj" fmla="val 17870"/>
+            </a:avLst>
+          </a:prstGeom>
+          <a:solidFill>
+            <a:srgbClr val="FFFFFF"/>
+          </a:solidFill>
+          <a:ln w="9525">
+            <a:solidFill>
+              <a:srgbClr val="E2E8F0"/>
+            </a:solidFill>
+            <a:prstDash val="solid"/>
+          </a:ln>
+        </p:spPr>
+      </p:sp>
+      <p:sp>
+        <p:nvSpPr>
+          <p:cNvPr id="21" name="Text 19"/>
+          <p:cNvSpPr txBox="1"/>
+          <p:nvPr/>
+        </p:nvSpPr>
+        <p:spPr>
+          <a:xfrm>
+            <a:off x="733440" y="4718304"/>
+            <a:ext cx="5491704" cy="205740"/>
+          </a:xfrm>
+          <a:prstGeom prst="rect">
+            <a:avLst/>
+          </a:prstGeom>
+          <a:noFill/>
+          <a:ln/>
+        </p:spPr>
+        <p:txBody>
+          <a:bodyPr wrap="none" lIns="0" tIns="0" rIns="0" bIns="0" rtlCol="0" anchor="t"/>
+          <a:lstStyle/>
+          <a:p>
+            <a:pPr algn="l" indent="0" marL="0">
+              <a:lnSpc>
+                <a:spcPts val="1620"/>
+              </a:lnSpc>
+              <a:buNone/>
+            </a:pPr>
+            <a:r>
+              <a:rPr lang="en-US" sz="1080" b="1" spc="-54" kern="0" dirty="0">
+                <a:solidFill>
+                  <a:srgbClr val="4F46E5"/>
+                </a:solidFill>
+                <a:latin typeface="Malgun Gothic" pitchFamily="34" charset="0"/>
+                <a:ea typeface="Malgun Gothic" pitchFamily="34" charset="-122"/>
+                <a:cs typeface="Malgun Gothic" pitchFamily="34" charset="-120"/>
+              </a:rPr>
+              <a:t>✓ 활성화 인식 양자화 (Activation-aware Weight Quantization)</a:t>
+            </a:r>
+            <a:endParaRPr lang="en-US" sz="1080" dirty="0"/>
+          </a:p>
+        </p:txBody>
+      </p:sp>
+      <p:sp>
+        <p:nvSpPr>
+          <p:cNvPr id="22" name="Text 20"/>
+          <p:cNvSpPr txBox="1"/>
+          <p:nvPr/>
+        </p:nvSpPr>
+        <p:spPr>
+          <a:xfrm>
+            <a:off x="733440" y="4956871"/>
+            <a:ext cx="5491704" cy="178308"/>
+          </a:xfrm>
+          <a:prstGeom prst="rect">
+            <a:avLst/>
+          </a:prstGeom>
+          <a:noFill/>
+          <a:ln/>
+        </p:spPr>
+        <p:txBody>
+          <a:bodyPr wrap="none" lIns="0" tIns="0" rIns="0" bIns="0" rtlCol="0" anchor="t"/>
+          <a:lstStyle/>
+          <a:p>
+            <a:pPr algn="l" indent="0" marL="0">
+              <a:lnSpc>
+                <a:spcPts val="1404"/>
+              </a:lnSpc>
+              <a:buNone/>
+            </a:pPr>
+            <a:r>
+              <a:rPr lang="en-US" sz="936" spc="-54" kern="0" dirty="0">
+                <a:solidFill>
+                  <a:srgbClr val="334155"/>
+                </a:solidFill>
+                <a:latin typeface="Malgun Gothic" pitchFamily="34" charset="0"/>
+                <a:ea typeface="Malgun Gothic" pitchFamily="34" charset="-122"/>
+                <a:cs typeface="Malgun Gothic" pitchFamily="34" charset="-120"/>
+              </a:rPr>
+              <a:t>중요 가중치 채널을 보존하여 4-bit 환경에서도 한국어 문맥 추론 능력을 99% 이상 유지</a:t>
+            </a:r>
+            <a:endParaRPr lang="en-US" sz="936" dirty="0"/>
+          </a:p>
+        </p:txBody>
+      </p:sp>
+      <p:sp>
+        <p:nvSpPr>
+          <p:cNvPr id="23" name="Shape 21"/>
+          <p:cNvSpPr/>
+          <p:nvPr/>
+        </p:nvSpPr>
+        <p:spPr>
+          <a:xfrm>
+            <a:off x="6172200" y="4559198"/>
+            <a:ext cx="5467380" cy="746059"/>
+          </a:xfrm>
+          <a:prstGeom prst="roundRect">
+            <a:avLst>
+              <a:gd name="adj" fmla="val 17870"/>
+            </a:avLst>
+          </a:prstGeom>
+          <a:solidFill>
+            <a:srgbClr val="FFFFFF"/>
+          </a:solidFill>
+          <a:ln w="9525">
+            <a:solidFill>
+              <a:srgbClr val="E2E8F0"/>
+            </a:solidFill>
+            <a:prstDash val="solid"/>
+          </a:ln>
+        </p:spPr>
+      </p:sp>
+      <p:sp>
+        <p:nvSpPr>
+          <p:cNvPr id="24" name="Text 22"/>
+          <p:cNvSpPr txBox="1"/>
+          <p:nvPr/>
+        </p:nvSpPr>
+        <p:spPr>
+          <a:xfrm>
+            <a:off x="6353160" y="4718304"/>
+            <a:ext cx="5491704" cy="205740"/>
+          </a:xfrm>
+          <a:prstGeom prst="rect">
+            <a:avLst/>
+          </a:prstGeom>
+          <a:noFill/>
+          <a:ln/>
+        </p:spPr>
+        <p:txBody>
+          <a:bodyPr wrap="none" lIns="0" tIns="0" rIns="0" bIns="0" rtlCol="0" anchor="t"/>
+          <a:lstStyle/>
+          <a:p>
+            <a:pPr algn="l" indent="0" marL="0">
+              <a:lnSpc>
+                <a:spcPts val="1620"/>
+              </a:lnSpc>
+              <a:buNone/>
+            </a:pPr>
+            <a:r>
+              <a:rPr lang="en-US" sz="1080" b="1" spc="-54" kern="0" dirty="0">
+                <a:solidFill>
+                  <a:srgbClr val="059669"/>
+                </a:solidFill>
+                <a:latin typeface="Malgun Gothic" pitchFamily="34" charset="0"/>
+                <a:ea typeface="Malgun Gothic" pitchFamily="34" charset="-122"/>
+                <a:cs typeface="Malgun Gothic" pitchFamily="34" charset="-120"/>
+              </a:rPr>
+              <a:t>✓ NPU 하드웨어 친화적 커널 퓨전 (Kernel Fusion)</a:t>
+            </a:r>
+            <a:endParaRPr lang="en-US" sz="1080" dirty="0"/>
+          </a:p>
+        </p:txBody>
+      </p:sp>
+      <p:sp>
+        <p:nvSpPr>
+          <p:cNvPr id="25" name="Text 23"/>
+          <p:cNvSpPr txBox="1"/>
+          <p:nvPr/>
+        </p:nvSpPr>
+        <p:spPr>
+          <a:xfrm>
+            <a:off x="6353160" y="4956871"/>
+            <a:ext cx="5491704" cy="178308"/>
+          </a:xfrm>
+          <a:prstGeom prst="rect">
+            <a:avLst/>
+          </a:prstGeom>
+          <a:noFill/>
+          <a:ln/>
+        </p:spPr>
+        <p:txBody>
+          <a:bodyPr wrap="none" lIns="0" tIns="0" rIns="0" bIns="0" rtlCol="0" anchor="t"/>
+          <a:lstStyle/>
+          <a:p>
+            <a:pPr algn="l" indent="0" marL="0">
+              <a:lnSpc>
+                <a:spcPts val="1404"/>
+              </a:lnSpc>
+              <a:buNone/>
+            </a:pPr>
+            <a:r>
+              <a:rPr lang="en-US" sz="936" spc="-54" kern="0" dirty="0">
+                <a:solidFill>
+                  <a:srgbClr val="334155"/>
+                </a:solidFill>
+                <a:latin typeface="Malgun Gothic" pitchFamily="34" charset="0"/>
+                <a:ea typeface="Malgun Gothic" pitchFamily="34" charset="-122"/>
+                <a:cs typeface="Malgun Gothic" pitchFamily="34" charset="-120"/>
+              </a:rPr>
+              <a:t>메모리 I/O 병목을 제거하여 모바일 디바이스의 발열과 전력 소모를 대폭 억제</a:t>
+            </a:r>
+            <a:endParaRPr lang="en-US" sz="936" dirty="0"/>
+          </a:p>
+        </p:txBody>
+      </p:sp>
     </p:spTree>
   </p:cSld>
   <p:clrMapOvr>
@@ -1463,16 +5293,9 @@
   <p:cSld name="Slide 5">
     <p:bg>
       <p:bgPr>
-        <a:blipFill dpi="0" rotWithShape="1">
-          <a:blip r:embed="rId1">
-            <a:lum/>
-          </a:blip>
-          <a:srcRect/>
-          <a:stretch>
-            <a:fillRect/>
-          </a:stretch>
-        </a:blipFill>
-        <a:effectLst/>
+        <a:solidFill>
+          <a:srgbClr val="F8FAFC"/>
+        </a:solidFill>
       </p:bgPr>
     </p:bg>
     <p:spTree>
@@ -1489,6 +5312,661 @@
           <a:chExt cx="0" cy="0"/>
         </a:xfrm>
       </p:grpSpPr>
+      <p:sp>
+        <p:nvSpPr>
+          <p:cNvPr id="2" name="Shape 0"/>
+          <p:cNvSpPr/>
+          <p:nvPr/>
+        </p:nvSpPr>
+        <p:spPr>
+          <a:xfrm>
+            <a:off x="4997653" y="1787561"/>
+            <a:ext cx="2196755" cy="418521"/>
+          </a:xfrm>
+          <a:prstGeom prst="roundRect">
+            <a:avLst>
+              <a:gd name="adj" fmla="val 50011"/>
+            </a:avLst>
+          </a:prstGeom>
+          <a:solidFill>
+            <a:srgbClr val="4F46E5">
+              <a:alpha val="10000"/>
+            </a:srgbClr>
+          </a:solidFill>
+          <a:ln w="9525">
+            <a:solidFill>
+              <a:srgbClr val="4F46E5">
+                <a:alpha val="25000"/>
+              </a:srgbClr>
+            </a:solidFill>
+            <a:prstDash val="solid"/>
+          </a:ln>
+        </p:spPr>
+      </p:sp>
+      <p:sp>
+        <p:nvSpPr>
+          <p:cNvPr id="3" name="Text 1"/>
+          <p:cNvSpPr txBox="1"/>
+          <p:nvPr/>
+        </p:nvSpPr>
+        <p:spPr>
+          <a:xfrm>
+            <a:off x="4987686" y="1830812"/>
+            <a:ext cx="2216780" cy="323149"/>
+          </a:xfrm>
+          <a:prstGeom prst="rect">
+            <a:avLst/>
+          </a:prstGeom>
+          <a:noFill/>
+          <a:ln/>
+        </p:spPr>
+        <p:txBody>
+          <a:bodyPr wrap="none" lIns="0" tIns="0" rIns="0" bIns="0" rtlCol="0" anchor="t"/>
+          <a:lstStyle/>
+          <a:p>
+            <a:pPr algn="ctr" indent="0" marL="0">
+              <a:lnSpc>
+                <a:spcPts val="2545"/>
+              </a:lnSpc>
+              <a:buNone/>
+            </a:pPr>
+            <a:r>
+              <a:rPr lang="en-US" sz="1697" b="1" spc="34" kern="0" dirty="0">
+                <a:solidFill>
+                  <a:srgbClr val="4F46E5"/>
+                </a:solidFill>
+                <a:latin typeface="Malgun Gothic" pitchFamily="34" charset="0"/>
+                <a:ea typeface="Malgun Gothic" pitchFamily="34" charset="-122"/>
+                <a:cs typeface="Malgun Gothic" pitchFamily="34" charset="-120"/>
+              </a:rPr>
+              <a:t>ABLATION STUDY</a:t>
+            </a:r>
+            <a:endParaRPr lang="en-US" sz="1697" dirty="0"/>
+          </a:p>
+        </p:txBody>
+      </p:sp>
+      <p:sp>
+        <p:nvSpPr>
+          <p:cNvPr id="4" name="Text 2"/>
+          <p:cNvSpPr txBox="1"/>
+          <p:nvPr/>
+        </p:nvSpPr>
+        <p:spPr>
+          <a:xfrm>
+            <a:off x="-334488" y="2282160"/>
+            <a:ext cx="12861036" cy="590611"/>
+          </a:xfrm>
+          <a:prstGeom prst="rect">
+            <a:avLst/>
+          </a:prstGeom>
+          <a:noFill/>
+          <a:ln/>
+        </p:spPr>
+        <p:txBody>
+          <a:bodyPr wrap="none" lIns="0" tIns="0" rIns="0" bIns="0" rtlCol="0" anchor="t"/>
+          <a:lstStyle/>
+          <a:p>
+            <a:pPr algn="ctr" indent="0" marL="0">
+              <a:lnSpc>
+                <a:spcPts val="4651"/>
+              </a:lnSpc>
+              <a:buNone/>
+            </a:pPr>
+            <a:r>
+              <a:rPr lang="en-US" sz="3524" b="1" spc="-88" kern="0" dirty="0">
+                <a:solidFill>
+                  <a:srgbClr val="0F172A"/>
+                </a:solidFill>
+                <a:latin typeface="Malgun Gothic" pitchFamily="34" charset="0"/>
+                <a:ea typeface="Malgun Gothic" pitchFamily="34" charset="-122"/>
+                <a:cs typeface="Malgun Gothic" pitchFamily="34" charset="-120"/>
+              </a:rPr>
+              <a:t>기존 온디바이스 모델 대비 성능 비교 매트릭스</a:t>
+            </a:r>
+            <a:endParaRPr lang="en-US" sz="3524" dirty="0"/>
+          </a:p>
+        </p:txBody>
+      </p:sp>
+      <p:sp>
+        <p:nvSpPr>
+          <p:cNvPr id="5" name="Text 3"/>
+          <p:cNvSpPr txBox="1"/>
+          <p:nvPr/>
+        </p:nvSpPr>
+        <p:spPr>
+          <a:xfrm>
+            <a:off x="-334488" y="3056016"/>
+            <a:ext cx="12861036" cy="397764"/>
+          </a:xfrm>
+          <a:prstGeom prst="rect">
+            <a:avLst/>
+          </a:prstGeom>
+          <a:noFill/>
+          <a:ln/>
+        </p:spPr>
+        <p:txBody>
+          <a:bodyPr wrap="none" lIns="0" tIns="0" rIns="0" bIns="0" rtlCol="0" anchor="t"/>
+          <a:lstStyle/>
+          <a:p>
+            <a:pPr algn="ctr" indent="0" marL="0">
+              <a:lnSpc>
+                <a:spcPts val="3132"/>
+              </a:lnSpc>
+              <a:buNone/>
+            </a:pPr>
+            <a:r>
+              <a:rPr lang="en-US" sz="2088" spc="-54" kern="0" dirty="0">
+                <a:solidFill>
+                  <a:srgbClr val="64748B"/>
+                </a:solidFill>
+                <a:latin typeface="Malgun Gothic" pitchFamily="34" charset="0"/>
+                <a:ea typeface="Malgun Gothic" pitchFamily="34" charset="-122"/>
+                <a:cs typeface="Malgun Gothic" pitchFamily="34" charset="-120"/>
+              </a:rPr>
+              <a:t>동일한 3B 파라미터 규모에서 기존 최고 성능 모델 대비 모든 지표에서 유의미한 우위 입증</a:t>
+            </a:r>
+            <a:endParaRPr lang="en-US" sz="2088" dirty="0"/>
+          </a:p>
+        </p:txBody>
+      </p:sp>
+      <p:sp>
+        <p:nvSpPr>
+          <p:cNvPr id="6" name="Shape 4"/>
+          <p:cNvSpPr/>
+          <p:nvPr/>
+        </p:nvSpPr>
+        <p:spPr>
+          <a:xfrm>
+            <a:off x="552480" y="3690793"/>
+            <a:ext cx="5467380" cy="1398575"/>
+          </a:xfrm>
+          <a:prstGeom prst="roundRect">
+            <a:avLst>
+              <a:gd name="adj" fmla="val 9533"/>
+            </a:avLst>
+          </a:prstGeom>
+          <a:solidFill>
+            <a:srgbClr val="FFFFFF"/>
+          </a:solidFill>
+          <a:ln w="9525">
+            <a:solidFill>
+              <a:srgbClr val="E2E8F0"/>
+            </a:solidFill>
+            <a:prstDash val="solid"/>
+          </a:ln>
+        </p:spPr>
+      </p:sp>
+      <p:sp>
+        <p:nvSpPr>
+          <p:cNvPr id="7" name="Text 5"/>
+          <p:cNvSpPr txBox="1"/>
+          <p:nvPr/>
+        </p:nvSpPr>
+        <p:spPr>
+          <a:xfrm>
+            <a:off x="752460" y="3886932"/>
+            <a:ext cx="5450556" cy="217170"/>
+          </a:xfrm>
+          <a:prstGeom prst="rect">
+            <a:avLst/>
+          </a:prstGeom>
+          <a:noFill/>
+          <a:ln/>
+        </p:spPr>
+        <p:txBody>
+          <a:bodyPr wrap="none" lIns="0" tIns="0" rIns="0" bIns="0" rtlCol="0" anchor="t"/>
+          <a:lstStyle/>
+          <a:p>
+            <a:pPr algn="l" indent="0" marL="0">
+              <a:lnSpc>
+                <a:spcPts val="1710"/>
+              </a:lnSpc>
+              <a:buNone/>
+            </a:pPr>
+            <a:r>
+              <a:rPr lang="en-US" sz="1140" b="1" spc="-54" kern="0" dirty="0">
+                <a:solidFill>
+                  <a:srgbClr val="4F46E5"/>
+                </a:solidFill>
+                <a:latin typeface="Malgun Gothic" pitchFamily="34" charset="0"/>
+                <a:ea typeface="Malgun Gothic" pitchFamily="34" charset="-122"/>
+                <a:cs typeface="Malgun Gothic" pitchFamily="34" charset="-120"/>
+              </a:rPr>
+              <a:t>✓ 추론 속도 및 반응성 (Latency &amp; Throughput)</a:t>
+            </a:r>
+            <a:endParaRPr lang="en-US" sz="1140" dirty="0"/>
+          </a:p>
+        </p:txBody>
+      </p:sp>
+      <p:sp>
+        <p:nvSpPr>
+          <p:cNvPr id="8" name="Text 6"/>
+          <p:cNvSpPr txBox="1"/>
+          <p:nvPr/>
+        </p:nvSpPr>
+        <p:spPr>
+          <a:xfrm>
+            <a:off x="904890" y="4220596"/>
+            <a:ext cx="5285964" cy="184252"/>
+          </a:xfrm>
+          <a:prstGeom prst="rect">
+            <a:avLst/>
+          </a:prstGeom>
+          <a:noFill/>
+          <a:ln/>
+        </p:spPr>
+        <p:txBody>
+          <a:bodyPr wrap="none" lIns="0" tIns="0" rIns="0" bIns="0" rtlCol="0" anchor="t"/>
+          <a:lstStyle/>
+          <a:p>
+            <a:pPr algn="l" marL="342900" indent="-342900">
+              <a:lnSpc>
+                <a:spcPts val="1451"/>
+              </a:lnSpc>
+              <a:buSzPct val="100000"/>
+              <a:buChar char="•"/>
+            </a:pPr>
+            <a:r>
+              <a:rPr lang="en-US" sz="936" spc="-54" kern="0" dirty="0">
+                <a:solidFill>
+                  <a:srgbClr val="334155"/>
+                </a:solidFill>
+                <a:latin typeface="Malgun Gothic" pitchFamily="34" charset="0"/>
+                <a:ea typeface="Malgun Gothic" pitchFamily="34" charset="-122"/>
+                <a:cs typeface="Malgun Gothic" pitchFamily="34" charset="-120"/>
+              </a:rPr>
+              <a:t>첫 토큰 생성(TTFT): </a:t>
+            </a:r>
+            <a:pPr algn="l" indent="0" marL="0">
+              <a:lnSpc>
+                <a:spcPts val="1451"/>
+              </a:lnSpc>
+              <a:buNone/>
+            </a:pPr>
+            <a:r>
+              <a:rPr lang="en-US" sz="936" b="1" spc="-54" kern="0" dirty="0">
+                <a:solidFill>
+                  <a:srgbClr val="334155"/>
+                </a:solidFill>
+                <a:latin typeface="Malgun Gothic" pitchFamily="34" charset="0"/>
+                <a:ea typeface="Malgun Gothic" pitchFamily="34" charset="-122"/>
+                <a:cs typeface="Malgun Gothic" pitchFamily="34" charset="-120"/>
+              </a:rPr>
+              <a:t>140ms ➔ 42ms (68% 단축)</a:t>
+            </a:r>
+            <a:endParaRPr lang="en-US" sz="936" dirty="0"/>
+          </a:p>
+        </p:txBody>
+      </p:sp>
+      <p:sp>
+        <p:nvSpPr>
+          <p:cNvPr id="9" name="Text 7"/>
+          <p:cNvSpPr txBox="1"/>
+          <p:nvPr/>
+        </p:nvSpPr>
+        <p:spPr>
+          <a:xfrm>
+            <a:off x="904890" y="4442978"/>
+            <a:ext cx="5285964" cy="184252"/>
+          </a:xfrm>
+          <a:prstGeom prst="rect">
+            <a:avLst/>
+          </a:prstGeom>
+          <a:noFill/>
+          <a:ln/>
+        </p:spPr>
+        <p:txBody>
+          <a:bodyPr wrap="none" lIns="0" tIns="0" rIns="0" bIns="0" rtlCol="0" anchor="t"/>
+          <a:lstStyle/>
+          <a:p>
+            <a:pPr algn="l" marL="342900" indent="-342900">
+              <a:lnSpc>
+                <a:spcPts val="1451"/>
+              </a:lnSpc>
+              <a:buSzPct val="100000"/>
+              <a:buChar char="•"/>
+            </a:pPr>
+            <a:r>
+              <a:rPr lang="en-US" sz="936" spc="-54" kern="0" dirty="0">
+                <a:solidFill>
+                  <a:srgbClr val="334155"/>
+                </a:solidFill>
+                <a:latin typeface="Malgun Gothic" pitchFamily="34" charset="0"/>
+                <a:ea typeface="Malgun Gothic" pitchFamily="34" charset="-122"/>
+                <a:cs typeface="Malgun Gothic" pitchFamily="34" charset="-120"/>
+              </a:rPr>
+              <a:t>초당 생성 토큰 수: </a:t>
+            </a:r>
+            <a:pPr algn="l" indent="0" marL="0">
+              <a:lnSpc>
+                <a:spcPts val="1451"/>
+              </a:lnSpc>
+              <a:buNone/>
+            </a:pPr>
+            <a:r>
+              <a:rPr lang="en-US" sz="936" b="1" spc="-54" kern="0" dirty="0">
+                <a:solidFill>
+                  <a:srgbClr val="334155"/>
+                </a:solidFill>
+                <a:latin typeface="Malgun Gothic" pitchFamily="34" charset="0"/>
+                <a:ea typeface="Malgun Gothic" pitchFamily="34" charset="-122"/>
+                <a:cs typeface="Malgun Gothic" pitchFamily="34" charset="-120"/>
+              </a:rPr>
+              <a:t>11.2 ➔ 38.5 tokens/s</a:t>
+            </a:r>
+            <a:endParaRPr lang="en-US" sz="936" dirty="0"/>
+          </a:p>
+        </p:txBody>
+      </p:sp>
+      <p:sp>
+        <p:nvSpPr>
+          <p:cNvPr id="10" name="Text 8"/>
+          <p:cNvSpPr txBox="1"/>
+          <p:nvPr/>
+        </p:nvSpPr>
+        <p:spPr>
+          <a:xfrm>
+            <a:off x="904890" y="4665360"/>
+            <a:ext cx="5285964" cy="184252"/>
+          </a:xfrm>
+          <a:prstGeom prst="rect">
+            <a:avLst/>
+          </a:prstGeom>
+          <a:noFill/>
+          <a:ln/>
+        </p:spPr>
+        <p:txBody>
+          <a:bodyPr wrap="none" lIns="0" tIns="0" rIns="0" bIns="0" rtlCol="0" anchor="t"/>
+          <a:lstStyle/>
+          <a:p>
+            <a:pPr algn="l" marL="342900" indent="-342900">
+              <a:lnSpc>
+                <a:spcPts val="1451"/>
+              </a:lnSpc>
+              <a:buSzPct val="100000"/>
+              <a:buChar char="•"/>
+            </a:pPr>
+            <a:r>
+              <a:rPr lang="en-US" sz="936" spc="-54" kern="0" dirty="0">
+                <a:solidFill>
+                  <a:srgbClr val="334155"/>
+                </a:solidFill>
+                <a:latin typeface="Malgun Gothic" pitchFamily="34" charset="0"/>
+                <a:ea typeface="Malgun Gothic" pitchFamily="34" charset="-122"/>
+                <a:cs typeface="Malgun Gothic" pitchFamily="34" charset="-120"/>
+              </a:rPr>
+              <a:t>최대 컨텍스트 길이: </a:t>
+            </a:r>
+            <a:pPr algn="l" indent="0" marL="0">
+              <a:lnSpc>
+                <a:spcPts val="1451"/>
+              </a:lnSpc>
+              <a:buNone/>
+            </a:pPr>
+            <a:r>
+              <a:rPr lang="en-US" sz="936" b="1" spc="-54" kern="0" dirty="0">
+                <a:solidFill>
+                  <a:srgbClr val="334155"/>
+                </a:solidFill>
+                <a:latin typeface="Malgun Gothic" pitchFamily="34" charset="0"/>
+                <a:ea typeface="Malgun Gothic" pitchFamily="34" charset="-122"/>
+                <a:cs typeface="Malgun Gothic" pitchFamily="34" charset="-120"/>
+              </a:rPr>
+              <a:t>8K 토큰 무손실 지원</a:t>
+            </a:r>
+            <a:endParaRPr lang="en-US" sz="936" dirty="0"/>
+          </a:p>
+        </p:txBody>
+      </p:sp>
+      <p:sp>
+        <p:nvSpPr>
+          <p:cNvPr id="11" name="Shape 9"/>
+          <p:cNvSpPr/>
+          <p:nvPr/>
+        </p:nvSpPr>
+        <p:spPr>
+          <a:xfrm>
+            <a:off x="6172200" y="3690793"/>
+            <a:ext cx="5467380" cy="1398575"/>
+          </a:xfrm>
+          <a:prstGeom prst="roundRect">
+            <a:avLst>
+              <a:gd name="adj" fmla="val 9533"/>
+            </a:avLst>
+          </a:prstGeom>
+          <a:solidFill>
+            <a:srgbClr val="FFFFFF"/>
+          </a:solidFill>
+          <a:ln w="9525">
+            <a:solidFill>
+              <a:srgbClr val="E2E8F0"/>
+            </a:solidFill>
+            <a:prstDash val="solid"/>
+          </a:ln>
+        </p:spPr>
+      </p:sp>
+      <p:sp>
+        <p:nvSpPr>
+          <p:cNvPr id="12" name="Text 10"/>
+          <p:cNvSpPr txBox="1"/>
+          <p:nvPr/>
+        </p:nvSpPr>
+        <p:spPr>
+          <a:xfrm>
+            <a:off x="6372271" y="3886932"/>
+            <a:ext cx="5450556" cy="217170"/>
+          </a:xfrm>
+          <a:prstGeom prst="rect">
+            <a:avLst/>
+          </a:prstGeom>
+          <a:noFill/>
+          <a:ln/>
+        </p:spPr>
+        <p:txBody>
+          <a:bodyPr wrap="none" lIns="0" tIns="0" rIns="0" bIns="0" rtlCol="0" anchor="t"/>
+          <a:lstStyle/>
+          <a:p>
+            <a:pPr algn="l" indent="0" marL="0">
+              <a:lnSpc>
+                <a:spcPts val="1710"/>
+              </a:lnSpc>
+              <a:buNone/>
+            </a:pPr>
+            <a:r>
+              <a:rPr lang="en-US" sz="1140" b="1" spc="-54" kern="0" dirty="0">
+                <a:solidFill>
+                  <a:srgbClr val="059669"/>
+                </a:solidFill>
+                <a:latin typeface="Malgun Gothic" pitchFamily="34" charset="0"/>
+                <a:ea typeface="Malgun Gothic" pitchFamily="34" charset="-122"/>
+                <a:cs typeface="Malgun Gothic" pitchFamily="34" charset="-120"/>
+              </a:rPr>
+              <a:t>✓ 자원 효율성 및 정확도 (Efficiency &amp; Quality)</a:t>
+            </a:r>
+            <a:endParaRPr lang="en-US" sz="1140" dirty="0"/>
+          </a:p>
+        </p:txBody>
+      </p:sp>
+      <p:sp>
+        <p:nvSpPr>
+          <p:cNvPr id="13" name="Text 11"/>
+          <p:cNvSpPr txBox="1"/>
+          <p:nvPr/>
+        </p:nvSpPr>
+        <p:spPr>
+          <a:xfrm>
+            <a:off x="6524610" y="4220596"/>
+            <a:ext cx="5285964" cy="184252"/>
+          </a:xfrm>
+          <a:prstGeom prst="rect">
+            <a:avLst/>
+          </a:prstGeom>
+          <a:noFill/>
+          <a:ln/>
+        </p:spPr>
+        <p:txBody>
+          <a:bodyPr wrap="none" lIns="0" tIns="0" rIns="0" bIns="0" rtlCol="0" anchor="t"/>
+          <a:lstStyle/>
+          <a:p>
+            <a:pPr algn="l" marL="342900" indent="-342900">
+              <a:lnSpc>
+                <a:spcPts val="1451"/>
+              </a:lnSpc>
+              <a:buSzPct val="100000"/>
+              <a:buChar char="•"/>
+            </a:pPr>
+            <a:r>
+              <a:rPr lang="en-US" sz="936" spc="-54" kern="0" dirty="0">
+                <a:solidFill>
+                  <a:srgbClr val="334155"/>
+                </a:solidFill>
+                <a:latin typeface="Malgun Gothic" pitchFamily="34" charset="0"/>
+                <a:ea typeface="Malgun Gothic" pitchFamily="34" charset="-122"/>
+                <a:cs typeface="Malgun Gothic" pitchFamily="34" charset="-120"/>
+              </a:rPr>
+              <a:t>피크 메모리 사용량: </a:t>
+            </a:r>
+            <a:pPr algn="l" indent="0" marL="0">
+              <a:lnSpc>
+                <a:spcPts val="1451"/>
+              </a:lnSpc>
+              <a:buNone/>
+            </a:pPr>
+            <a:r>
+              <a:rPr lang="en-US" sz="936" b="1" spc="-54" kern="0" dirty="0">
+                <a:solidFill>
+                  <a:srgbClr val="334155"/>
+                </a:solidFill>
+                <a:latin typeface="Malgun Gothic" pitchFamily="34" charset="0"/>
+                <a:ea typeface="Malgun Gothic" pitchFamily="34" charset="-122"/>
+                <a:cs typeface="Malgun Gothic" pitchFamily="34" charset="-120"/>
+              </a:rPr>
+              <a:t>5.4GB ➔ 1.8GB (66% 절감)</a:t>
+            </a:r>
+            <a:endParaRPr lang="en-US" sz="936" dirty="0"/>
+          </a:p>
+        </p:txBody>
+      </p:sp>
+      <p:sp>
+        <p:nvSpPr>
+          <p:cNvPr id="14" name="Text 12"/>
+          <p:cNvSpPr txBox="1"/>
+          <p:nvPr/>
+        </p:nvSpPr>
+        <p:spPr>
+          <a:xfrm>
+            <a:off x="6524610" y="4442978"/>
+            <a:ext cx="5285964" cy="184252"/>
+          </a:xfrm>
+          <a:prstGeom prst="rect">
+            <a:avLst/>
+          </a:prstGeom>
+          <a:noFill/>
+          <a:ln/>
+        </p:spPr>
+        <p:txBody>
+          <a:bodyPr wrap="none" lIns="0" tIns="0" rIns="0" bIns="0" rtlCol="0" anchor="t"/>
+          <a:lstStyle/>
+          <a:p>
+            <a:pPr algn="l" marL="342900" indent="-342900">
+              <a:lnSpc>
+                <a:spcPts val="1451"/>
+              </a:lnSpc>
+              <a:buSzPct val="100000"/>
+              <a:buChar char="•"/>
+            </a:pPr>
+            <a:r>
+              <a:rPr lang="en-US" sz="936" spc="-54" kern="0" dirty="0">
+                <a:solidFill>
+                  <a:srgbClr val="334155"/>
+                </a:solidFill>
+                <a:latin typeface="Malgun Gothic" pitchFamily="34" charset="0"/>
+                <a:ea typeface="Malgun Gothic" pitchFamily="34" charset="-122"/>
+                <a:cs typeface="Malgun Gothic" pitchFamily="34" charset="-120"/>
+              </a:rPr>
+              <a:t>Ko-Harness 벤치마크: </a:t>
+            </a:r>
+            <a:pPr algn="l" indent="0" marL="0">
+              <a:lnSpc>
+                <a:spcPts val="1451"/>
+              </a:lnSpc>
+              <a:buNone/>
+            </a:pPr>
+            <a:r>
+              <a:rPr lang="en-US" sz="936" b="1" spc="-54" kern="0" dirty="0">
+                <a:solidFill>
+                  <a:srgbClr val="334155"/>
+                </a:solidFill>
+                <a:latin typeface="Malgun Gothic" pitchFamily="34" charset="0"/>
+                <a:ea typeface="Malgun Gothic" pitchFamily="34" charset="-122"/>
+                <a:cs typeface="Malgun Gothic" pitchFamily="34" charset="-120"/>
+              </a:rPr>
+              <a:t>88.4점 ➔ 94.2점 달성</a:t>
+            </a:r>
+            <a:endParaRPr lang="en-US" sz="936" dirty="0"/>
+          </a:p>
+        </p:txBody>
+      </p:sp>
+      <p:sp>
+        <p:nvSpPr>
+          <p:cNvPr id="15" name="Text 13"/>
+          <p:cNvSpPr txBox="1"/>
+          <p:nvPr/>
+        </p:nvSpPr>
+        <p:spPr>
+          <a:xfrm>
+            <a:off x="6524610" y="4665360"/>
+            <a:ext cx="5285964" cy="184252"/>
+          </a:xfrm>
+          <a:prstGeom prst="rect">
+            <a:avLst/>
+          </a:prstGeom>
+          <a:noFill/>
+          <a:ln/>
+        </p:spPr>
+        <p:txBody>
+          <a:bodyPr wrap="none" lIns="0" tIns="0" rIns="0" bIns="0" rtlCol="0" anchor="t"/>
+          <a:lstStyle/>
+          <a:p>
+            <a:pPr algn="l" marL="342900" indent="-342900">
+              <a:lnSpc>
+                <a:spcPts val="1451"/>
+              </a:lnSpc>
+              <a:buSzPct val="100000"/>
+              <a:buChar char="•"/>
+            </a:pPr>
+            <a:r>
+              <a:rPr lang="en-US" sz="936" spc="-54" kern="0" dirty="0">
+                <a:solidFill>
+                  <a:srgbClr val="334155"/>
+                </a:solidFill>
+                <a:latin typeface="Malgun Gothic" pitchFamily="34" charset="0"/>
+                <a:ea typeface="Malgun Gothic" pitchFamily="34" charset="-122"/>
+                <a:cs typeface="Malgun Gothic" pitchFamily="34" charset="-120"/>
+              </a:rPr>
+              <a:t>시간당 배터리 소모율: </a:t>
+            </a:r>
+            <a:pPr algn="l" indent="0" marL="0">
+              <a:lnSpc>
+                <a:spcPts val="1451"/>
+              </a:lnSpc>
+              <a:buNone/>
+            </a:pPr>
+            <a:r>
+              <a:rPr lang="en-US" sz="936" b="1" spc="-54" kern="0" dirty="0">
+                <a:solidFill>
+                  <a:srgbClr val="334155"/>
+                </a:solidFill>
+                <a:latin typeface="Malgun Gothic" pitchFamily="34" charset="0"/>
+                <a:ea typeface="Malgun Gothic" pitchFamily="34" charset="-122"/>
+                <a:cs typeface="Malgun Gothic" pitchFamily="34" charset="-120"/>
+              </a:rPr>
+              <a:t>4.2% 수준 극저치 유지</a:t>
+            </a:r>
+            <a:endParaRPr lang="en-US" sz="936" dirty="0"/>
+          </a:p>
+        </p:txBody>
+      </p:sp>
     </p:spTree>
   </p:cSld>
   <p:clrMapOvr>
@@ -1502,16 +5980,9 @@
   <p:cSld name="Slide 6">
     <p:bg>
       <p:bgPr>
-        <a:blipFill dpi="0" rotWithShape="1">
-          <a:blip r:embed="rId1">
-            <a:lum/>
-          </a:blip>
-          <a:srcRect/>
-          <a:stretch>
-            <a:fillRect/>
-          </a:stretch>
-        </a:blipFill>
-        <a:effectLst/>
+        <a:solidFill>
+          <a:srgbClr val="F8FAFC"/>
+        </a:solidFill>
       </p:bgPr>
     </p:bg>
     <p:spTree>
@@ -1528,6 +5999,1064 @@
           <a:chExt cx="0" cy="0"/>
         </a:xfrm>
       </p:grpSpPr>
+      <p:sp>
+        <p:nvSpPr>
+          <p:cNvPr id="2" name="Shape 0"/>
+          <p:cNvSpPr/>
+          <p:nvPr/>
+        </p:nvSpPr>
+        <p:spPr>
+          <a:xfrm>
+            <a:off x="552480" y="804306"/>
+            <a:ext cx="2579431" cy="418521"/>
+          </a:xfrm>
+          <a:prstGeom prst="roundRect">
+            <a:avLst>
+              <a:gd name="adj" fmla="val 50011"/>
+            </a:avLst>
+          </a:prstGeom>
+          <a:solidFill>
+            <a:srgbClr val="4F46E5">
+              <a:alpha val="10000"/>
+            </a:srgbClr>
+          </a:solidFill>
+          <a:ln w="9525">
+            <a:solidFill>
+              <a:srgbClr val="4F46E5">
+                <a:alpha val="25000"/>
+              </a:srgbClr>
+            </a:solidFill>
+            <a:prstDash val="solid"/>
+          </a:ln>
+        </p:spPr>
+      </p:sp>
+      <p:sp>
+        <p:nvSpPr>
+          <p:cNvPr id="3" name="Text 1"/>
+          <p:cNvSpPr txBox="1"/>
+          <p:nvPr/>
+        </p:nvSpPr>
+        <p:spPr>
+          <a:xfrm>
+            <a:off x="676290" y="847466"/>
+            <a:ext cx="2496221" cy="323149"/>
+          </a:xfrm>
+          <a:prstGeom prst="rect">
+            <a:avLst/>
+          </a:prstGeom>
+          <a:noFill/>
+          <a:ln/>
+        </p:spPr>
+        <p:txBody>
+          <a:bodyPr wrap="none" lIns="0" tIns="0" rIns="0" bIns="0" rtlCol="0" anchor="t"/>
+          <a:lstStyle/>
+          <a:p>
+            <a:pPr algn="l" indent="0" marL="0">
+              <a:lnSpc>
+                <a:spcPts val="2545"/>
+              </a:lnSpc>
+              <a:buNone/>
+            </a:pPr>
+            <a:r>
+              <a:rPr lang="en-US" sz="1697" b="1" spc="34" kern="0" dirty="0">
+                <a:solidFill>
+                  <a:srgbClr val="4F46E5"/>
+                </a:solidFill>
+                <a:latin typeface="Malgun Gothic" pitchFamily="34" charset="0"/>
+                <a:ea typeface="Malgun Gothic" pitchFamily="34" charset="-122"/>
+                <a:cs typeface="Malgun Gothic" pitchFamily="34" charset="-120"/>
+              </a:rPr>
+              <a:t>CONCLUSION &amp; REPO</a:t>
+            </a:r>
+            <a:endParaRPr lang="en-US" sz="1697" dirty="0"/>
+          </a:p>
+        </p:txBody>
+      </p:sp>
+      <p:sp>
+        <p:nvSpPr>
+          <p:cNvPr id="4" name="Text 2"/>
+          <p:cNvSpPr txBox="1"/>
+          <p:nvPr/>
+        </p:nvSpPr>
+        <p:spPr>
+          <a:xfrm>
+            <a:off x="533370" y="1298905"/>
+            <a:ext cx="11993088" cy="590611"/>
+          </a:xfrm>
+          <a:prstGeom prst="rect">
+            <a:avLst/>
+          </a:prstGeom>
+          <a:noFill/>
+          <a:ln/>
+        </p:spPr>
+        <p:txBody>
+          <a:bodyPr wrap="none" lIns="0" tIns="0" rIns="0" bIns="0" rtlCol="0" anchor="t"/>
+          <a:lstStyle/>
+          <a:p>
+            <a:pPr algn="l" indent="0" marL="0">
+              <a:lnSpc>
+                <a:spcPts val="4651"/>
+              </a:lnSpc>
+              <a:buNone/>
+            </a:pPr>
+            <a:r>
+              <a:rPr lang="en-US" sz="3524" b="1" spc="-88" kern="0" dirty="0">
+                <a:solidFill>
+                  <a:srgbClr val="0F172A"/>
+                </a:solidFill>
+                <a:latin typeface="Malgun Gothic" pitchFamily="34" charset="0"/>
+                <a:ea typeface="Malgun Gothic" pitchFamily="34" charset="-122"/>
+                <a:cs typeface="Malgun Gothic" pitchFamily="34" charset="-120"/>
+              </a:rPr>
+              <a:t>결론 및 질의응답 (Q&amp;A)</a:t>
+            </a:r>
+            <a:endParaRPr lang="en-US" sz="3524" dirty="0"/>
+          </a:p>
+        </p:txBody>
+      </p:sp>
+      <p:sp>
+        <p:nvSpPr>
+          <p:cNvPr id="5" name="Text 3"/>
+          <p:cNvSpPr txBox="1"/>
+          <p:nvPr/>
+        </p:nvSpPr>
+        <p:spPr>
+          <a:xfrm>
+            <a:off x="533370" y="2072670"/>
+            <a:ext cx="11993088" cy="397764"/>
+          </a:xfrm>
+          <a:prstGeom prst="rect">
+            <a:avLst/>
+          </a:prstGeom>
+          <a:noFill/>
+          <a:ln/>
+        </p:spPr>
+        <p:txBody>
+          <a:bodyPr wrap="none" lIns="0" tIns="0" rIns="0" bIns="0" rtlCol="0" anchor="t"/>
+          <a:lstStyle/>
+          <a:p>
+            <a:pPr algn="l" indent="0" marL="0">
+              <a:lnSpc>
+                <a:spcPts val="3132"/>
+              </a:lnSpc>
+              <a:buNone/>
+            </a:pPr>
+            <a:r>
+              <a:rPr lang="en-US" sz="2088" spc="-54" kern="0" dirty="0">
+                <a:solidFill>
+                  <a:srgbClr val="64748B"/>
+                </a:solidFill>
+                <a:latin typeface="Malgun Gothic" pitchFamily="34" charset="0"/>
+                <a:ea typeface="Malgun Gothic" pitchFamily="34" charset="-122"/>
+                <a:cs typeface="Malgun Gothic" pitchFamily="34" charset="-120"/>
+              </a:rPr>
+              <a:t>소형 언어 모델의 엣지 배포 가능성을 확인하였으며, 오픈소스 모델 가중치를 공개합니다.</a:t>
+            </a:r>
+            <a:endParaRPr lang="en-US" sz="2088" dirty="0"/>
+          </a:p>
+        </p:txBody>
+      </p:sp>
+      <p:sp>
+        <p:nvSpPr>
+          <p:cNvPr id="6" name="Shape 4"/>
+          <p:cNvSpPr/>
+          <p:nvPr/>
+        </p:nvSpPr>
+        <p:spPr>
+          <a:xfrm>
+            <a:off x="552480" y="2631277"/>
+            <a:ext cx="6029919" cy="669707"/>
+          </a:xfrm>
+          <a:prstGeom prst="roundRect">
+            <a:avLst>
+              <a:gd name="adj" fmla="val 19907"/>
+            </a:avLst>
+          </a:prstGeom>
+          <a:solidFill>
+            <a:srgbClr val="FFFFFF"/>
+          </a:solidFill>
+          <a:ln/>
+        </p:spPr>
+      </p:sp>
+      <p:sp>
+        <p:nvSpPr>
+          <p:cNvPr id="7" name="Shape 5"/>
+          <p:cNvSpPr/>
+          <p:nvPr/>
+        </p:nvSpPr>
+        <p:spPr>
+          <a:xfrm>
+            <a:off x="552480" y="2631277"/>
+            <a:ext cx="6029919" cy="9510"/>
+          </a:xfrm>
+          <a:prstGeom prst="rect">
+            <a:avLst/>
+          </a:prstGeom>
+          <a:solidFill>
+            <a:srgbClr val="E2E8F0"/>
+          </a:solidFill>
+          <a:ln/>
+        </p:spPr>
+      </p:sp>
+      <p:sp>
+        <p:nvSpPr>
+          <p:cNvPr id="8" name="Shape 6"/>
+          <p:cNvSpPr/>
+          <p:nvPr/>
+        </p:nvSpPr>
+        <p:spPr>
+          <a:xfrm>
+            <a:off x="6572799" y="2631277"/>
+            <a:ext cx="9510" cy="669707"/>
+          </a:xfrm>
+          <a:prstGeom prst="rect">
+            <a:avLst/>
+          </a:prstGeom>
+          <a:solidFill>
+            <a:srgbClr val="E2E8F0"/>
+          </a:solidFill>
+          <a:ln/>
+        </p:spPr>
+      </p:sp>
+      <p:sp>
+        <p:nvSpPr>
+          <p:cNvPr id="9" name="Shape 7"/>
+          <p:cNvSpPr/>
+          <p:nvPr/>
+        </p:nvSpPr>
+        <p:spPr>
+          <a:xfrm>
+            <a:off x="552480" y="3291474"/>
+            <a:ext cx="6029919" cy="9510"/>
+          </a:xfrm>
+          <a:prstGeom prst="rect">
+            <a:avLst/>
+          </a:prstGeom>
+          <a:solidFill>
+            <a:srgbClr val="E2E8F0"/>
+          </a:solidFill>
+          <a:ln/>
+        </p:spPr>
+      </p:sp>
+      <p:sp>
+        <p:nvSpPr>
+          <p:cNvPr id="10" name="Shape 8"/>
+          <p:cNvSpPr/>
+          <p:nvPr/>
+        </p:nvSpPr>
+        <p:spPr>
+          <a:xfrm>
+            <a:off x="552480" y="2631277"/>
+            <a:ext cx="28621" cy="669707"/>
+          </a:xfrm>
+          <a:prstGeom prst="rect">
+            <a:avLst/>
+          </a:prstGeom>
+          <a:solidFill>
+            <a:srgbClr val="4F46E5"/>
+          </a:solidFill>
+          <a:ln/>
+        </p:spPr>
+      </p:sp>
+      <p:sp>
+        <p:nvSpPr>
+          <p:cNvPr id="11" name="Text 9"/>
+          <p:cNvSpPr txBox="1"/>
+          <p:nvPr/>
+        </p:nvSpPr>
+        <p:spPr>
+          <a:xfrm>
+            <a:off x="714421" y="2754721"/>
+            <a:ext cx="6161044" cy="210312"/>
+          </a:xfrm>
+          <a:prstGeom prst="rect">
+            <a:avLst/>
+          </a:prstGeom>
+          <a:noFill/>
+          <a:ln/>
+        </p:spPr>
+        <p:txBody>
+          <a:bodyPr wrap="none" lIns="0" tIns="0" rIns="0" bIns="0" rtlCol="0" anchor="t"/>
+          <a:lstStyle/>
+          <a:p>
+            <a:pPr algn="l" indent="0" marL="0">
+              <a:lnSpc>
+                <a:spcPts val="1656"/>
+              </a:lnSpc>
+              <a:buNone/>
+            </a:pPr>
+            <a:r>
+              <a:rPr lang="en-US" sz="1104" b="1" spc="-54" kern="0" dirty="0">
+                <a:solidFill>
+                  <a:srgbClr val="0F172A"/>
+                </a:solidFill>
+                <a:latin typeface="Malgun Gothic" pitchFamily="34" charset="0"/>
+                <a:ea typeface="Malgun Gothic" pitchFamily="34" charset="-122"/>
+                <a:cs typeface="Malgun Gothic" pitchFamily="34" charset="-120"/>
+              </a:rPr>
+              <a:t>01. 4-bit AWQ + KV 캐시 프루닝 실증</a:t>
+            </a:r>
+            <a:endParaRPr lang="en-US" sz="1104" dirty="0"/>
+          </a:p>
+        </p:txBody>
+      </p:sp>
+      <p:sp>
+        <p:nvSpPr>
+          <p:cNvPr id="12" name="Text 10"/>
+          <p:cNvSpPr txBox="1"/>
+          <p:nvPr/>
+        </p:nvSpPr>
+        <p:spPr>
+          <a:xfrm>
+            <a:off x="714421" y="2997586"/>
+            <a:ext cx="6161044" cy="173736"/>
+          </a:xfrm>
+          <a:prstGeom prst="rect">
+            <a:avLst/>
+          </a:prstGeom>
+          <a:noFill/>
+          <a:ln/>
+        </p:spPr>
+        <p:txBody>
+          <a:bodyPr wrap="none" lIns="0" tIns="0" rIns="0" bIns="0" rtlCol="0" anchor="t"/>
+          <a:lstStyle/>
+          <a:p>
+            <a:pPr algn="l" indent="0" marL="0">
+              <a:lnSpc>
+                <a:spcPts val="1368"/>
+              </a:lnSpc>
+              <a:buNone/>
+            </a:pPr>
+            <a:r>
+              <a:rPr lang="en-US" sz="912" spc="-54" kern="0" dirty="0">
+                <a:solidFill>
+                  <a:srgbClr val="64748B"/>
+                </a:solidFill>
+                <a:latin typeface="Malgun Gothic" pitchFamily="34" charset="0"/>
+                <a:ea typeface="Malgun Gothic" pitchFamily="34" charset="-122"/>
+                <a:cs typeface="Malgun Gothic" pitchFamily="34" charset="-120"/>
+              </a:rPr>
+              <a:t>정확도 저하 없이 메모리 66% 절감 및 모바일 RAM 1.8GB 유지</a:t>
+            </a:r>
+            <a:endParaRPr lang="en-US" sz="912" dirty="0"/>
+          </a:p>
+        </p:txBody>
+      </p:sp>
+      <p:sp>
+        <p:nvSpPr>
+          <p:cNvPr id="13" name="Shape 11"/>
+          <p:cNvSpPr/>
+          <p:nvPr/>
+        </p:nvSpPr>
+        <p:spPr>
+          <a:xfrm>
+            <a:off x="552480" y="3396264"/>
+            <a:ext cx="6029919" cy="669707"/>
+          </a:xfrm>
+          <a:prstGeom prst="roundRect">
+            <a:avLst>
+              <a:gd name="adj" fmla="val 19907"/>
+            </a:avLst>
+          </a:prstGeom>
+          <a:solidFill>
+            <a:srgbClr val="FFFFFF"/>
+          </a:solidFill>
+          <a:ln/>
+        </p:spPr>
+      </p:sp>
+      <p:sp>
+        <p:nvSpPr>
+          <p:cNvPr id="14" name="Shape 12"/>
+          <p:cNvSpPr/>
+          <p:nvPr/>
+        </p:nvSpPr>
+        <p:spPr>
+          <a:xfrm>
+            <a:off x="552480" y="3396264"/>
+            <a:ext cx="6029919" cy="9510"/>
+          </a:xfrm>
+          <a:prstGeom prst="rect">
+            <a:avLst/>
+          </a:prstGeom>
+          <a:solidFill>
+            <a:srgbClr val="E2E8F0"/>
+          </a:solidFill>
+          <a:ln/>
+        </p:spPr>
+      </p:sp>
+      <p:sp>
+        <p:nvSpPr>
+          <p:cNvPr id="15" name="Shape 13"/>
+          <p:cNvSpPr/>
+          <p:nvPr/>
+        </p:nvSpPr>
+        <p:spPr>
+          <a:xfrm>
+            <a:off x="6572799" y="3396264"/>
+            <a:ext cx="9510" cy="669707"/>
+          </a:xfrm>
+          <a:prstGeom prst="rect">
+            <a:avLst/>
+          </a:prstGeom>
+          <a:solidFill>
+            <a:srgbClr val="E2E8F0"/>
+          </a:solidFill>
+          <a:ln/>
+        </p:spPr>
+      </p:sp>
+      <p:sp>
+        <p:nvSpPr>
+          <p:cNvPr id="16" name="Shape 14"/>
+          <p:cNvSpPr/>
+          <p:nvPr/>
+        </p:nvSpPr>
+        <p:spPr>
+          <a:xfrm>
+            <a:off x="552480" y="4056370"/>
+            <a:ext cx="6029919" cy="9510"/>
+          </a:xfrm>
+          <a:prstGeom prst="rect">
+            <a:avLst/>
+          </a:prstGeom>
+          <a:solidFill>
+            <a:srgbClr val="E2E8F0"/>
+          </a:solidFill>
+          <a:ln/>
+        </p:spPr>
+      </p:sp>
+      <p:sp>
+        <p:nvSpPr>
+          <p:cNvPr id="17" name="Shape 15"/>
+          <p:cNvSpPr/>
+          <p:nvPr/>
+        </p:nvSpPr>
+        <p:spPr>
+          <a:xfrm>
+            <a:off x="552480" y="3396264"/>
+            <a:ext cx="28621" cy="669707"/>
+          </a:xfrm>
+          <a:prstGeom prst="rect">
+            <a:avLst/>
+          </a:prstGeom>
+          <a:solidFill>
+            <a:srgbClr val="0284C7"/>
+          </a:solidFill>
+          <a:ln/>
+        </p:spPr>
+      </p:sp>
+      <p:sp>
+        <p:nvSpPr>
+          <p:cNvPr id="18" name="Text 16"/>
+          <p:cNvSpPr txBox="1"/>
+          <p:nvPr/>
+        </p:nvSpPr>
+        <p:spPr>
+          <a:xfrm>
+            <a:off x="714421" y="3519708"/>
+            <a:ext cx="6161044" cy="210312"/>
+          </a:xfrm>
+          <a:prstGeom prst="rect">
+            <a:avLst/>
+          </a:prstGeom>
+          <a:noFill/>
+          <a:ln/>
+        </p:spPr>
+        <p:txBody>
+          <a:bodyPr wrap="none" lIns="0" tIns="0" rIns="0" bIns="0" rtlCol="0" anchor="t"/>
+          <a:lstStyle/>
+          <a:p>
+            <a:pPr algn="l" indent="0" marL="0">
+              <a:lnSpc>
+                <a:spcPts val="1656"/>
+              </a:lnSpc>
+              <a:buNone/>
+            </a:pPr>
+            <a:r>
+              <a:rPr lang="en-US" sz="1104" b="1" spc="-54" kern="0" dirty="0">
+                <a:solidFill>
+                  <a:srgbClr val="0F172A"/>
+                </a:solidFill>
+                <a:latin typeface="Malgun Gothic" pitchFamily="34" charset="0"/>
+                <a:ea typeface="Malgun Gothic" pitchFamily="34" charset="-122"/>
+                <a:cs typeface="Malgun Gothic" pitchFamily="34" charset="-120"/>
+              </a:rPr>
+              <a:t>02. 실시간 스트리밍 38.5 tok/s 달성</a:t>
+            </a:r>
+            <a:endParaRPr lang="en-US" sz="1104" dirty="0"/>
+          </a:p>
+        </p:txBody>
+      </p:sp>
+      <p:sp>
+        <p:nvSpPr>
+          <p:cNvPr id="19" name="Text 17"/>
+          <p:cNvSpPr txBox="1"/>
+          <p:nvPr/>
+        </p:nvSpPr>
+        <p:spPr>
+          <a:xfrm>
+            <a:off x="714421" y="3762573"/>
+            <a:ext cx="6161044" cy="173736"/>
+          </a:xfrm>
+          <a:prstGeom prst="rect">
+            <a:avLst/>
+          </a:prstGeom>
+          <a:noFill/>
+          <a:ln/>
+        </p:spPr>
+        <p:txBody>
+          <a:bodyPr wrap="none" lIns="0" tIns="0" rIns="0" bIns="0" rtlCol="0" anchor="t"/>
+          <a:lstStyle/>
+          <a:p>
+            <a:pPr algn="l" indent="0" marL="0">
+              <a:lnSpc>
+                <a:spcPts val="1368"/>
+              </a:lnSpc>
+              <a:buNone/>
+            </a:pPr>
+            <a:r>
+              <a:rPr lang="en-US" sz="912" spc="-54" kern="0" dirty="0">
+                <a:solidFill>
+                  <a:srgbClr val="64748B"/>
+                </a:solidFill>
+                <a:latin typeface="Malgun Gothic" pitchFamily="34" charset="0"/>
+                <a:ea typeface="Malgun Gothic" pitchFamily="34" charset="-122"/>
+                <a:cs typeface="Malgun Gothic" pitchFamily="34" charset="-120"/>
+              </a:rPr>
+              <a:t>첫 토큰 지연시간 42ms로 온디바이스 실시간 UX 완벽 지원</a:t>
+            </a:r>
+            <a:endParaRPr lang="en-US" sz="912" dirty="0"/>
+          </a:p>
+        </p:txBody>
+      </p:sp>
+      <p:sp>
+        <p:nvSpPr>
+          <p:cNvPr id="20" name="Shape 18"/>
+          <p:cNvSpPr/>
+          <p:nvPr/>
+        </p:nvSpPr>
+        <p:spPr>
+          <a:xfrm>
+            <a:off x="552480" y="4161252"/>
+            <a:ext cx="6029919" cy="669707"/>
+          </a:xfrm>
+          <a:prstGeom prst="roundRect">
+            <a:avLst>
+              <a:gd name="adj" fmla="val 19907"/>
+            </a:avLst>
+          </a:prstGeom>
+          <a:solidFill>
+            <a:srgbClr val="FFFFFF"/>
+          </a:solidFill>
+          <a:ln/>
+        </p:spPr>
+      </p:sp>
+      <p:sp>
+        <p:nvSpPr>
+          <p:cNvPr id="21" name="Shape 19"/>
+          <p:cNvSpPr/>
+          <p:nvPr/>
+        </p:nvSpPr>
+        <p:spPr>
+          <a:xfrm>
+            <a:off x="552480" y="4161252"/>
+            <a:ext cx="6029919" cy="9510"/>
+          </a:xfrm>
+          <a:prstGeom prst="rect">
+            <a:avLst/>
+          </a:prstGeom>
+          <a:solidFill>
+            <a:srgbClr val="E2E8F0"/>
+          </a:solidFill>
+          <a:ln/>
+        </p:spPr>
+      </p:sp>
+      <p:sp>
+        <p:nvSpPr>
+          <p:cNvPr id="22" name="Shape 20"/>
+          <p:cNvSpPr/>
+          <p:nvPr/>
+        </p:nvSpPr>
+        <p:spPr>
+          <a:xfrm>
+            <a:off x="6572799" y="4161252"/>
+            <a:ext cx="9510" cy="669707"/>
+          </a:xfrm>
+          <a:prstGeom prst="rect">
+            <a:avLst/>
+          </a:prstGeom>
+          <a:solidFill>
+            <a:srgbClr val="E2E8F0"/>
+          </a:solidFill>
+          <a:ln/>
+        </p:spPr>
+      </p:sp>
+      <p:sp>
+        <p:nvSpPr>
+          <p:cNvPr id="23" name="Shape 21"/>
+          <p:cNvSpPr/>
+          <p:nvPr/>
+        </p:nvSpPr>
+        <p:spPr>
+          <a:xfrm>
+            <a:off x="552480" y="4821448"/>
+            <a:ext cx="6029919" cy="9510"/>
+          </a:xfrm>
+          <a:prstGeom prst="rect">
+            <a:avLst/>
+          </a:prstGeom>
+          <a:solidFill>
+            <a:srgbClr val="E2E8F0"/>
+          </a:solidFill>
+          <a:ln/>
+        </p:spPr>
+      </p:sp>
+      <p:sp>
+        <p:nvSpPr>
+          <p:cNvPr id="24" name="Shape 22"/>
+          <p:cNvSpPr/>
+          <p:nvPr/>
+        </p:nvSpPr>
+        <p:spPr>
+          <a:xfrm>
+            <a:off x="552480" y="4161252"/>
+            <a:ext cx="28621" cy="669707"/>
+          </a:xfrm>
+          <a:prstGeom prst="rect">
+            <a:avLst/>
+          </a:prstGeom>
+          <a:solidFill>
+            <a:srgbClr val="059669"/>
+          </a:solidFill>
+          <a:ln/>
+        </p:spPr>
+      </p:sp>
+      <p:sp>
+        <p:nvSpPr>
+          <p:cNvPr id="25" name="Text 23"/>
+          <p:cNvSpPr txBox="1"/>
+          <p:nvPr/>
+        </p:nvSpPr>
+        <p:spPr>
+          <a:xfrm>
+            <a:off x="714421" y="4284696"/>
+            <a:ext cx="6161044" cy="210312"/>
+          </a:xfrm>
+          <a:prstGeom prst="rect">
+            <a:avLst/>
+          </a:prstGeom>
+          <a:noFill/>
+          <a:ln/>
+        </p:spPr>
+        <p:txBody>
+          <a:bodyPr wrap="none" lIns="0" tIns="0" rIns="0" bIns="0" rtlCol="0" anchor="t"/>
+          <a:lstStyle/>
+          <a:p>
+            <a:pPr algn="l" indent="0" marL="0">
+              <a:lnSpc>
+                <a:spcPts val="1656"/>
+              </a:lnSpc>
+              <a:buNone/>
+            </a:pPr>
+            <a:r>
+              <a:rPr lang="en-US" sz="1104" b="1" spc="-54" kern="0" dirty="0">
+                <a:solidFill>
+                  <a:srgbClr val="0F172A"/>
+                </a:solidFill>
+                <a:latin typeface="Malgun Gothic" pitchFamily="34" charset="0"/>
+                <a:ea typeface="Malgun Gothic" pitchFamily="34" charset="-122"/>
+                <a:cs typeface="Malgun Gothic" pitchFamily="34" charset="-120"/>
+              </a:rPr>
+              <a:t>03. 오픈 연구 생태계 기여</a:t>
+            </a:r>
+            <a:endParaRPr lang="en-US" sz="1104" dirty="0"/>
+          </a:p>
+        </p:txBody>
+      </p:sp>
+      <p:sp>
+        <p:nvSpPr>
+          <p:cNvPr id="26" name="Text 24"/>
+          <p:cNvSpPr txBox="1"/>
+          <p:nvPr/>
+        </p:nvSpPr>
+        <p:spPr>
+          <a:xfrm>
+            <a:off x="714421" y="4527560"/>
+            <a:ext cx="6161044" cy="173736"/>
+          </a:xfrm>
+          <a:prstGeom prst="rect">
+            <a:avLst/>
+          </a:prstGeom>
+          <a:noFill/>
+          <a:ln/>
+        </p:spPr>
+        <p:txBody>
+          <a:bodyPr wrap="none" lIns="0" tIns="0" rIns="0" bIns="0" rtlCol="0" anchor="t"/>
+          <a:lstStyle/>
+          <a:p>
+            <a:pPr algn="l" indent="0" marL="0">
+              <a:lnSpc>
+                <a:spcPts val="1368"/>
+              </a:lnSpc>
+              <a:buNone/>
+            </a:pPr>
+            <a:r>
+              <a:rPr lang="en-US" sz="912" spc="-54" kern="0" dirty="0">
+                <a:solidFill>
+                  <a:srgbClr val="64748B"/>
+                </a:solidFill>
+                <a:latin typeface="Malgun Gothic" pitchFamily="34" charset="0"/>
+                <a:ea typeface="Malgun Gothic" pitchFamily="34" charset="-122"/>
+                <a:cs typeface="Malgun Gothic" pitchFamily="34" charset="-120"/>
+              </a:rPr>
+              <a:t>사전 학습된 한국어 가중치 및 양자화 파이프라인 공개</a:t>
+            </a:r>
+            <a:endParaRPr lang="en-US" sz="912" dirty="0"/>
+          </a:p>
+        </p:txBody>
+      </p:sp>
+      <p:sp>
+        <p:nvSpPr>
+          <p:cNvPr id="27" name="Shape 25"/>
+          <p:cNvSpPr/>
+          <p:nvPr/>
+        </p:nvSpPr>
+        <p:spPr>
+          <a:xfrm>
+            <a:off x="6772869" y="2631277"/>
+            <a:ext cx="4866711" cy="3441344"/>
+          </a:xfrm>
+          <a:prstGeom prst="roundRect">
+            <a:avLst>
+              <a:gd name="adj" fmla="val 3874"/>
+            </a:avLst>
+          </a:prstGeom>
+          <a:solidFill>
+            <a:srgbClr val="FFFFFF"/>
+          </a:solidFill>
+          <a:ln w="9525">
+            <a:solidFill>
+              <a:srgbClr val="4F46E5">
+                <a:alpha val="35000"/>
+              </a:srgbClr>
+            </a:solidFill>
+            <a:prstDash val="solid"/>
+          </a:ln>
+        </p:spPr>
+      </p:sp>
+      <p:sp>
+        <p:nvSpPr>
+          <p:cNvPr id="28" name="Text 26"/>
+          <p:cNvSpPr txBox="1"/>
+          <p:nvPr/>
+        </p:nvSpPr>
+        <p:spPr>
+          <a:xfrm>
+            <a:off x="6953829" y="2810774"/>
+            <a:ext cx="4843028" cy="298369"/>
+          </a:xfrm>
+          <a:prstGeom prst="rect">
+            <a:avLst/>
+          </a:prstGeom>
+          <a:noFill/>
+          <a:ln/>
+        </p:spPr>
+        <p:txBody>
+          <a:bodyPr wrap="none" lIns="0" tIns="0" rIns="0" bIns="0" rtlCol="0" anchor="t"/>
+          <a:lstStyle/>
+          <a:p>
+            <a:pPr algn="l" indent="0" marL="0">
+              <a:lnSpc>
+                <a:spcPts val="2349"/>
+              </a:lnSpc>
+              <a:buNone/>
+            </a:pPr>
+            <a:r>
+              <a:rPr lang="en-US" sz="1566" b="1" spc="125" kern="0" dirty="0">
+                <a:solidFill>
+                  <a:srgbClr val="4F46E5"/>
+                </a:solidFill>
+                <a:latin typeface="Malgun Gothic" pitchFamily="34" charset="0"/>
+                <a:ea typeface="Malgun Gothic" pitchFamily="34" charset="-122"/>
+                <a:cs typeface="Malgun Gothic" pitchFamily="34" charset="-120"/>
+              </a:rPr>
+              <a:t>ACADEMIC DISCUSSION</a:t>
+            </a:r>
+            <a:endParaRPr lang="en-US" sz="1566" dirty="0"/>
+          </a:p>
+        </p:txBody>
+      </p:sp>
+      <p:sp>
+        <p:nvSpPr>
+          <p:cNvPr id="29" name="Text 27"/>
+          <p:cNvSpPr txBox="1"/>
+          <p:nvPr/>
+        </p:nvSpPr>
+        <p:spPr>
+          <a:xfrm>
+            <a:off x="6953829" y="3127522"/>
+            <a:ext cx="4843028" cy="546903"/>
+          </a:xfrm>
+          <a:prstGeom prst="rect">
+            <a:avLst/>
+          </a:prstGeom>
+          <a:noFill/>
+          <a:ln/>
+        </p:spPr>
+        <p:txBody>
+          <a:bodyPr wrap="none" lIns="0" tIns="0" rIns="0" bIns="0" rtlCol="0" anchor="t"/>
+          <a:lstStyle/>
+          <a:p>
+            <a:pPr algn="l" indent="0" marL="0">
+              <a:lnSpc>
+                <a:spcPts val="4307"/>
+              </a:lnSpc>
+              <a:buNone/>
+            </a:pPr>
+            <a:r>
+              <a:rPr lang="en-US" sz="3915" b="1" spc="-54" kern="0" dirty="0">
+                <a:solidFill>
+                  <a:srgbClr val="0F172A"/>
+                </a:solidFill>
+                <a:latin typeface="Malgun Gothic" pitchFamily="34" charset="0"/>
+                <a:ea typeface="Malgun Gothic" pitchFamily="34" charset="-122"/>
+                <a:cs typeface="Malgun Gothic" pitchFamily="34" charset="-120"/>
+              </a:rPr>
+              <a:t>Q &amp; A</a:t>
+            </a:r>
+            <a:endParaRPr lang="en-US" sz="3915" dirty="0"/>
+          </a:p>
+        </p:txBody>
+      </p:sp>
+      <p:sp>
+        <p:nvSpPr>
+          <p:cNvPr id="30" name="Text 28"/>
+          <p:cNvSpPr txBox="1"/>
+          <p:nvPr/>
+        </p:nvSpPr>
+        <p:spPr>
+          <a:xfrm>
+            <a:off x="6953829" y="3730478"/>
+            <a:ext cx="4504792" cy="603321"/>
+          </a:xfrm>
+          <a:prstGeom prst="rect">
+            <a:avLst/>
+          </a:prstGeom>
+          <a:noFill/>
+          <a:ln/>
+        </p:spPr>
+        <p:txBody>
+          <a:bodyPr wrap="square" lIns="0" tIns="0" rIns="0" bIns="0" rtlCol="0" anchor="t"/>
+          <a:lstStyle/>
+          <a:p>
+            <a:pPr algn="l" indent="0" marL="0">
+              <a:lnSpc>
+                <a:spcPts val="2375"/>
+              </a:lnSpc>
+              <a:buNone/>
+            </a:pPr>
+            <a:r>
+              <a:rPr lang="en-US" sz="1697" spc="-54" kern="0" dirty="0">
+                <a:solidFill>
+                  <a:srgbClr val="64748B"/>
+                </a:solidFill>
+                <a:latin typeface="Malgun Gothic" pitchFamily="34" charset="0"/>
+                <a:ea typeface="Malgun Gothic" pitchFamily="34" charset="-122"/>
+                <a:cs typeface="Malgun Gothic" pitchFamily="34" charset="-120"/>
+              </a:rPr>
+              <a:t>논문 연구 방법론 및 벤치마크에 대한 질의응답을 진행합니다.</a:t>
+            </a:r>
+            <a:endParaRPr lang="en-US" sz="1697" dirty="0"/>
+          </a:p>
+        </p:txBody>
+      </p:sp>
+      <p:sp>
+        <p:nvSpPr>
+          <p:cNvPr id="31" name="Shape 29"/>
+          <p:cNvSpPr/>
+          <p:nvPr/>
+        </p:nvSpPr>
+        <p:spPr>
+          <a:xfrm>
+            <a:off x="6972849" y="4432280"/>
+            <a:ext cx="4466661" cy="9510"/>
+          </a:xfrm>
+          <a:prstGeom prst="rect">
+            <a:avLst/>
+          </a:prstGeom>
+          <a:solidFill>
+            <a:srgbClr val="E2E8F0"/>
+          </a:solidFill>
+          <a:ln/>
+        </p:spPr>
+      </p:sp>
+      <p:sp>
+        <p:nvSpPr>
+          <p:cNvPr id="32" name="Text 30"/>
+          <p:cNvSpPr txBox="1"/>
+          <p:nvPr/>
+        </p:nvSpPr>
+        <p:spPr>
+          <a:xfrm>
+            <a:off x="6953829" y="4529480"/>
+            <a:ext cx="4843028" cy="281727"/>
+          </a:xfrm>
+          <a:prstGeom prst="rect">
+            <a:avLst/>
+          </a:prstGeom>
+          <a:noFill/>
+          <a:ln/>
+        </p:spPr>
+        <p:txBody>
+          <a:bodyPr wrap="none" lIns="0" tIns="0" rIns="0" bIns="0" rtlCol="0" anchor="t"/>
+          <a:lstStyle/>
+          <a:p>
+            <a:pPr algn="l" indent="0" marL="0">
+              <a:lnSpc>
+                <a:spcPts val="2219"/>
+              </a:lnSpc>
+              <a:buNone/>
+            </a:pPr>
+            <a:r>
+              <a:rPr lang="en-US" sz="1479" spc="-54" kern="0" dirty="0">
+                <a:solidFill>
+                  <a:srgbClr val="64748B"/>
+                </a:solidFill>
+                <a:latin typeface="Malgun Gothic" pitchFamily="34" charset="0"/>
+                <a:ea typeface="Malgun Gothic" pitchFamily="34" charset="-122"/>
+                <a:cs typeface="Malgun Gothic" pitchFamily="34" charset="-120"/>
+              </a:rPr>
+              <a:t>OPEN RESEARCH REPO</a:t>
+            </a:r>
+            <a:endParaRPr lang="en-US" sz="1479" dirty="0"/>
+          </a:p>
+        </p:txBody>
+      </p:sp>
+      <p:sp>
+        <p:nvSpPr>
+          <p:cNvPr id="33" name="Text 31"/>
+          <p:cNvSpPr txBox="1"/>
+          <p:nvPr/>
+        </p:nvSpPr>
+        <p:spPr>
+          <a:xfrm>
+            <a:off x="6953829" y="4830501"/>
+            <a:ext cx="4843028" cy="348021"/>
+          </a:xfrm>
+          <a:prstGeom prst="rect">
+            <a:avLst/>
+          </a:prstGeom>
+          <a:noFill/>
+          <a:ln/>
+        </p:spPr>
+        <p:txBody>
+          <a:bodyPr wrap="none" lIns="0" tIns="0" rIns="0" bIns="0" rtlCol="0" anchor="t"/>
+          <a:lstStyle/>
+          <a:p>
+            <a:pPr algn="l" indent="0" marL="0">
+              <a:lnSpc>
+                <a:spcPts val="2741"/>
+              </a:lnSpc>
+              <a:buNone/>
+            </a:pPr>
+            <a:r>
+              <a:rPr lang="en-US" sz="1827" b="1" spc="-54" kern="0" dirty="0">
+                <a:solidFill>
+                  <a:srgbClr val="4F46E5"/>
+                </a:solidFill>
+                <a:latin typeface="Malgun Gothic" pitchFamily="34" charset="0"/>
+                <a:ea typeface="Malgun Gothic" pitchFamily="34" charset="-122"/>
+                <a:cs typeface="Malgun Gothic" pitchFamily="34" charset="-120"/>
+              </a:rPr>
+              <a:t>github.com/ai-lab/edge-sllm</a:t>
+            </a:r>
+            <a:endParaRPr lang="en-US" sz="1827" dirty="0"/>
+          </a:p>
+        </p:txBody>
+      </p:sp>
+      <p:sp>
+        <p:nvSpPr>
+          <p:cNvPr id="34" name="Text 32"/>
+          <p:cNvSpPr txBox="1"/>
+          <p:nvPr/>
+        </p:nvSpPr>
+        <p:spPr>
+          <a:xfrm>
+            <a:off x="6953829" y="5235397"/>
+            <a:ext cx="4843028" cy="281727"/>
+          </a:xfrm>
+          <a:prstGeom prst="rect">
+            <a:avLst/>
+          </a:prstGeom>
+          <a:noFill/>
+          <a:ln/>
+        </p:spPr>
+        <p:txBody>
+          <a:bodyPr wrap="none" lIns="0" tIns="0" rIns="0" bIns="0" rtlCol="0" anchor="t"/>
+          <a:lstStyle/>
+          <a:p>
+            <a:pPr algn="l" indent="0" marL="0">
+              <a:lnSpc>
+                <a:spcPts val="2219"/>
+              </a:lnSpc>
+              <a:buNone/>
+            </a:pPr>
+            <a:r>
+              <a:rPr lang="en-US" sz="1479" spc="-54" kern="0" dirty="0">
+                <a:solidFill>
+                  <a:srgbClr val="64748B"/>
+                </a:solidFill>
+                <a:latin typeface="Malgun Gothic" pitchFamily="34" charset="0"/>
+                <a:ea typeface="Malgun Gothic" pitchFamily="34" charset="-122"/>
+                <a:cs typeface="Malgun Gothic" pitchFamily="34" charset="-120"/>
+              </a:rPr>
+              <a:t>CORRESPONDING AUTHOR</a:t>
+            </a:r>
+            <a:endParaRPr lang="en-US" sz="1479" dirty="0"/>
+          </a:p>
+        </p:txBody>
+      </p:sp>
+      <p:sp>
+        <p:nvSpPr>
+          <p:cNvPr id="35" name="Text 33"/>
+          <p:cNvSpPr txBox="1"/>
+          <p:nvPr/>
+        </p:nvSpPr>
+        <p:spPr>
+          <a:xfrm>
+            <a:off x="6953829" y="5536418"/>
+            <a:ext cx="4843028" cy="348021"/>
+          </a:xfrm>
+          <a:prstGeom prst="rect">
+            <a:avLst/>
+          </a:prstGeom>
+          <a:noFill/>
+          <a:ln/>
+        </p:spPr>
+        <p:txBody>
+          <a:bodyPr wrap="none" lIns="0" tIns="0" rIns="0" bIns="0" rtlCol="0" anchor="t"/>
+          <a:lstStyle/>
+          <a:p>
+            <a:pPr algn="l" indent="0" marL="0">
+              <a:lnSpc>
+                <a:spcPts val="2741"/>
+              </a:lnSpc>
+              <a:buNone/>
+            </a:pPr>
+            <a:r>
+              <a:rPr lang="en-US" sz="1827" spc="-54" kern="0" dirty="0">
+                <a:solidFill>
+                  <a:srgbClr val="334155"/>
+                </a:solidFill>
+                <a:latin typeface="Malgun Gothic" pitchFamily="34" charset="0"/>
+                <a:ea typeface="Malgun Gothic" pitchFamily="34" charset="-122"/>
+                <a:cs typeface="Malgun Gothic" pitchFamily="34" charset="-120"/>
+              </a:rPr>
+              <a:t>lead-researcher@ailab.org</a:t>
+            </a:r>
+            <a:endParaRPr lang="en-US" sz="1827" dirty="0"/>
+          </a:p>
+        </p:txBody>
+      </p:sp>
     </p:spTree>
   </p:cSld>
   <p:clrMapOvr>
